--- a/lessons/Day5/A_TextVectors_RAG_compressed.pptx
+++ b/lessons/Day5/A_TextVectors_RAG_compressed.pptx
@@ -5,7 +5,7 @@
     <p:sldMasterId id="2147483660" r:id="rId1"/>
   </p:sldMasterIdLst>
   <p:notesMasterIdLst>
-    <p:notesMasterId r:id="rId34"/>
+    <p:notesMasterId r:id="rId36"/>
   </p:notesMasterIdLst>
   <p:sldIdLst>
     <p:sldId id="906" r:id="rId2"/>
@@ -32,14 +32,16 @@
     <p:sldId id="929" r:id="rId23"/>
     <p:sldId id="935" r:id="rId24"/>
     <p:sldId id="936" r:id="rId25"/>
-    <p:sldId id="928" r:id="rId26"/>
-    <p:sldId id="931" r:id="rId27"/>
-    <p:sldId id="930" r:id="rId28"/>
-    <p:sldId id="932" r:id="rId29"/>
-    <p:sldId id="934" r:id="rId30"/>
-    <p:sldId id="933" r:id="rId31"/>
+    <p:sldId id="939" r:id="rId26"/>
+    <p:sldId id="940" r:id="rId27"/>
+    <p:sldId id="932" r:id="rId28"/>
+    <p:sldId id="934" r:id="rId29"/>
+    <p:sldId id="933" r:id="rId30"/>
+    <p:sldId id="938" r:id="rId31"/>
     <p:sldId id="937" r:id="rId32"/>
-    <p:sldId id="938" r:id="rId33"/>
+    <p:sldId id="930" r:id="rId33"/>
+    <p:sldId id="928" r:id="rId34"/>
+    <p:sldId id="931" r:id="rId35"/>
   </p:sldIdLst>
   <p:sldSz cx="9144000" cy="6858000" type="screen4x3"/>
   <p:notesSz cx="6858000" cy="9144000"/>
@@ -245,7 +247,7 @@
           <a:p>
             <a:fld id="{B0C0A60C-850A-4EA4-9C14-A8FE98B94505}" type="datetimeFigureOut">
               <a:rPr lang="en-US" smtClean="0"/>
-              <a:t>6/26/25</a:t>
+              <a:t>6/11/26</a:t>
             </a:fld>
             <a:endParaRPr lang="en-US"/>
           </a:p>
@@ -1052,7 +1054,7 @@
           <a:p>
             <a:fld id="{5738B90E-0779-4C36-915C-6F05FCD89456}" type="datetime1">
               <a:rPr lang="en-US" smtClean="0"/>
-              <a:t>6/26/25</a:t>
+              <a:t>6/11/26</a:t>
             </a:fld>
             <a:endParaRPr lang="en-US"/>
           </a:p>
@@ -1159,7 +1161,7 @@
 </p:sldLayout>
 </file>
 
-<file path=ppt/slideLayouts/slideLayout6.xml><?xml version="1.0" encoding="utf-8"?>
+<file path=ppt/slideLayouts/slideLayout2.xml><?xml version="1.0" encoding="utf-8"?>
 <p:sldLayout xmlns:a="http://schemas.openxmlformats.org/drawingml/2006/main" xmlns:r="http://schemas.openxmlformats.org/officeDocument/2006/relationships" xmlns:p="http://schemas.openxmlformats.org/presentationml/2006/main" preserve="1" userDrawn="1">
   <p:cSld name="Title Only">
     <p:spTree>
@@ -1193,7 +1195,7 @@
           <a:p>
             <a:fld id="{6700A58B-DD98-43D0-B791-721480A02982}" type="datetime1">
               <a:rPr lang="en-US" smtClean="0"/>
-              <a:t>6/26/25</a:t>
+              <a:t>6/11/26</a:t>
             </a:fld>
             <a:endParaRPr lang="en-US"/>
           </a:p>
@@ -1366,511 +1368,511 @@
 </file>
 
 <file path=ppt/slideMasters/slideMaster1.xml><?xml version="1.0" encoding="utf-8"?>
-<ns0:sldMaster xmlns:ns0="http://schemas.openxmlformats.org/presentationml/2006/main" xmlns:ns1="http://schemas.openxmlformats.org/drawingml/2006/main" xmlns:ns2="http://schemas.microsoft.com/office/powerpoint/2010/main" xmlns:ns3="http://schemas.openxmlformats.org/officeDocument/2006/relationships">
-  <ns0:cSld>
-    <ns0:bg>
-      <ns0:bgRef idx="1001">
-        <ns1:schemeClr val="bg1"/>
-      </ns0:bgRef>
-    </ns0:bg>
-    <ns0:spTree>
-      <ns0:nvGrpSpPr>
-        <ns0:cNvPr id="1" name=""/>
-        <ns0:cNvGrpSpPr/>
-        <ns0:nvPr/>
-      </ns0:nvGrpSpPr>
-      <ns0:grpSpPr>
-        <ns1:xfrm>
-          <ns1:off x="0" y="0"/>
-          <ns1:ext cx="0" cy="0"/>
-          <ns1:chOff x="0" y="0"/>
-          <ns1:chExt cx="0" cy="0"/>
-        </ns1:xfrm>
-      </ns0:grpSpPr>
-      <ns0:sp>
-        <ns0:nvSpPr>
-          <ns0:cNvPr id="3" name="Text Placeholder 2"/>
-          <ns0:cNvSpPr>
-            <ns1:spLocks noGrp="1"/>
-          </ns0:cNvSpPr>
-          <ns0:nvPr>
-            <ns0:ph type="body" idx="1"/>
-          </ns0:nvPr>
-        </ns0:nvSpPr>
-        <ns0:spPr>
-          <ns1:xfrm>
-            <ns1:off x="628650" y="1108176"/>
-            <ns1:ext cx="7886700" cy="5120640"/>
-          </ns1:xfrm>
-          <ns1:prstGeom prst="rect">
-            <ns1:avLst/>
-          </ns1:prstGeom>
-        </ns0:spPr>
-        <ns0:txBody>
-          <ns1:bodyPr vert="horz" lIns="91440" tIns="45720" rIns="91440" bIns="45720" rtlCol="0">
-            <ns1:normAutofit/>
-          </ns1:bodyPr>
-          <ns1:lstStyle/>
-          <ns1:p>
-            <ns1:pPr lvl="0"/>
-            <ns1:r>
-              <ns1:rPr lang="en-US"/>
-              <ns1:t>Click to edit Master text styles</ns1:t>
-            </ns1:r>
-          </ns1:p>
-          <ns1:p>
-            <ns1:pPr lvl="1"/>
-            <ns1:r>
-              <ns1:rPr lang="en-US"/>
-              <ns1:t>Second level</ns1:t>
-            </ns1:r>
-          </ns1:p>
-          <ns1:p>
-            <ns1:pPr lvl="2"/>
-            <ns1:r>
-              <ns1:rPr lang="en-US"/>
-              <ns1:t>Third level</ns1:t>
-            </ns1:r>
-          </ns1:p>
-          <ns1:p>
-            <ns1:pPr lvl="3"/>
-            <ns1:r>
-              <ns1:rPr lang="en-US"/>
-              <ns1:t>Fourth level</ns1:t>
-            </ns1:r>
-          </ns1:p>
-          <ns1:p>
-            <ns1:pPr lvl="4"/>
-            <ns1:r>
-              <ns1:rPr lang="en-US"/>
-              <ns1:t>Fifth level</ns1:t>
-            </ns1:r>
-          </ns1:p>
-        </ns0:txBody>
-      </ns0:sp>
-      <ns0:sp>
-        <ns0:nvSpPr>
-          <ns0:cNvPr id="4" name="Date Placeholder 3"/>
-          <ns0:cNvSpPr>
-            <ns1:spLocks noGrp="1"/>
-          </ns0:cNvSpPr>
-          <ns0:nvPr>
-            <ns0:ph type="dt" sz="half" idx="2"/>
-          </ns0:nvPr>
-        </ns0:nvSpPr>
-        <ns0:spPr>
-          <ns1:xfrm>
-            <ns1:off x="628650" y="6356351"/>
-            <ns1:ext cx="2057400" cy="365125"/>
-          </ns1:xfrm>
-          <ns1:prstGeom prst="rect">
-            <ns1:avLst/>
-          </ns1:prstGeom>
-        </ns0:spPr>
-        <ns0:txBody>
-          <ns1:bodyPr vert="horz" lIns="91440" tIns="45720" rIns="91440" bIns="45720" rtlCol="0" anchor="ctr"/>
-          <ns1:lstStyle>
-            <ns1:lvl1pPr algn="l">
-              <ns1:defRPr sz="900">
-                <ns1:solidFill>
-                  <ns1:schemeClr val="tx1">
-                    <ns1:tint val="75000"/>
-                  </ns1:schemeClr>
-                </ns1:solidFill>
-              </ns1:defRPr>
-            </ns1:lvl1pPr>
-          </ns1:lstStyle>
-          <ns1:p>
-            <ns1:fld id="{08437B94-E2BF-44DC-ADC5-B05FC9934E9D}" type="datetime1">
-              <ns1:rPr lang="en-US" smtClean="0"/>
-              <ns1:t>6/26/25</ns1:t>
-            </ns1:fld>
-            <ns1:endParaRPr lang="en-US"/>
-          </ns1:p>
-        </ns0:txBody>
-      </ns0:sp>
-      <ns0:sp>
-        <ns0:nvSpPr>
-          <ns0:cNvPr id="5" name="Footer Placeholder 4"/>
-          <ns0:cNvSpPr>
-            <ns1:spLocks noGrp="1"/>
-          </ns0:cNvSpPr>
-          <ns0:nvPr>
-            <ns0:ph type="ftr" sz="quarter" idx="3"/>
-          </ns0:nvPr>
-        </ns0:nvSpPr>
-        <ns0:spPr>
-          <ns1:xfrm>
-            <ns1:off x="3028950" y="6356351"/>
-            <ns1:ext cx="3086100" cy="365125"/>
-          </ns1:xfrm>
-          <ns1:prstGeom prst="rect">
-            <ns1:avLst/>
-          </ns1:prstGeom>
-        </ns0:spPr>
-        <ns0:txBody>
-          <ns1:bodyPr vert="horz" lIns="91440" tIns="45720" rIns="91440" bIns="45720" rtlCol="0" anchor="ctr"/>
-          <ns1:lstStyle>
-            <ns1:lvl1pPr algn="ctr">
-              <ns1:defRPr sz="900">
-                <ns1:solidFill>
-                  <ns1:schemeClr val="tx1">
-                    <ns1:tint val="75000"/>
-                  </ns1:schemeClr>
-                </ns1:solidFill>
-              </ns1:defRPr>
-            </ns1:lvl1pPr>
-          </ns1:lstStyle>
-          <ns1:p>
-            <ns1:r>
-              <ns1:rPr lang="en-US" dirty="0"/>
-              <ns1:t>Kwartler</ns1:t>
-            </ns1:r>
-          </ns1:p>
-        </ns0:txBody>
-      </ns0:sp>
-      <ns0:sp>
-        <ns0:nvSpPr>
-          <ns0:cNvPr id="8" name="Slide Number Placeholder 5"/>
-          <ns0:cNvSpPr>
-            <ns1:spLocks noGrp="1"/>
-          </ns0:cNvSpPr>
-          <ns0:nvPr>
-            <ns0:ph type="sldNum" sz="quarter" idx="4"/>
-          </ns0:nvPr>
-        </ns0:nvSpPr>
-        <ns0:spPr>
-          <ns1:xfrm>
-            <ns1:off x="7245743" y="6356351"/>
-            <ns1:ext cx="857250" cy="365125"/>
-          </ns1:xfrm>
-          <ns1:prstGeom prst="rect">
-            <ns1:avLst/>
-          </ns1:prstGeom>
-        </ns0:spPr>
-        <ns0:txBody>
-          <ns1:bodyPr/>
-          <ns1:lstStyle>
-            <ns1:lvl1pPr>
-              <ns1:lnSpc>
-                <ns1:spcPct val="200000"/>
-              </ns1:lnSpc>
-              <ns1:defRPr lang="en-US" sz="900" kern="1200" smtClean="0">
-                <ns1:solidFill>
-                  <ns1:schemeClr val="tx1">
-                    <ns1:tint val="75000"/>
-                  </ns1:schemeClr>
-                </ns1:solidFill>
-                <ns1:latin typeface="+mn-lt"/>
-                <ns1:ea typeface="+mn-ea"/>
-                <ns1:cs typeface="+mn-cs"/>
-              </ns1:defRPr>
-            </ns1:lvl1pPr>
-          </ns1:lstStyle>
-          <ns1:p>
-            <ns1:fld id="{37290FF7-652B-4475-AEAB-8B1A5D23AE09}" type="slidenum">
-              <ns1:rPr lang="en-US" smtClean="0"/>
-              <ns1:pPr/>
-              <ns1:t>‹#›</ns1:t>
-            </ns1:fld>
-            <ns1:endParaRPr lang="en-US" dirty="0"/>
-          </ns1:p>
-        </ns0:txBody>
-      </ns0:sp>
-    </ns0:spTree>
-    <ns0:extLst>
-      <ns0:ext uri="{BB962C8B-B14F-4D97-AF65-F5344CB8AC3E}">
-        <ns2:creationId val="3290209602"/>
-      </ns0:ext>
-    </ns0:extLst>
-  </ns0:cSld>
-  <ns0:clrMap bg1="lt1" tx1="dk1" bg2="lt2" tx2="dk2" accent1="accent1" accent2="accent2" accent3="accent3" accent4="accent4" accent5="accent5" accent6="accent6" hlink="hlink" folHlink="folHlink"/>
-  <ns0:sldLayoutIdLst>
-    <ns0:sldLayoutId id="2147483661" ns3:id="rId1"/>
-    <ns0:sldLayoutId id="2147483666" ns3:id="rId6"/>
-  </ns0:sldLayoutIdLst>
-  <ns0:hf hdr="0"/>
-  <ns0:txStyles>
-    <ns0:titleStyle>
-      <ns1:lvl1pPr algn="l" defTabSz="685800" rtl="0" eaLnBrk="1" latinLnBrk="0" hangingPunct="1">
-        <ns1:lnSpc>
-          <ns1:spcPct val="90000"/>
-        </ns1:lnSpc>
-        <ns1:spcBef>
-          <ns1:spcPct val="0"/>
-        </ns1:spcBef>
-        <ns1:buNone/>
-        <ns1:defRPr sz="3300" kern="1200">
-          <ns1:solidFill>
-            <ns1:schemeClr val="tx1"/>
-          </ns1:solidFill>
-          <ns1:latin typeface="+mj-lt"/>
-          <ns1:ea typeface="+mj-ea"/>
-          <ns1:cs typeface="+mj-cs"/>
-        </ns1:defRPr>
-      </ns1:lvl1pPr>
-    </ns0:titleStyle>
-    <ns0:bodyStyle>
-      <ns1:lvl1pPr marL="171450" indent="-171450" algn="l" defTabSz="685800" rtl="0" eaLnBrk="1" latinLnBrk="0" hangingPunct="1">
-        <ns1:lnSpc>
-          <ns1:spcPct val="90000"/>
-        </ns1:lnSpc>
-        <ns1:spcBef>
-          <ns1:spcPts val="750"/>
-        </ns1:spcBef>
-        <ns1:buFont typeface="Arial" panose="020B0604020202020204" pitchFamily="34" charset="0"/>
-        <ns1:buChar char="•"/>
-        <ns1:defRPr sz="2100" kern="1200">
-          <ns1:solidFill>
-            <ns1:schemeClr val="tx1"/>
-          </ns1:solidFill>
-          <ns1:latin typeface="+mn-lt"/>
-          <ns1:ea typeface="+mn-ea"/>
-          <ns1:cs typeface="+mn-cs"/>
-        </ns1:defRPr>
-      </ns1:lvl1pPr>
-      <ns1:lvl2pPr marL="514350" indent="-171450" algn="l" defTabSz="685800" rtl="0" eaLnBrk="1" latinLnBrk="0" hangingPunct="1">
-        <ns1:lnSpc>
-          <ns1:spcPct val="90000"/>
-        </ns1:lnSpc>
-        <ns1:spcBef>
-          <ns1:spcPts val="375"/>
-        </ns1:spcBef>
-        <ns1:buFont typeface="Arial" panose="020B0604020202020204" pitchFamily="34" charset="0"/>
-        <ns1:buChar char="•"/>
-        <ns1:defRPr sz="1800" kern="1200">
-          <ns1:solidFill>
-            <ns1:schemeClr val="tx1"/>
-          </ns1:solidFill>
-          <ns1:latin typeface="+mn-lt"/>
-          <ns1:ea typeface="+mn-ea"/>
-          <ns1:cs typeface="+mn-cs"/>
-        </ns1:defRPr>
-      </ns1:lvl2pPr>
-      <ns1:lvl3pPr marL="857250" indent="-171450" algn="l" defTabSz="685800" rtl="0" eaLnBrk="1" latinLnBrk="0" hangingPunct="1">
-        <ns1:lnSpc>
-          <ns1:spcPct val="90000"/>
-        </ns1:lnSpc>
-        <ns1:spcBef>
-          <ns1:spcPts val="375"/>
-        </ns1:spcBef>
-        <ns1:buFont typeface="Arial" panose="020B0604020202020204" pitchFamily="34" charset="0"/>
-        <ns1:buChar char="•"/>
-        <ns1:defRPr sz="1500" kern="1200">
-          <ns1:solidFill>
-            <ns1:schemeClr val="tx1"/>
-          </ns1:solidFill>
-          <ns1:latin typeface="+mn-lt"/>
-          <ns1:ea typeface="+mn-ea"/>
-          <ns1:cs typeface="+mn-cs"/>
-        </ns1:defRPr>
-      </ns1:lvl3pPr>
-      <ns1:lvl4pPr marL="1200150" indent="-171450" algn="l" defTabSz="685800" rtl="0" eaLnBrk="1" latinLnBrk="0" hangingPunct="1">
-        <ns1:lnSpc>
-          <ns1:spcPct val="90000"/>
-        </ns1:lnSpc>
-        <ns1:spcBef>
-          <ns1:spcPts val="375"/>
-        </ns1:spcBef>
-        <ns1:buFont typeface="Arial" panose="020B0604020202020204" pitchFamily="34" charset="0"/>
-        <ns1:buChar char="•"/>
-        <ns1:defRPr sz="1350" kern="1200">
-          <ns1:solidFill>
-            <ns1:schemeClr val="tx1"/>
-          </ns1:solidFill>
-          <ns1:latin typeface="+mn-lt"/>
-          <ns1:ea typeface="+mn-ea"/>
-          <ns1:cs typeface="+mn-cs"/>
-        </ns1:defRPr>
-      </ns1:lvl4pPr>
-      <ns1:lvl5pPr marL="1543050" indent="-171450" algn="l" defTabSz="685800" rtl="0" eaLnBrk="1" latinLnBrk="0" hangingPunct="1">
-        <ns1:lnSpc>
-          <ns1:spcPct val="90000"/>
-        </ns1:lnSpc>
-        <ns1:spcBef>
-          <ns1:spcPts val="375"/>
-        </ns1:spcBef>
-        <ns1:buFont typeface="Arial" panose="020B0604020202020204" pitchFamily="34" charset="0"/>
-        <ns1:buChar char="•"/>
-        <ns1:defRPr sz="1350" kern="1200">
-          <ns1:solidFill>
-            <ns1:schemeClr val="tx1"/>
-          </ns1:solidFill>
-          <ns1:latin typeface="+mn-lt"/>
-          <ns1:ea typeface="+mn-ea"/>
-          <ns1:cs typeface="+mn-cs"/>
-        </ns1:defRPr>
-      </ns1:lvl5pPr>
-      <ns1:lvl6pPr marL="1885950" indent="-171450" algn="l" defTabSz="685800" rtl="0" eaLnBrk="1" latinLnBrk="0" hangingPunct="1">
-        <ns1:lnSpc>
-          <ns1:spcPct val="90000"/>
-        </ns1:lnSpc>
-        <ns1:spcBef>
-          <ns1:spcPts val="375"/>
-        </ns1:spcBef>
-        <ns1:buFont typeface="Arial" panose="020B0604020202020204" pitchFamily="34" charset="0"/>
-        <ns1:buChar char="•"/>
-        <ns1:defRPr sz="1350" kern="1200">
-          <ns1:solidFill>
-            <ns1:schemeClr val="tx1"/>
-          </ns1:solidFill>
-          <ns1:latin typeface="+mn-lt"/>
-          <ns1:ea typeface="+mn-ea"/>
-          <ns1:cs typeface="+mn-cs"/>
-        </ns1:defRPr>
-      </ns1:lvl6pPr>
-      <ns1:lvl7pPr marL="2228850" indent="-171450" algn="l" defTabSz="685800" rtl="0" eaLnBrk="1" latinLnBrk="0" hangingPunct="1">
-        <ns1:lnSpc>
-          <ns1:spcPct val="90000"/>
-        </ns1:lnSpc>
-        <ns1:spcBef>
-          <ns1:spcPts val="375"/>
-        </ns1:spcBef>
-        <ns1:buFont typeface="Arial" panose="020B0604020202020204" pitchFamily="34" charset="0"/>
-        <ns1:buChar char="•"/>
-        <ns1:defRPr sz="1350" kern="1200">
-          <ns1:solidFill>
-            <ns1:schemeClr val="tx1"/>
-          </ns1:solidFill>
-          <ns1:latin typeface="+mn-lt"/>
-          <ns1:ea typeface="+mn-ea"/>
-          <ns1:cs typeface="+mn-cs"/>
-        </ns1:defRPr>
-      </ns1:lvl7pPr>
-      <ns1:lvl8pPr marL="2571750" indent="-171450" algn="l" defTabSz="685800" rtl="0" eaLnBrk="1" latinLnBrk="0" hangingPunct="1">
-        <ns1:lnSpc>
-          <ns1:spcPct val="90000"/>
-        </ns1:lnSpc>
-        <ns1:spcBef>
-          <ns1:spcPts val="375"/>
-        </ns1:spcBef>
-        <ns1:buFont typeface="Arial" panose="020B0604020202020204" pitchFamily="34" charset="0"/>
-        <ns1:buChar char="•"/>
-        <ns1:defRPr sz="1350" kern="1200">
-          <ns1:solidFill>
-            <ns1:schemeClr val="tx1"/>
-          </ns1:solidFill>
-          <ns1:latin typeface="+mn-lt"/>
-          <ns1:ea typeface="+mn-ea"/>
-          <ns1:cs typeface="+mn-cs"/>
-        </ns1:defRPr>
-      </ns1:lvl8pPr>
-      <ns1:lvl9pPr marL="2914650" indent="-171450" algn="l" defTabSz="685800" rtl="0" eaLnBrk="1" latinLnBrk="0" hangingPunct="1">
-        <ns1:lnSpc>
-          <ns1:spcPct val="90000"/>
-        </ns1:lnSpc>
-        <ns1:spcBef>
-          <ns1:spcPts val="375"/>
-        </ns1:spcBef>
-        <ns1:buFont typeface="Arial" panose="020B0604020202020204" pitchFamily="34" charset="0"/>
-        <ns1:buChar char="•"/>
-        <ns1:defRPr sz="1350" kern="1200">
-          <ns1:solidFill>
-            <ns1:schemeClr val="tx1"/>
-          </ns1:solidFill>
-          <ns1:latin typeface="+mn-lt"/>
-          <ns1:ea typeface="+mn-ea"/>
-          <ns1:cs typeface="+mn-cs"/>
-        </ns1:defRPr>
-      </ns1:lvl9pPr>
-    </ns0:bodyStyle>
-    <ns0:otherStyle>
-      <ns1:defPPr>
-        <ns1:defRPr lang="en-US"/>
-      </ns1:defPPr>
-      <ns1:lvl1pPr marL="0" algn="l" defTabSz="685800" rtl="0" eaLnBrk="1" latinLnBrk="0" hangingPunct="1">
-        <ns1:defRPr sz="1350" kern="1200">
-          <ns1:solidFill>
-            <ns1:schemeClr val="tx1"/>
-          </ns1:solidFill>
-          <ns1:latin typeface="+mn-lt"/>
-          <ns1:ea typeface="+mn-ea"/>
-          <ns1:cs typeface="+mn-cs"/>
-        </ns1:defRPr>
-      </ns1:lvl1pPr>
-      <ns1:lvl2pPr marL="342900" algn="l" defTabSz="685800" rtl="0" eaLnBrk="1" latinLnBrk="0" hangingPunct="1">
-        <ns1:defRPr sz="1350" kern="1200">
-          <ns1:solidFill>
-            <ns1:schemeClr val="tx1"/>
-          </ns1:solidFill>
-          <ns1:latin typeface="+mn-lt"/>
-          <ns1:ea typeface="+mn-ea"/>
-          <ns1:cs typeface="+mn-cs"/>
-        </ns1:defRPr>
-      </ns1:lvl2pPr>
-      <ns1:lvl3pPr marL="685800" algn="l" defTabSz="685800" rtl="0" eaLnBrk="1" latinLnBrk="0" hangingPunct="1">
-        <ns1:defRPr sz="1350" kern="1200">
-          <ns1:solidFill>
-            <ns1:schemeClr val="tx1"/>
-          </ns1:solidFill>
-          <ns1:latin typeface="+mn-lt"/>
-          <ns1:ea typeface="+mn-ea"/>
-          <ns1:cs typeface="+mn-cs"/>
-        </ns1:defRPr>
-      </ns1:lvl3pPr>
-      <ns1:lvl4pPr marL="1028700" algn="l" defTabSz="685800" rtl="0" eaLnBrk="1" latinLnBrk="0" hangingPunct="1">
-        <ns1:defRPr sz="1350" kern="1200">
-          <ns1:solidFill>
-            <ns1:schemeClr val="tx1"/>
-          </ns1:solidFill>
-          <ns1:latin typeface="+mn-lt"/>
-          <ns1:ea typeface="+mn-ea"/>
-          <ns1:cs typeface="+mn-cs"/>
-        </ns1:defRPr>
-      </ns1:lvl4pPr>
-      <ns1:lvl5pPr marL="1371600" algn="l" defTabSz="685800" rtl="0" eaLnBrk="1" latinLnBrk="0" hangingPunct="1">
-        <ns1:defRPr sz="1350" kern="1200">
-          <ns1:solidFill>
-            <ns1:schemeClr val="tx1"/>
-          </ns1:solidFill>
-          <ns1:latin typeface="+mn-lt"/>
-          <ns1:ea typeface="+mn-ea"/>
-          <ns1:cs typeface="+mn-cs"/>
-        </ns1:defRPr>
-      </ns1:lvl5pPr>
-      <ns1:lvl6pPr marL="1714500" algn="l" defTabSz="685800" rtl="0" eaLnBrk="1" latinLnBrk="0" hangingPunct="1">
-        <ns1:defRPr sz="1350" kern="1200">
-          <ns1:solidFill>
-            <ns1:schemeClr val="tx1"/>
-          </ns1:solidFill>
-          <ns1:latin typeface="+mn-lt"/>
-          <ns1:ea typeface="+mn-ea"/>
-          <ns1:cs typeface="+mn-cs"/>
-        </ns1:defRPr>
-      </ns1:lvl6pPr>
-      <ns1:lvl7pPr marL="2057400" algn="l" defTabSz="685800" rtl="0" eaLnBrk="1" latinLnBrk="0" hangingPunct="1">
-        <ns1:defRPr sz="1350" kern="1200">
-          <ns1:solidFill>
-            <ns1:schemeClr val="tx1"/>
-          </ns1:solidFill>
-          <ns1:latin typeface="+mn-lt"/>
-          <ns1:ea typeface="+mn-ea"/>
-          <ns1:cs typeface="+mn-cs"/>
-        </ns1:defRPr>
-      </ns1:lvl7pPr>
-      <ns1:lvl8pPr marL="2400300" algn="l" defTabSz="685800" rtl="0" eaLnBrk="1" latinLnBrk="0" hangingPunct="1">
-        <ns1:defRPr sz="1350" kern="1200">
-          <ns1:solidFill>
-            <ns1:schemeClr val="tx1"/>
-          </ns1:solidFill>
-          <ns1:latin typeface="+mn-lt"/>
-          <ns1:ea typeface="+mn-ea"/>
-          <ns1:cs typeface="+mn-cs"/>
-        </ns1:defRPr>
-      </ns1:lvl8pPr>
-      <ns1:lvl9pPr marL="2743200" algn="l" defTabSz="685800" rtl="0" eaLnBrk="1" latinLnBrk="0" hangingPunct="1">
-        <ns1:defRPr sz="1350" kern="1200">
-          <ns1:solidFill>
-            <ns1:schemeClr val="tx1"/>
-          </ns1:solidFill>
-          <ns1:latin typeface="+mn-lt"/>
-          <ns1:ea typeface="+mn-ea"/>
-          <ns1:cs typeface="+mn-cs"/>
-        </ns1:defRPr>
-      </ns1:lvl9pPr>
-    </ns0:otherStyle>
-  </ns0:txStyles>
-</ns0:sldMaster>
+<p:sldMaster xmlns:a="http://schemas.openxmlformats.org/drawingml/2006/main" xmlns:r="http://schemas.openxmlformats.org/officeDocument/2006/relationships" xmlns:p="http://schemas.openxmlformats.org/presentationml/2006/main">
+  <p:cSld>
+    <p:bg>
+      <p:bgRef idx="1001">
+        <a:schemeClr val="bg1"/>
+      </p:bgRef>
+    </p:bg>
+    <p:spTree>
+      <p:nvGrpSpPr>
+        <p:cNvPr id="1" name=""/>
+        <p:cNvGrpSpPr/>
+        <p:nvPr/>
+      </p:nvGrpSpPr>
+      <p:grpSpPr>
+        <a:xfrm>
+          <a:off x="0" y="0"/>
+          <a:ext cx="0" cy="0"/>
+          <a:chOff x="0" y="0"/>
+          <a:chExt cx="0" cy="0"/>
+        </a:xfrm>
+      </p:grpSpPr>
+      <p:sp>
+        <p:nvSpPr>
+          <p:cNvPr id="3" name="Text Placeholder 2"/>
+          <p:cNvSpPr>
+            <a:spLocks noGrp="1"/>
+          </p:cNvSpPr>
+          <p:nvPr>
+            <p:ph type="body" idx="1"/>
+          </p:nvPr>
+        </p:nvSpPr>
+        <p:spPr>
+          <a:xfrm>
+            <a:off x="628650" y="1108176"/>
+            <a:ext cx="7886700" cy="5120640"/>
+          </a:xfrm>
+          <a:prstGeom prst="rect">
+            <a:avLst/>
+          </a:prstGeom>
+        </p:spPr>
+        <p:txBody>
+          <a:bodyPr vert="horz" lIns="91440" tIns="45720" rIns="91440" bIns="45720" rtlCol="0">
+            <a:normAutofit/>
+          </a:bodyPr>
+          <a:lstStyle/>
+          <a:p>
+            <a:pPr lvl="0"/>
+            <a:r>
+              <a:rPr lang="en-US"/>
+              <a:t>Click to edit Master text styles</a:t>
+            </a:r>
+          </a:p>
+          <a:p>
+            <a:pPr lvl="1"/>
+            <a:r>
+              <a:rPr lang="en-US"/>
+              <a:t>Second level</a:t>
+            </a:r>
+          </a:p>
+          <a:p>
+            <a:pPr lvl="2"/>
+            <a:r>
+              <a:rPr lang="en-US"/>
+              <a:t>Third level</a:t>
+            </a:r>
+          </a:p>
+          <a:p>
+            <a:pPr lvl="3"/>
+            <a:r>
+              <a:rPr lang="en-US"/>
+              <a:t>Fourth level</a:t>
+            </a:r>
+          </a:p>
+          <a:p>
+            <a:pPr lvl="4"/>
+            <a:r>
+              <a:rPr lang="en-US"/>
+              <a:t>Fifth level</a:t>
+            </a:r>
+          </a:p>
+        </p:txBody>
+      </p:sp>
+      <p:sp>
+        <p:nvSpPr>
+          <p:cNvPr id="4" name="Date Placeholder 3"/>
+          <p:cNvSpPr>
+            <a:spLocks noGrp="1"/>
+          </p:cNvSpPr>
+          <p:nvPr>
+            <p:ph type="dt" sz="half" idx="2"/>
+          </p:nvPr>
+        </p:nvSpPr>
+        <p:spPr>
+          <a:xfrm>
+            <a:off x="628650" y="6356351"/>
+            <a:ext cx="2057400" cy="365125"/>
+          </a:xfrm>
+          <a:prstGeom prst="rect">
+            <a:avLst/>
+          </a:prstGeom>
+        </p:spPr>
+        <p:txBody>
+          <a:bodyPr vert="horz" lIns="91440" tIns="45720" rIns="91440" bIns="45720" rtlCol="0" anchor="ctr"/>
+          <a:lstStyle>
+            <a:lvl1pPr algn="l">
+              <a:defRPr sz="900">
+                <a:solidFill>
+                  <a:schemeClr val="tx1">
+                    <a:tint val="75000"/>
+                  </a:schemeClr>
+                </a:solidFill>
+              </a:defRPr>
+            </a:lvl1pPr>
+          </a:lstStyle>
+          <a:p>
+            <a:fld id="{08437B94-E2BF-44DC-ADC5-B05FC9934E9D}" type="datetime1">
+              <a:rPr lang="en-US" smtClean="0"/>
+              <a:t>6/11/26</a:t>
+            </a:fld>
+            <a:endParaRPr lang="en-US"/>
+          </a:p>
+        </p:txBody>
+      </p:sp>
+      <p:sp>
+        <p:nvSpPr>
+          <p:cNvPr id="5" name="Footer Placeholder 4"/>
+          <p:cNvSpPr>
+            <a:spLocks noGrp="1"/>
+          </p:cNvSpPr>
+          <p:nvPr>
+            <p:ph type="ftr" sz="quarter" idx="3"/>
+          </p:nvPr>
+        </p:nvSpPr>
+        <p:spPr>
+          <a:xfrm>
+            <a:off x="3028950" y="6356351"/>
+            <a:ext cx="3086100" cy="365125"/>
+          </a:xfrm>
+          <a:prstGeom prst="rect">
+            <a:avLst/>
+          </a:prstGeom>
+        </p:spPr>
+        <p:txBody>
+          <a:bodyPr vert="horz" lIns="91440" tIns="45720" rIns="91440" bIns="45720" rtlCol="0" anchor="ctr"/>
+          <a:lstStyle>
+            <a:lvl1pPr algn="ctr">
+              <a:defRPr sz="900">
+                <a:solidFill>
+                  <a:schemeClr val="tx1">
+                    <a:tint val="75000"/>
+                  </a:schemeClr>
+                </a:solidFill>
+              </a:defRPr>
+            </a:lvl1pPr>
+          </a:lstStyle>
+          <a:p>
+            <a:r>
+              <a:rPr lang="en-US" dirty="0"/>
+              <a:t>Kwartler</a:t>
+            </a:r>
+          </a:p>
+        </p:txBody>
+      </p:sp>
+      <p:sp>
+        <p:nvSpPr>
+          <p:cNvPr id="8" name="Slide Number Placeholder 5"/>
+          <p:cNvSpPr>
+            <a:spLocks noGrp="1"/>
+          </p:cNvSpPr>
+          <p:nvPr>
+            <p:ph type="sldNum" sz="quarter" idx="4"/>
+          </p:nvPr>
+        </p:nvSpPr>
+        <p:spPr>
+          <a:xfrm>
+            <a:off x="7245743" y="6356351"/>
+            <a:ext cx="857250" cy="365125"/>
+          </a:xfrm>
+          <a:prstGeom prst="rect">
+            <a:avLst/>
+          </a:prstGeom>
+        </p:spPr>
+        <p:txBody>
+          <a:bodyPr/>
+          <a:lstStyle>
+            <a:lvl1pPr>
+              <a:lnSpc>
+                <a:spcPct val="200000"/>
+              </a:lnSpc>
+              <a:defRPr lang="en-US" sz="900" kern="1200" smtClean="0">
+                <a:solidFill>
+                  <a:schemeClr val="tx1">
+                    <a:tint val="75000"/>
+                  </a:schemeClr>
+                </a:solidFill>
+                <a:latin typeface="+mn-lt"/>
+                <a:ea typeface="+mn-ea"/>
+                <a:cs typeface="+mn-cs"/>
+              </a:defRPr>
+            </a:lvl1pPr>
+          </a:lstStyle>
+          <a:p>
+            <a:fld id="{37290FF7-652B-4475-AEAB-8B1A5D23AE09}" type="slidenum">
+              <a:rPr lang="en-US" smtClean="0"/>
+              <a:pPr/>
+              <a:t>‹#›</a:t>
+            </a:fld>
+            <a:endParaRPr lang="en-US" dirty="0"/>
+          </a:p>
+        </p:txBody>
+      </p:sp>
+    </p:spTree>
+    <p:extLst>
+      <p:ext uri="{BB962C8B-B14F-4D97-AF65-F5344CB8AC3E}">
+        <p14:creationId xmlns:p14="http://schemas.microsoft.com/office/powerpoint/2010/main" val="3290209602"/>
+      </p:ext>
+    </p:extLst>
+  </p:cSld>
+  <p:clrMap bg1="lt1" tx1="dk1" bg2="lt2" tx2="dk2" accent1="accent1" accent2="accent2" accent3="accent3" accent4="accent4" accent5="accent5" accent6="accent6" hlink="hlink" folHlink="folHlink"/>
+  <p:sldLayoutIdLst>
+    <p:sldLayoutId id="2147483661" r:id="rId1"/>
+    <p:sldLayoutId id="2147483666" r:id="rId2"/>
+  </p:sldLayoutIdLst>
+  <p:hf hdr="0"/>
+  <p:txStyles>
+    <p:titleStyle>
+      <a:lvl1pPr algn="l" defTabSz="685800" rtl="0" eaLnBrk="1" latinLnBrk="0" hangingPunct="1">
+        <a:lnSpc>
+          <a:spcPct val="90000"/>
+        </a:lnSpc>
+        <a:spcBef>
+          <a:spcPct val="0"/>
+        </a:spcBef>
+        <a:buNone/>
+        <a:defRPr sz="3300" kern="1200">
+          <a:solidFill>
+            <a:schemeClr val="tx1"/>
+          </a:solidFill>
+          <a:latin typeface="+mj-lt"/>
+          <a:ea typeface="+mj-ea"/>
+          <a:cs typeface="+mj-cs"/>
+        </a:defRPr>
+      </a:lvl1pPr>
+    </p:titleStyle>
+    <p:bodyStyle>
+      <a:lvl1pPr marL="171450" indent="-171450" algn="l" defTabSz="685800" rtl="0" eaLnBrk="1" latinLnBrk="0" hangingPunct="1">
+        <a:lnSpc>
+          <a:spcPct val="90000"/>
+        </a:lnSpc>
+        <a:spcBef>
+          <a:spcPts val="750"/>
+        </a:spcBef>
+        <a:buFont typeface="Arial" panose="020B0604020202020204" pitchFamily="34" charset="0"/>
+        <a:buChar char="•"/>
+        <a:defRPr sz="2100" kern="1200">
+          <a:solidFill>
+            <a:schemeClr val="tx1"/>
+          </a:solidFill>
+          <a:latin typeface="+mn-lt"/>
+          <a:ea typeface="+mn-ea"/>
+          <a:cs typeface="+mn-cs"/>
+        </a:defRPr>
+      </a:lvl1pPr>
+      <a:lvl2pPr marL="514350" indent="-171450" algn="l" defTabSz="685800" rtl="0" eaLnBrk="1" latinLnBrk="0" hangingPunct="1">
+        <a:lnSpc>
+          <a:spcPct val="90000"/>
+        </a:lnSpc>
+        <a:spcBef>
+          <a:spcPts val="375"/>
+        </a:spcBef>
+        <a:buFont typeface="Arial" panose="020B0604020202020204" pitchFamily="34" charset="0"/>
+        <a:buChar char="•"/>
+        <a:defRPr sz="1800" kern="1200">
+          <a:solidFill>
+            <a:schemeClr val="tx1"/>
+          </a:solidFill>
+          <a:latin typeface="+mn-lt"/>
+          <a:ea typeface="+mn-ea"/>
+          <a:cs typeface="+mn-cs"/>
+        </a:defRPr>
+      </a:lvl2pPr>
+      <a:lvl3pPr marL="857250" indent="-171450" algn="l" defTabSz="685800" rtl="0" eaLnBrk="1" latinLnBrk="0" hangingPunct="1">
+        <a:lnSpc>
+          <a:spcPct val="90000"/>
+        </a:lnSpc>
+        <a:spcBef>
+          <a:spcPts val="375"/>
+        </a:spcBef>
+        <a:buFont typeface="Arial" panose="020B0604020202020204" pitchFamily="34" charset="0"/>
+        <a:buChar char="•"/>
+        <a:defRPr sz="1500" kern="1200">
+          <a:solidFill>
+            <a:schemeClr val="tx1"/>
+          </a:solidFill>
+          <a:latin typeface="+mn-lt"/>
+          <a:ea typeface="+mn-ea"/>
+          <a:cs typeface="+mn-cs"/>
+        </a:defRPr>
+      </a:lvl3pPr>
+      <a:lvl4pPr marL="1200150" indent="-171450" algn="l" defTabSz="685800" rtl="0" eaLnBrk="1" latinLnBrk="0" hangingPunct="1">
+        <a:lnSpc>
+          <a:spcPct val="90000"/>
+        </a:lnSpc>
+        <a:spcBef>
+          <a:spcPts val="375"/>
+        </a:spcBef>
+        <a:buFont typeface="Arial" panose="020B0604020202020204" pitchFamily="34" charset="0"/>
+        <a:buChar char="•"/>
+        <a:defRPr sz="1350" kern="1200">
+          <a:solidFill>
+            <a:schemeClr val="tx1"/>
+          </a:solidFill>
+          <a:latin typeface="+mn-lt"/>
+          <a:ea typeface="+mn-ea"/>
+          <a:cs typeface="+mn-cs"/>
+        </a:defRPr>
+      </a:lvl4pPr>
+      <a:lvl5pPr marL="1543050" indent="-171450" algn="l" defTabSz="685800" rtl="0" eaLnBrk="1" latinLnBrk="0" hangingPunct="1">
+        <a:lnSpc>
+          <a:spcPct val="90000"/>
+        </a:lnSpc>
+        <a:spcBef>
+          <a:spcPts val="375"/>
+        </a:spcBef>
+        <a:buFont typeface="Arial" panose="020B0604020202020204" pitchFamily="34" charset="0"/>
+        <a:buChar char="•"/>
+        <a:defRPr sz="1350" kern="1200">
+          <a:solidFill>
+            <a:schemeClr val="tx1"/>
+          </a:solidFill>
+          <a:latin typeface="+mn-lt"/>
+          <a:ea typeface="+mn-ea"/>
+          <a:cs typeface="+mn-cs"/>
+        </a:defRPr>
+      </a:lvl5pPr>
+      <a:lvl6pPr marL="1885950" indent="-171450" algn="l" defTabSz="685800" rtl="0" eaLnBrk="1" latinLnBrk="0" hangingPunct="1">
+        <a:lnSpc>
+          <a:spcPct val="90000"/>
+        </a:lnSpc>
+        <a:spcBef>
+          <a:spcPts val="375"/>
+        </a:spcBef>
+        <a:buFont typeface="Arial" panose="020B0604020202020204" pitchFamily="34" charset="0"/>
+        <a:buChar char="•"/>
+        <a:defRPr sz="1350" kern="1200">
+          <a:solidFill>
+            <a:schemeClr val="tx1"/>
+          </a:solidFill>
+          <a:latin typeface="+mn-lt"/>
+          <a:ea typeface="+mn-ea"/>
+          <a:cs typeface="+mn-cs"/>
+        </a:defRPr>
+      </a:lvl6pPr>
+      <a:lvl7pPr marL="2228850" indent="-171450" algn="l" defTabSz="685800" rtl="0" eaLnBrk="1" latinLnBrk="0" hangingPunct="1">
+        <a:lnSpc>
+          <a:spcPct val="90000"/>
+        </a:lnSpc>
+        <a:spcBef>
+          <a:spcPts val="375"/>
+        </a:spcBef>
+        <a:buFont typeface="Arial" panose="020B0604020202020204" pitchFamily="34" charset="0"/>
+        <a:buChar char="•"/>
+        <a:defRPr sz="1350" kern="1200">
+          <a:solidFill>
+            <a:schemeClr val="tx1"/>
+          </a:solidFill>
+          <a:latin typeface="+mn-lt"/>
+          <a:ea typeface="+mn-ea"/>
+          <a:cs typeface="+mn-cs"/>
+        </a:defRPr>
+      </a:lvl7pPr>
+      <a:lvl8pPr marL="2571750" indent="-171450" algn="l" defTabSz="685800" rtl="0" eaLnBrk="1" latinLnBrk="0" hangingPunct="1">
+        <a:lnSpc>
+          <a:spcPct val="90000"/>
+        </a:lnSpc>
+        <a:spcBef>
+          <a:spcPts val="375"/>
+        </a:spcBef>
+        <a:buFont typeface="Arial" panose="020B0604020202020204" pitchFamily="34" charset="0"/>
+        <a:buChar char="•"/>
+        <a:defRPr sz="1350" kern="1200">
+          <a:solidFill>
+            <a:schemeClr val="tx1"/>
+          </a:solidFill>
+          <a:latin typeface="+mn-lt"/>
+          <a:ea typeface="+mn-ea"/>
+          <a:cs typeface="+mn-cs"/>
+        </a:defRPr>
+      </a:lvl8pPr>
+      <a:lvl9pPr marL="2914650" indent="-171450" algn="l" defTabSz="685800" rtl="0" eaLnBrk="1" latinLnBrk="0" hangingPunct="1">
+        <a:lnSpc>
+          <a:spcPct val="90000"/>
+        </a:lnSpc>
+        <a:spcBef>
+          <a:spcPts val="375"/>
+        </a:spcBef>
+        <a:buFont typeface="Arial" panose="020B0604020202020204" pitchFamily="34" charset="0"/>
+        <a:buChar char="•"/>
+        <a:defRPr sz="1350" kern="1200">
+          <a:solidFill>
+            <a:schemeClr val="tx1"/>
+          </a:solidFill>
+          <a:latin typeface="+mn-lt"/>
+          <a:ea typeface="+mn-ea"/>
+          <a:cs typeface="+mn-cs"/>
+        </a:defRPr>
+      </a:lvl9pPr>
+    </p:bodyStyle>
+    <p:otherStyle>
+      <a:defPPr>
+        <a:defRPr lang="en-US"/>
+      </a:defPPr>
+      <a:lvl1pPr marL="0" algn="l" defTabSz="685800" rtl="0" eaLnBrk="1" latinLnBrk="0" hangingPunct="1">
+        <a:defRPr sz="1350" kern="1200">
+          <a:solidFill>
+            <a:schemeClr val="tx1"/>
+          </a:solidFill>
+          <a:latin typeface="+mn-lt"/>
+          <a:ea typeface="+mn-ea"/>
+          <a:cs typeface="+mn-cs"/>
+        </a:defRPr>
+      </a:lvl1pPr>
+      <a:lvl2pPr marL="342900" algn="l" defTabSz="685800" rtl="0" eaLnBrk="1" latinLnBrk="0" hangingPunct="1">
+        <a:defRPr sz="1350" kern="1200">
+          <a:solidFill>
+            <a:schemeClr val="tx1"/>
+          </a:solidFill>
+          <a:latin typeface="+mn-lt"/>
+          <a:ea typeface="+mn-ea"/>
+          <a:cs typeface="+mn-cs"/>
+        </a:defRPr>
+      </a:lvl2pPr>
+      <a:lvl3pPr marL="685800" algn="l" defTabSz="685800" rtl="0" eaLnBrk="1" latinLnBrk="0" hangingPunct="1">
+        <a:defRPr sz="1350" kern="1200">
+          <a:solidFill>
+            <a:schemeClr val="tx1"/>
+          </a:solidFill>
+          <a:latin typeface="+mn-lt"/>
+          <a:ea typeface="+mn-ea"/>
+          <a:cs typeface="+mn-cs"/>
+        </a:defRPr>
+      </a:lvl3pPr>
+      <a:lvl4pPr marL="1028700" algn="l" defTabSz="685800" rtl="0" eaLnBrk="1" latinLnBrk="0" hangingPunct="1">
+        <a:defRPr sz="1350" kern="1200">
+          <a:solidFill>
+            <a:schemeClr val="tx1"/>
+          </a:solidFill>
+          <a:latin typeface="+mn-lt"/>
+          <a:ea typeface="+mn-ea"/>
+          <a:cs typeface="+mn-cs"/>
+        </a:defRPr>
+      </a:lvl4pPr>
+      <a:lvl5pPr marL="1371600" algn="l" defTabSz="685800" rtl="0" eaLnBrk="1" latinLnBrk="0" hangingPunct="1">
+        <a:defRPr sz="1350" kern="1200">
+          <a:solidFill>
+            <a:schemeClr val="tx1"/>
+          </a:solidFill>
+          <a:latin typeface="+mn-lt"/>
+          <a:ea typeface="+mn-ea"/>
+          <a:cs typeface="+mn-cs"/>
+        </a:defRPr>
+      </a:lvl5pPr>
+      <a:lvl6pPr marL="1714500" algn="l" defTabSz="685800" rtl="0" eaLnBrk="1" latinLnBrk="0" hangingPunct="1">
+        <a:defRPr sz="1350" kern="1200">
+          <a:solidFill>
+            <a:schemeClr val="tx1"/>
+          </a:solidFill>
+          <a:latin typeface="+mn-lt"/>
+          <a:ea typeface="+mn-ea"/>
+          <a:cs typeface="+mn-cs"/>
+        </a:defRPr>
+      </a:lvl6pPr>
+      <a:lvl7pPr marL="2057400" algn="l" defTabSz="685800" rtl="0" eaLnBrk="1" latinLnBrk="0" hangingPunct="1">
+        <a:defRPr sz="1350" kern="1200">
+          <a:solidFill>
+            <a:schemeClr val="tx1"/>
+          </a:solidFill>
+          <a:latin typeface="+mn-lt"/>
+          <a:ea typeface="+mn-ea"/>
+          <a:cs typeface="+mn-cs"/>
+        </a:defRPr>
+      </a:lvl7pPr>
+      <a:lvl8pPr marL="2400300" algn="l" defTabSz="685800" rtl="0" eaLnBrk="1" latinLnBrk="0" hangingPunct="1">
+        <a:defRPr sz="1350" kern="1200">
+          <a:solidFill>
+            <a:schemeClr val="tx1"/>
+          </a:solidFill>
+          <a:latin typeface="+mn-lt"/>
+          <a:ea typeface="+mn-ea"/>
+          <a:cs typeface="+mn-cs"/>
+        </a:defRPr>
+      </a:lvl8pPr>
+      <a:lvl9pPr marL="2743200" algn="l" defTabSz="685800" rtl="0" eaLnBrk="1" latinLnBrk="0" hangingPunct="1">
+        <a:defRPr sz="1350" kern="1200">
+          <a:solidFill>
+            <a:schemeClr val="tx1"/>
+          </a:solidFill>
+          <a:latin typeface="+mn-lt"/>
+          <a:ea typeface="+mn-ea"/>
+          <a:cs typeface="+mn-cs"/>
+        </a:defRPr>
+      </a:lvl9pPr>
+    </p:otherStyle>
+  </p:txStyles>
+</p:sldMaster>
 </file>
 
 <file path=ppt/slides/slide1.xml><?xml version="1.0" encoding="utf-8"?>
@@ -1966,7 +1968,7 @@
           <a:p>
             <a:fld id="{5738B90E-0779-4C36-915C-6F05FCD89456}" type="datetime1">
               <a:rPr lang="en-US" smtClean="0"/>
-              <a:t>6/26/25</a:t>
+              <a:t>6/11/26</a:t>
             </a:fld>
             <a:endParaRPr lang="en-US"/>
           </a:p>
@@ -2090,7 +2092,7 @@
           <a:p>
             <a:fld id="{6700A58B-DD98-43D0-B791-721480A02982}" type="datetime1">
               <a:rPr lang="en-US" smtClean="0"/>
-              <a:t>6/26/25</a:t>
+              <a:t>6/11/26</a:t>
             </a:fld>
             <a:endParaRPr lang="en-US"/>
           </a:p>
@@ -2365,7 +2367,19 @@
             </a:r>
             <a:r>
               <a:rPr lang="en-US" sz="1400" dirty="0"/>
-              <a:t>Appears once in the corpus = 1; Weight is 1/distance so </a:t>
+              <a:t>Appears once in the corpus = </a:t>
+            </a:r>
+            <a:r>
+              <a:rPr lang="en-US" sz="1400" dirty="0">
+                <a:highlight>
+                  <a:srgbClr val="FFFF00"/>
+                </a:highlight>
+              </a:rPr>
+              <a:t>1</a:t>
+            </a:r>
+            <a:r>
+              <a:rPr lang="en-US" sz="1400" dirty="0"/>
+              <a:t>; Weight is 1/distance so </a:t>
             </a:r>
             <a:r>
               <a:rPr lang="en-US" sz="1400" dirty="0">
@@ -2847,6 +2861,46 @@
               <a:t>4.533</a:t>
             </a:r>
             <a:endParaRPr lang="en-US" dirty="0"/>
+          </a:p>
+        </p:txBody>
+      </p:sp>
+      <p:sp>
+        <p:nvSpPr>
+          <p:cNvPr id="9" name="TextBox 8">
+            <a:extLst>
+              <a:ext uri="{FF2B5EF4-FFF2-40B4-BE49-F238E27FC236}">
+                <a16:creationId xmlns:a16="http://schemas.microsoft.com/office/drawing/2014/main" id="{76430EB7-0DA4-0E21-DD7B-7A145875A2A2}"/>
+              </a:ext>
+            </a:extLst>
+          </p:cNvPr>
+          <p:cNvSpPr txBox="1"/>
+          <p:nvPr/>
+        </p:nvSpPr>
+        <p:spPr>
+          <a:xfrm>
+            <a:off x="2657990" y="4872051"/>
+            <a:ext cx="605790" cy="830997"/>
+          </a:xfrm>
+          <a:prstGeom prst="rect">
+            <a:avLst/>
+          </a:prstGeom>
+          <a:noFill/>
+        </p:spPr>
+        <p:txBody>
+          <a:bodyPr wrap="square" rtlCol="0">
+            <a:spAutoFit/>
+          </a:bodyPr>
+          <a:lstStyle/>
+          <a:p>
+            <a:pPr algn="ctr"/>
+            <a:r>
+              <a:rPr lang="en-US" sz="4800" dirty="0">
+                <a:solidFill>
+                  <a:srgbClr val="FAFAFF"/>
+                </a:solidFill>
+              </a:rPr>
+              <a:t>+</a:t>
+            </a:r>
           </a:p>
         </p:txBody>
       </p:sp>
@@ -2909,7 +2963,7 @@
           <a:p>
             <a:fld id="{6700A58B-DD98-43D0-B791-721480A02982}" type="datetime1">
               <a:rPr lang="en-US" smtClean="0"/>
-              <a:t>6/26/25</a:t>
+              <a:t>6/11/26</a:t>
             </a:fld>
             <a:endParaRPr lang="en-US"/>
           </a:p>
@@ -3251,7 +3305,7 @@
         <p:spPr>
           <a:xfrm>
             <a:off x="126997" y="3953404"/>
-            <a:ext cx="2757289" cy="954107"/>
+            <a:ext cx="2757289" cy="1169551"/>
           </a:xfrm>
           <a:prstGeom prst="rect">
             <a:avLst/>
@@ -3278,7 +3332,17 @@
                   <a:srgbClr val="C0C0C0"/>
                 </a:highlight>
               </a:rPr>
-              <a:t>Harvard Harvard Harvard </a:t>
+              <a:t>&lt;some word-1&gt;  </a:t>
+            </a:r>
+          </a:p>
+          <a:p>
+            <a:r>
+              <a:rPr lang="en-US" sz="1400" dirty="0">
+                <a:highlight>
+                  <a:srgbClr val="C0C0C0"/>
+                </a:highlight>
+              </a:rPr>
+              <a:t>&lt;some word-2&gt; &lt;some word-3&gt; </a:t>
             </a:r>
             <a:r>
               <a:rPr lang="en-US" sz="1400" b="1" dirty="0">
@@ -3322,7 +3386,7 @@
         </p:nvSpPr>
         <p:spPr>
           <a:xfrm>
-            <a:off x="126997" y="4929971"/>
+            <a:off x="126996" y="5391281"/>
             <a:ext cx="2757289" cy="738664"/>
           </a:xfrm>
           <a:prstGeom prst="rect">
@@ -3342,7 +3406,7 @@
                   <a:srgbClr val="C0C0C0"/>
                 </a:highlight>
               </a:rPr>
-              <a:t>"hidden </a:t>
+              <a:t>"hidden  </a:t>
             </a:r>
             <a:r>
               <a:rPr lang="en-US" sz="1400" dirty="0">
@@ -3350,7 +3414,7 @@
                   <a:srgbClr val="C0C0C0"/>
                 </a:highlight>
               </a:rPr>
-              <a:t>Harvard</a:t>
+              <a:t>&lt;some word -1&gt; </a:t>
             </a:r>
             <a:r>
               <a:rPr lang="en-US" sz="1400" b="1" dirty="0">
@@ -3358,7 +3422,7 @@
                   <a:srgbClr val="C0C0C0"/>
                 </a:highlight>
               </a:rPr>
-              <a:t> famous”</a:t>
+              <a:t>famous”</a:t>
             </a:r>
             <a:r>
               <a:rPr lang="en-US" sz="1400" b="1" dirty="0"/>
@@ -3505,7 +3569,7 @@
           <a:p>
             <a:fld id="{6700A58B-DD98-43D0-B791-721480A02982}" type="datetime1">
               <a:rPr lang="en-US" smtClean="0"/>
-              <a:t>6/26/25</a:t>
+              <a:t>6/11/26</a:t>
             </a:fld>
             <a:endParaRPr lang="en-US"/>
           </a:p>
@@ -3626,14 +3690,14 @@
           <p:nvPr>
             <p:extLst>
               <p:ext uri="{D42A27DB-BD31-4B8C-83A1-F6EECF244321}">
-                <p14:modId xmlns:p14="http://schemas.microsoft.com/office/powerpoint/2010/main" val="3105279082"/>
+                <p14:modId xmlns:p14="http://schemas.microsoft.com/office/powerpoint/2010/main" val="2525340338"/>
               </p:ext>
             </p:extLst>
           </p:nvPr>
         </p:nvGraphicFramePr>
         <p:xfrm>
           <a:off x="3519920" y="1553037"/>
-          <a:ext cx="5190260" cy="4663440"/>
+          <a:ext cx="5190260" cy="4937760"/>
         </p:xfrm>
         <a:graphic>
           <a:graphicData uri="http://schemas.openxmlformats.org/drawingml/2006/table">
@@ -4268,7 +4332,7 @@
                     <a:lstStyle/>
                     <a:p>
                       <a:r>
-                        <a:rPr lang="en-US" sz="1200"/>
+                        <a:rPr lang="en-US" sz="1200" dirty="0"/>
                         <a:t>encouraging</a:t>
                       </a:r>
                     </a:p>
@@ -4317,6 +4381,65 @@
                 <a:extLst>
                   <a:ext uri="{0D108BD9-81ED-4DB2-BD59-A6C34878D82A}">
                     <a16:rowId xmlns:a16="http://schemas.microsoft.com/office/drawing/2014/main" val="1759053089"/>
+                  </a:ext>
+                </a:extLst>
+              </a:tr>
+              <a:tr h="0">
+                <a:tc>
+                  <a:txBody>
+                    <a:bodyPr/>
+                    <a:lstStyle/>
+                    <a:p>
+                      <a:r>
+                        <a:rPr lang="en-US" sz="1200" dirty="0"/>
+                        <a:t>encouraging</a:t>
+                      </a:r>
+                    </a:p>
+                  </a:txBody>
+                  <a:tcPr anchor="ctr"/>
+                </a:tc>
+                <a:tc>
+                  <a:txBody>
+                    <a:bodyPr/>
+                    <a:lstStyle/>
+                    <a:p>
+                      <a:r>
+                        <a:rPr lang="en-US" sz="1200" dirty="0"/>
+                        <a:t>famous</a:t>
+                      </a:r>
+                    </a:p>
+                  </a:txBody>
+                  <a:tcPr anchor="ctr"/>
+                </a:tc>
+                <a:tc>
+                  <a:txBody>
+                    <a:bodyPr/>
+                    <a:lstStyle/>
+                    <a:p>
+                      <a:r>
+                        <a:rPr lang="en-US" sz="1200" dirty="0"/>
+                        <a:t>5</a:t>
+                      </a:r>
+                    </a:p>
+                  </a:txBody>
+                  <a:tcPr anchor="ctr"/>
+                </a:tc>
+                <a:tc>
+                  <a:txBody>
+                    <a:bodyPr/>
+                    <a:lstStyle/>
+                    <a:p>
+                      <a:r>
+                        <a:rPr lang="en-US" sz="1200" dirty="0"/>
+                        <a:t>0.200</a:t>
+                      </a:r>
+                    </a:p>
+                  </a:txBody>
+                  <a:tcPr anchor="ctr"/>
+                </a:tc>
+                <a:extLst>
+                  <a:ext uri="{0D108BD9-81ED-4DB2-BD59-A6C34878D82A}">
+                    <a16:rowId xmlns:a16="http://schemas.microsoft.com/office/drawing/2014/main" val="4165680064"/>
                   </a:ext>
                 </a:extLst>
               </a:tr>
@@ -4714,114 +4837,145 @@
                 <a:latin typeface="Consolas" panose="020B0609020204030204" pitchFamily="49" charset="0"/>
                 <a:cs typeface="Consolas" panose="020B0609020204030204" pitchFamily="49" charset="0"/>
               </a:rPr>
-              <a:t>welcoming encouraging</a:t>
-            </a:r>
-            <a:r>
-              <a:rPr lang="en-US" sz="1800" baseline="30000" dirty="0">
+              <a:t>welcoming </a:t>
+            </a:r>
+            <a:r>
+              <a:rPr lang="en-US" sz="1800" dirty="0">
                 <a:highlight>
-                  <a:srgbClr val="FFFF00"/>
+                  <a:srgbClr val="00FF00"/>
                 </a:highlight>
                 <a:latin typeface="Consolas" panose="020B0609020204030204" pitchFamily="49" charset="0"/>
                 <a:cs typeface="Consolas" panose="020B0609020204030204" pitchFamily="49" charset="0"/>
               </a:rPr>
-              <a:t>1</a:t>
-            </a:r>
-            <a:r>
-              <a:rPr lang="en-US" sz="1800" dirty="0">
+              <a:t>encouraging</a:t>
+            </a:r>
+            <a:r>
+              <a:rPr lang="en-US" sz="1800" baseline="30000" dirty="0">
                 <a:highlight>
-                  <a:srgbClr val="FFFF00"/>
+                  <a:srgbClr val="00FF00"/>
                 </a:highlight>
                 <a:latin typeface="Consolas" panose="020B0609020204030204" pitchFamily="49" charset="0"/>
                 <a:cs typeface="Consolas" panose="020B0609020204030204" pitchFamily="49" charset="0"/>
               </a:rPr>
-              <a:t> abundantly</a:t>
-            </a:r>
-            <a:r>
-              <a:rPr lang="en-US" sz="1800" baseline="30000" dirty="0">
+              <a:t>1</a:t>
+            </a:r>
+            <a:r>
+              <a:rPr lang="en-US" sz="1800" dirty="0">
                 <a:highlight>
-                  <a:srgbClr val="FFFF00"/>
+                  <a:srgbClr val="00FF00"/>
                 </a:highlight>
                 <a:latin typeface="Consolas" panose="020B0609020204030204" pitchFamily="49" charset="0"/>
                 <a:cs typeface="Consolas" panose="020B0609020204030204" pitchFamily="49" charset="0"/>
               </a:rPr>
-              <a:t>2</a:t>
-            </a:r>
-            <a:r>
-              <a:rPr lang="en-US" sz="1800" dirty="0">
+              <a:t> abundantly</a:t>
+            </a:r>
+            <a:r>
+              <a:rPr lang="en-US" sz="1800" baseline="30000" dirty="0">
                 <a:highlight>
-                  <a:srgbClr val="FFFF00"/>
+                  <a:srgbClr val="00FF00"/>
                 </a:highlight>
                 <a:latin typeface="Consolas" panose="020B0609020204030204" pitchFamily="49" charset="0"/>
                 <a:cs typeface="Consolas" panose="020B0609020204030204" pitchFamily="49" charset="0"/>
               </a:rPr>
-              <a:t> knowledgable</a:t>
-            </a:r>
-            <a:r>
-              <a:rPr lang="en-US" sz="1800" baseline="30000" dirty="0">
+              <a:t>2</a:t>
+            </a:r>
+            <a:r>
+              <a:rPr lang="en-US" sz="1800" dirty="0">
                 <a:highlight>
-                  <a:srgbClr val="FFFF00"/>
+                  <a:srgbClr val="00FF00"/>
                 </a:highlight>
                 <a:latin typeface="Consolas" panose="020B0609020204030204" pitchFamily="49" charset="0"/>
                 <a:cs typeface="Consolas" panose="020B0609020204030204" pitchFamily="49" charset="0"/>
               </a:rPr>
-              <a:t>3</a:t>
-            </a:r>
-            <a:r>
-              <a:rPr lang="en-US" sz="1800" dirty="0">
+              <a:t> knowledgable</a:t>
+            </a:r>
+            <a:r>
+              <a:rPr lang="en-US" sz="1800" baseline="30000" dirty="0">
                 <a:highlight>
-                  <a:srgbClr val="FFFF00"/>
+                  <a:srgbClr val="00FF00"/>
                 </a:highlight>
                 <a:latin typeface="Consolas" panose="020B0609020204030204" pitchFamily="49" charset="0"/>
                 <a:cs typeface="Consolas" panose="020B0609020204030204" pitchFamily="49" charset="0"/>
               </a:rPr>
-              <a:t> city</a:t>
-            </a:r>
-            <a:r>
-              <a:rPr lang="en-US" sz="1800" baseline="30000" dirty="0">
+              <a:t>3</a:t>
+            </a:r>
+            <a:r>
+              <a:rPr lang="en-US" sz="1800" dirty="0">
                 <a:highlight>
-                  <a:srgbClr val="FFFF00"/>
+                  <a:srgbClr val="00FF00"/>
                 </a:highlight>
                 <a:latin typeface="Consolas" panose="020B0609020204030204" pitchFamily="49" charset="0"/>
                 <a:cs typeface="Consolas" panose="020B0609020204030204" pitchFamily="49" charset="0"/>
               </a:rPr>
-              <a:t>4</a:t>
-            </a:r>
-            <a:r>
-              <a:rPr lang="en-US" sz="1800" dirty="0">
+              <a:t> city</a:t>
+            </a:r>
+            <a:r>
+              <a:rPr lang="en-US" sz="1800" baseline="30000" dirty="0">
                 <a:highlight>
-                  <a:srgbClr val="FFFF00"/>
+                  <a:srgbClr val="00FF00"/>
                 </a:highlight>
                 <a:latin typeface="Consolas" panose="020B0609020204030204" pitchFamily="49" charset="0"/>
                 <a:cs typeface="Consolas" panose="020B0609020204030204" pitchFamily="49" charset="0"/>
               </a:rPr>
-              <a:t> treasures</a:t>
-            </a:r>
-            <a:r>
-              <a:rPr lang="en-US" sz="1800" baseline="30000" dirty="0">
+              <a:t>4</a:t>
+            </a:r>
+            <a:r>
+              <a:rPr lang="en-US" sz="1800" dirty="0">
                 <a:highlight>
-                  <a:srgbClr val="FFFF00"/>
+                  <a:srgbClr val="00FF00"/>
                 </a:highlight>
                 <a:latin typeface="Consolas" panose="020B0609020204030204" pitchFamily="49" charset="0"/>
                 <a:cs typeface="Consolas" panose="020B0609020204030204" pitchFamily="49" charset="0"/>
               </a:rPr>
-              <a:t>5</a:t>
-            </a:r>
-            <a:r>
-              <a:rPr lang="en-US" sz="1800" dirty="0">
+              <a:t> treasures</a:t>
+            </a:r>
+            <a:r>
+              <a:rPr lang="en-US" sz="1800" baseline="30000" dirty="0">
                 <a:highlight>
-                  <a:srgbClr val="FFFF00"/>
+                  <a:srgbClr val="00FF00"/>
                 </a:highlight>
                 <a:latin typeface="Consolas" panose="020B0609020204030204" pitchFamily="49" charset="0"/>
                 <a:cs typeface="Consolas" panose="020B0609020204030204" pitchFamily="49" charset="0"/>
               </a:rPr>
+              <a:t>5</a:t>
+            </a:r>
+            <a:r>
+              <a:rPr lang="en-US" sz="1800" dirty="0">
+                <a:highlight>
+                  <a:srgbClr val="00FF00"/>
+                </a:highlight>
+                <a:latin typeface="Consolas" panose="020B0609020204030204" pitchFamily="49" charset="0"/>
+                <a:cs typeface="Consolas" panose="020B0609020204030204" pitchFamily="49" charset="0"/>
+              </a:rPr>
               <a:t> </a:t>
+            </a:r>
+            <a:r>
+              <a:rPr lang="en-US" sz="1800" strike="sngStrike" dirty="0">
+                <a:latin typeface="Consolas" panose="020B0609020204030204" pitchFamily="49" charset="0"/>
+                <a:cs typeface="Consolas" panose="020B0609020204030204" pitchFamily="49" charset="0"/>
+              </a:rPr>
+              <a:t>famous</a:t>
             </a:r>
             <a:r>
               <a:rPr lang="en-US" sz="1800" dirty="0">
                 <a:latin typeface="Consolas" panose="020B0609020204030204" pitchFamily="49" charset="0"/>
                 <a:cs typeface="Consolas" panose="020B0609020204030204" pitchFamily="49" charset="0"/>
               </a:rPr>
-              <a:t>famous hidden </a:t>
+              <a:t> </a:t>
+            </a:r>
+            <a:r>
+              <a:rPr lang="en-US" sz="1800" strike="sngStrike" dirty="0">
+                <a:latin typeface="Consolas" panose="020B0609020204030204" pitchFamily="49" charset="0"/>
+                <a:cs typeface="Consolas" panose="020B0609020204030204" pitchFamily="49" charset="0"/>
+              </a:rPr>
+              <a:t>hidden</a:t>
+            </a:r>
+            <a:r>
+              <a:rPr lang="en-US" sz="1800" dirty="0">
+                <a:latin typeface="Consolas" panose="020B0609020204030204" pitchFamily="49" charset="0"/>
+                <a:cs typeface="Consolas" panose="020B0609020204030204" pitchFamily="49" charset="0"/>
+              </a:rPr>
+              <a:t> </a:t>
             </a:r>
             <a:endParaRPr lang="en-US" dirty="0"/>
           </a:p>
@@ -4841,7 +4995,7 @@
         </p:nvSpPr>
         <p:spPr>
           <a:xfrm>
-            <a:off x="170871" y="2904306"/>
+            <a:off x="170871" y="3129118"/>
             <a:ext cx="3255819" cy="1200329"/>
           </a:xfrm>
           <a:prstGeom prst="rect">
@@ -4858,7 +5012,7 @@
             <a:r>
               <a:rPr lang="en-US" sz="1800" i="1" dirty="0">
                 <a:highlight>
-                  <a:srgbClr val="00FFFF"/>
+                  <a:srgbClr val="FF0000"/>
                 </a:highlight>
                 <a:latin typeface="Consolas" panose="020B0609020204030204" pitchFamily="49" charset="0"/>
                 <a:cs typeface="Consolas" panose="020B0609020204030204" pitchFamily="49" charset="0"/>
@@ -4868,7 +5022,7 @@
             <a:r>
               <a:rPr lang="en-US" sz="1800" i="1" baseline="30000" dirty="0">
                 <a:highlight>
-                  <a:srgbClr val="00FFFF"/>
+                  <a:srgbClr val="FF0000"/>
                 </a:highlight>
                 <a:latin typeface="Consolas" panose="020B0609020204030204" pitchFamily="49" charset="0"/>
                 <a:cs typeface="Consolas" panose="020B0609020204030204" pitchFamily="49" charset="0"/>
@@ -4878,7 +5032,7 @@
             <a:r>
               <a:rPr lang="en-US" sz="1800" dirty="0">
                 <a:highlight>
-                  <a:srgbClr val="00FFFF"/>
+                  <a:srgbClr val="FF0000"/>
                 </a:highlight>
                 <a:latin typeface="Consolas" panose="020B0609020204030204" pitchFamily="49" charset="0"/>
                 <a:cs typeface="Consolas" panose="020B0609020204030204" pitchFamily="49" charset="0"/>
@@ -4893,17 +5047,287 @@
                 <a:latin typeface="Consolas" panose="020B0609020204030204" pitchFamily="49" charset="0"/>
                 <a:cs typeface="Consolas" panose="020B0609020204030204" pitchFamily="49" charset="0"/>
               </a:rPr>
-              <a:t>encouraging abundantly</a:t>
-            </a:r>
-            <a:r>
-              <a:rPr lang="en-US" baseline="30000" dirty="0">
+              <a:t>encouraging </a:t>
+            </a:r>
+            <a:r>
+              <a:rPr lang="en-US" sz="1800" dirty="0">
                 <a:highlight>
-                  <a:srgbClr val="FFFF00"/>
+                  <a:srgbClr val="00FF00"/>
                 </a:highlight>
                 <a:latin typeface="Consolas" panose="020B0609020204030204" pitchFamily="49" charset="0"/>
                 <a:cs typeface="Consolas" panose="020B0609020204030204" pitchFamily="49" charset="0"/>
               </a:rPr>
+              <a:t>abundantly</a:t>
+            </a:r>
+            <a:r>
+              <a:rPr lang="en-US" baseline="30000" dirty="0">
+                <a:highlight>
+                  <a:srgbClr val="00FF00"/>
+                </a:highlight>
+                <a:latin typeface="Consolas" panose="020B0609020204030204" pitchFamily="49" charset="0"/>
+                <a:cs typeface="Consolas" panose="020B0609020204030204" pitchFamily="49" charset="0"/>
+              </a:rPr>
               <a:t>1</a:t>
+            </a:r>
+            <a:r>
+              <a:rPr lang="en-US" sz="1800" dirty="0">
+                <a:highlight>
+                  <a:srgbClr val="00FF00"/>
+                </a:highlight>
+                <a:latin typeface="Consolas" panose="020B0609020204030204" pitchFamily="49" charset="0"/>
+                <a:cs typeface="Consolas" panose="020B0609020204030204" pitchFamily="49" charset="0"/>
+              </a:rPr>
+              <a:t> knowledgable</a:t>
+            </a:r>
+            <a:r>
+              <a:rPr lang="en-US" baseline="30000" dirty="0">
+                <a:highlight>
+                  <a:srgbClr val="00FF00"/>
+                </a:highlight>
+                <a:latin typeface="Consolas" panose="020B0609020204030204" pitchFamily="49" charset="0"/>
+                <a:cs typeface="Consolas" panose="020B0609020204030204" pitchFamily="49" charset="0"/>
+              </a:rPr>
+              <a:t>2</a:t>
+            </a:r>
+            <a:r>
+              <a:rPr lang="en-US" sz="1800" dirty="0">
+                <a:highlight>
+                  <a:srgbClr val="00FF00"/>
+                </a:highlight>
+                <a:latin typeface="Consolas" panose="020B0609020204030204" pitchFamily="49" charset="0"/>
+                <a:cs typeface="Consolas" panose="020B0609020204030204" pitchFamily="49" charset="0"/>
+              </a:rPr>
+              <a:t> city</a:t>
+            </a:r>
+            <a:r>
+              <a:rPr lang="en-US" baseline="30000" dirty="0">
+                <a:highlight>
+                  <a:srgbClr val="00FF00"/>
+                </a:highlight>
+                <a:latin typeface="Consolas" panose="020B0609020204030204" pitchFamily="49" charset="0"/>
+                <a:cs typeface="Consolas" panose="020B0609020204030204" pitchFamily="49" charset="0"/>
+              </a:rPr>
+              <a:t>3</a:t>
+            </a:r>
+            <a:r>
+              <a:rPr lang="en-US" sz="1800" dirty="0">
+                <a:highlight>
+                  <a:srgbClr val="00FF00"/>
+                </a:highlight>
+                <a:latin typeface="Consolas" panose="020B0609020204030204" pitchFamily="49" charset="0"/>
+                <a:cs typeface="Consolas" panose="020B0609020204030204" pitchFamily="49" charset="0"/>
+              </a:rPr>
+              <a:t> treasures</a:t>
+            </a:r>
+            <a:r>
+              <a:rPr lang="en-US" baseline="30000" dirty="0">
+                <a:highlight>
+                  <a:srgbClr val="00FF00"/>
+                </a:highlight>
+                <a:latin typeface="Consolas" panose="020B0609020204030204" pitchFamily="49" charset="0"/>
+                <a:cs typeface="Consolas" panose="020B0609020204030204" pitchFamily="49" charset="0"/>
+              </a:rPr>
+              <a:t>4</a:t>
+            </a:r>
+            <a:r>
+              <a:rPr lang="en-US" sz="1800" dirty="0">
+                <a:highlight>
+                  <a:srgbClr val="00FF00"/>
+                </a:highlight>
+                <a:latin typeface="Consolas" panose="020B0609020204030204" pitchFamily="49" charset="0"/>
+                <a:cs typeface="Consolas" panose="020B0609020204030204" pitchFamily="49" charset="0"/>
+              </a:rPr>
+              <a:t> </a:t>
+            </a:r>
+            <a:r>
+              <a:rPr lang="en-US" sz="1800" i="1" dirty="0">
+                <a:highlight>
+                  <a:srgbClr val="00FF00"/>
+                </a:highlight>
+                <a:latin typeface="Consolas" panose="020B0609020204030204" pitchFamily="49" charset="0"/>
+                <a:cs typeface="Consolas" panose="020B0609020204030204" pitchFamily="49" charset="0"/>
+              </a:rPr>
+              <a:t>famous</a:t>
+            </a:r>
+            <a:r>
+              <a:rPr lang="en-US" sz="1800" i="1" baseline="30000" dirty="0">
+                <a:highlight>
+                  <a:srgbClr val="00FF00"/>
+                </a:highlight>
+                <a:latin typeface="Consolas" panose="020B0609020204030204" pitchFamily="49" charset="0"/>
+                <a:cs typeface="Consolas" panose="020B0609020204030204" pitchFamily="49" charset="0"/>
+              </a:rPr>
+              <a:t>5</a:t>
+            </a:r>
+            <a:r>
+              <a:rPr lang="en-US" sz="1800" dirty="0">
+                <a:highlight>
+                  <a:srgbClr val="00FF00"/>
+                </a:highlight>
+                <a:latin typeface="Consolas" panose="020B0609020204030204" pitchFamily="49" charset="0"/>
+                <a:cs typeface="Consolas" panose="020B0609020204030204" pitchFamily="49" charset="0"/>
+              </a:rPr>
+              <a:t> </a:t>
+            </a:r>
+            <a:r>
+              <a:rPr lang="en-US" sz="1800" strike="sngStrike" dirty="0">
+                <a:latin typeface="Consolas" panose="020B0609020204030204" pitchFamily="49" charset="0"/>
+                <a:cs typeface="Consolas" panose="020B0609020204030204" pitchFamily="49" charset="0"/>
+              </a:rPr>
+              <a:t>hidden</a:t>
+            </a:r>
+            <a:r>
+              <a:rPr lang="en-US" sz="1800" dirty="0">
+                <a:latin typeface="Consolas" panose="020B0609020204030204" pitchFamily="49" charset="0"/>
+                <a:cs typeface="Consolas" panose="020B0609020204030204" pitchFamily="49" charset="0"/>
+              </a:rPr>
+              <a:t> </a:t>
+            </a:r>
+            <a:endParaRPr lang="en-US" dirty="0"/>
+          </a:p>
+        </p:txBody>
+      </p:sp>
+      <p:sp>
+        <p:nvSpPr>
+          <p:cNvPr id="6" name="TextBox 5">
+            <a:extLst>
+              <a:ext uri="{FF2B5EF4-FFF2-40B4-BE49-F238E27FC236}">
+                <a16:creationId xmlns:a16="http://schemas.microsoft.com/office/drawing/2014/main" id="{ECD5C093-454B-F0EC-30D8-7658B07EF5FB}"/>
+              </a:ext>
+            </a:extLst>
+          </p:cNvPr>
+          <p:cNvSpPr txBox="1"/>
+          <p:nvPr/>
+        </p:nvSpPr>
+        <p:spPr>
+          <a:xfrm>
+            <a:off x="29440" y="5005082"/>
+            <a:ext cx="3255819" cy="1477328"/>
+          </a:xfrm>
+          <a:prstGeom prst="rect">
+            <a:avLst/>
+          </a:prstGeom>
+          <a:noFill/>
+        </p:spPr>
+        <p:txBody>
+          <a:bodyPr wrap="square">
+            <a:spAutoFit/>
+          </a:bodyPr>
+          <a:lstStyle/>
+          <a:p>
+            <a:r>
+              <a:rPr lang="en-US" i="1" strike="sngStrike" dirty="0">
+                <a:latin typeface="Consolas" panose="020B0609020204030204" pitchFamily="49" charset="0"/>
+                <a:cs typeface="Consolas" panose="020B0609020204030204" pitchFamily="49" charset="0"/>
+              </a:rPr>
+              <a:t>Welcoming</a:t>
+            </a:r>
+            <a:r>
+              <a:rPr lang="en-US" i="1" dirty="0">
+                <a:latin typeface="Consolas" panose="020B0609020204030204" pitchFamily="49" charset="0"/>
+                <a:cs typeface="Consolas" panose="020B0609020204030204" pitchFamily="49" charset="0"/>
+              </a:rPr>
+              <a:t> </a:t>
+            </a:r>
+            <a:r>
+              <a:rPr lang="en-US" i="1" dirty="0">
+                <a:highlight>
+                  <a:srgbClr val="FF0000"/>
+                </a:highlight>
+                <a:latin typeface="Consolas" panose="020B0609020204030204" pitchFamily="49" charset="0"/>
+                <a:cs typeface="Consolas" panose="020B0609020204030204" pitchFamily="49" charset="0"/>
+              </a:rPr>
+              <a:t>encouraging</a:t>
+            </a:r>
+            <a:r>
+              <a:rPr lang="en-US" i="1" baseline="30000" dirty="0">
+                <a:highlight>
+                  <a:srgbClr val="FF0000"/>
+                </a:highlight>
+                <a:latin typeface="Consolas" panose="020B0609020204030204" pitchFamily="49" charset="0"/>
+                <a:cs typeface="Consolas" panose="020B0609020204030204" pitchFamily="49" charset="0"/>
+              </a:rPr>
+              <a:t>-5</a:t>
+            </a:r>
+            <a:r>
+              <a:rPr lang="en-US" i="1" dirty="0">
+                <a:highlight>
+                  <a:srgbClr val="FF0000"/>
+                </a:highlight>
+                <a:latin typeface="Consolas" panose="020B0609020204030204" pitchFamily="49" charset="0"/>
+                <a:cs typeface="Consolas" panose="020B0609020204030204" pitchFamily="49" charset="0"/>
+              </a:rPr>
+              <a:t> abundantly</a:t>
+            </a:r>
+            <a:r>
+              <a:rPr lang="en-US" i="1" baseline="30000" dirty="0">
+                <a:highlight>
+                  <a:srgbClr val="FF0000"/>
+                </a:highlight>
+                <a:latin typeface="Consolas" panose="020B0609020204030204" pitchFamily="49" charset="0"/>
+                <a:cs typeface="Consolas" panose="020B0609020204030204" pitchFamily="49" charset="0"/>
+              </a:rPr>
+              <a:t>-4</a:t>
+            </a:r>
+            <a:r>
+              <a:rPr lang="en-US" i="1" dirty="0">
+                <a:highlight>
+                  <a:srgbClr val="FF0000"/>
+                </a:highlight>
+                <a:latin typeface="Consolas" panose="020B0609020204030204" pitchFamily="49" charset="0"/>
+                <a:cs typeface="Consolas" panose="020B0609020204030204" pitchFamily="49" charset="0"/>
+              </a:rPr>
+              <a:t> knowledgable</a:t>
+            </a:r>
+            <a:r>
+              <a:rPr lang="en-US" i="1" baseline="30000" dirty="0">
+                <a:highlight>
+                  <a:srgbClr val="FF0000"/>
+                </a:highlight>
+                <a:latin typeface="Consolas" panose="020B0609020204030204" pitchFamily="49" charset="0"/>
+                <a:cs typeface="Consolas" panose="020B0609020204030204" pitchFamily="49" charset="0"/>
+              </a:rPr>
+              <a:t>-3</a:t>
+            </a:r>
+            <a:r>
+              <a:rPr lang="en-US" i="1" dirty="0">
+                <a:highlight>
+                  <a:srgbClr val="FF0000"/>
+                </a:highlight>
+                <a:latin typeface="Consolas" panose="020B0609020204030204" pitchFamily="49" charset="0"/>
+                <a:cs typeface="Consolas" panose="020B0609020204030204" pitchFamily="49" charset="0"/>
+              </a:rPr>
+              <a:t> city</a:t>
+            </a:r>
+            <a:r>
+              <a:rPr lang="en-US" i="1" baseline="30000" dirty="0">
+                <a:highlight>
+                  <a:srgbClr val="FF0000"/>
+                </a:highlight>
+                <a:latin typeface="Consolas" panose="020B0609020204030204" pitchFamily="49" charset="0"/>
+                <a:cs typeface="Consolas" panose="020B0609020204030204" pitchFamily="49" charset="0"/>
+              </a:rPr>
+              <a:t>-2</a:t>
+            </a:r>
+            <a:r>
+              <a:rPr lang="en-US" i="1" dirty="0">
+                <a:highlight>
+                  <a:srgbClr val="FF0000"/>
+                </a:highlight>
+                <a:latin typeface="Consolas" panose="020B0609020204030204" pitchFamily="49" charset="0"/>
+                <a:cs typeface="Consolas" panose="020B0609020204030204" pitchFamily="49" charset="0"/>
+              </a:rPr>
+              <a:t> treasures</a:t>
+            </a:r>
+            <a:r>
+              <a:rPr lang="en-US" i="1" baseline="30000" dirty="0">
+                <a:highlight>
+                  <a:srgbClr val="FF0000"/>
+                </a:highlight>
+                <a:latin typeface="Consolas" panose="020B0609020204030204" pitchFamily="49" charset="0"/>
+                <a:cs typeface="Consolas" panose="020B0609020204030204" pitchFamily="49" charset="0"/>
+              </a:rPr>
+              <a:t>-1</a:t>
             </a:r>
             <a:r>
               <a:rPr lang="en-US" sz="1800" dirty="0">
@@ -4913,17 +5337,27 @@
                 <a:latin typeface="Consolas" panose="020B0609020204030204" pitchFamily="49" charset="0"/>
                 <a:cs typeface="Consolas" panose="020B0609020204030204" pitchFamily="49" charset="0"/>
               </a:rPr>
-              <a:t> knowledgable</a:t>
-            </a:r>
-            <a:r>
-              <a:rPr lang="en-US" baseline="30000" dirty="0">
+              <a:t> </a:t>
+            </a:r>
+            <a:r>
+              <a:rPr lang="en-US" sz="1800" i="1" dirty="0">
                 <a:highlight>
                   <a:srgbClr val="FFFF00"/>
                 </a:highlight>
                 <a:latin typeface="Consolas" panose="020B0609020204030204" pitchFamily="49" charset="0"/>
                 <a:cs typeface="Consolas" panose="020B0609020204030204" pitchFamily="49" charset="0"/>
               </a:rPr>
-              <a:t>2</a:t>
+              <a:t>famous</a:t>
+            </a:r>
+            <a:r>
+              <a:rPr lang="en-US" sz="1800" i="1" baseline="30000" dirty="0">
+                <a:highlight>
+                  <a:srgbClr val="FFFF00"/>
+                </a:highlight>
+                <a:latin typeface="Consolas" panose="020B0609020204030204" pitchFamily="49" charset="0"/>
+                <a:cs typeface="Consolas" panose="020B0609020204030204" pitchFamily="49" charset="0"/>
+              </a:rPr>
+              <a:t>5</a:t>
             </a:r>
             <a:r>
               <a:rPr lang="en-US" sz="1800" dirty="0">
@@ -4933,86 +5367,43 @@
                 <a:latin typeface="Consolas" panose="020B0609020204030204" pitchFamily="49" charset="0"/>
                 <a:cs typeface="Consolas" panose="020B0609020204030204" pitchFamily="49" charset="0"/>
               </a:rPr>
-              <a:t> city</a:t>
-            </a:r>
-            <a:r>
-              <a:rPr lang="en-US" baseline="30000" dirty="0">
+              <a:t> </a:t>
+            </a:r>
+            <a:r>
+              <a:rPr lang="en-US" sz="1800" dirty="0">
                 <a:highlight>
-                  <a:srgbClr val="FFFF00"/>
+                  <a:srgbClr val="00FF00"/>
                 </a:highlight>
                 <a:latin typeface="Consolas" panose="020B0609020204030204" pitchFamily="49" charset="0"/>
                 <a:cs typeface="Consolas" panose="020B0609020204030204" pitchFamily="49" charset="0"/>
               </a:rPr>
-              <a:t>3</a:t>
-            </a:r>
-            <a:r>
-              <a:rPr lang="en-US" sz="1800" dirty="0">
+              <a:t>hidden</a:t>
+            </a:r>
+            <a:r>
+              <a:rPr lang="en-US" i="1" baseline="30000" dirty="0">
                 <a:highlight>
-                  <a:srgbClr val="FFFF00"/>
+                  <a:srgbClr val="00FF00"/>
                 </a:highlight>
                 <a:latin typeface="Consolas" panose="020B0609020204030204" pitchFamily="49" charset="0"/>
                 <a:cs typeface="Consolas" panose="020B0609020204030204" pitchFamily="49" charset="0"/>
               </a:rPr>
-              <a:t> treasures</a:t>
-            </a:r>
-            <a:r>
-              <a:rPr lang="en-US" baseline="30000" dirty="0">
+              <a:t>1</a:t>
+            </a:r>
+            <a:r>
+              <a:rPr lang="en-US" sz="1800" dirty="0">
                 <a:highlight>
-                  <a:srgbClr val="FFFF00"/>
+                  <a:srgbClr val="00FF00"/>
                 </a:highlight>
                 <a:latin typeface="Consolas" panose="020B0609020204030204" pitchFamily="49" charset="0"/>
                 <a:cs typeface="Consolas" panose="020B0609020204030204" pitchFamily="49" charset="0"/>
               </a:rPr>
-              <a:t>4</a:t>
-            </a:r>
-            <a:r>
-              <a:rPr lang="en-US" sz="1800" dirty="0">
-                <a:highlight>
-                  <a:srgbClr val="FFFF00"/>
-                </a:highlight>
-                <a:latin typeface="Consolas" panose="020B0609020204030204" pitchFamily="49" charset="0"/>
-                <a:cs typeface="Consolas" panose="020B0609020204030204" pitchFamily="49" charset="0"/>
-              </a:rPr>
               <a:t> </a:t>
             </a:r>
-            <a:r>
-              <a:rPr lang="en-US" sz="1800" i="1" dirty="0">
-                <a:highlight>
-                  <a:srgbClr val="FFFF00"/>
-                </a:highlight>
-                <a:latin typeface="Consolas" panose="020B0609020204030204" pitchFamily="49" charset="0"/>
-                <a:cs typeface="Consolas" panose="020B0609020204030204" pitchFamily="49" charset="0"/>
-              </a:rPr>
-              <a:t>famous</a:t>
-            </a:r>
-            <a:r>
-              <a:rPr lang="en-US" sz="1800" i="1" baseline="30000" dirty="0">
-                <a:highlight>
-                  <a:srgbClr val="FFFF00"/>
-                </a:highlight>
-                <a:latin typeface="Consolas" panose="020B0609020204030204" pitchFamily="49" charset="0"/>
-                <a:cs typeface="Consolas" panose="020B0609020204030204" pitchFamily="49" charset="0"/>
-              </a:rPr>
-              <a:t>5</a:t>
-            </a:r>
-            <a:r>
-              <a:rPr lang="en-US" sz="1800" dirty="0">
-                <a:highlight>
-                  <a:srgbClr val="FFFF00"/>
-                </a:highlight>
-                <a:latin typeface="Consolas" panose="020B0609020204030204" pitchFamily="49" charset="0"/>
-                <a:cs typeface="Consolas" panose="020B0609020204030204" pitchFamily="49" charset="0"/>
-              </a:rPr>
-              <a:t> </a:t>
-            </a:r>
-            <a:r>
-              <a:rPr lang="en-US" sz="1800" dirty="0">
-                <a:latin typeface="Consolas" panose="020B0609020204030204" pitchFamily="49" charset="0"/>
-                <a:cs typeface="Consolas" panose="020B0609020204030204" pitchFamily="49" charset="0"/>
-              </a:rPr>
-              <a:t>hidden </a:t>
-            </a:r>
-            <a:endParaRPr lang="en-US" dirty="0"/>
+            <a:endParaRPr lang="en-US" dirty="0">
+              <a:highlight>
+                <a:srgbClr val="00FF00"/>
+              </a:highlight>
+            </a:endParaRPr>
           </a:p>
         </p:txBody>
       </p:sp>
@@ -5069,7 +5460,7 @@
           <a:p>
             <a:fld id="{6700A58B-DD98-43D0-B791-721480A02982}" type="datetime1">
               <a:rPr lang="en-US" smtClean="0"/>
-              <a:t>6/26/25</a:t>
+              <a:t>6/11/26</a:t>
             </a:fld>
             <a:endParaRPr lang="en-US"/>
           </a:p>
@@ -5760,7 +6151,7 @@
           <a:p>
             <a:fld id="{6700A58B-DD98-43D0-B791-721480A02982}" type="datetime1">
               <a:rPr lang="en-US" smtClean="0"/>
-              <a:t>6/26/25</a:t>
+              <a:t>6/11/26</a:t>
             </a:fld>
             <a:endParaRPr lang="en-US"/>
           </a:p>
@@ -6016,7 +6407,7 @@
           <a:p>
             <a:fld id="{6700A58B-DD98-43D0-B791-721480A02982}" type="datetime1">
               <a:rPr lang="en-US" smtClean="0"/>
-              <a:t>6/26/25</a:t>
+              <a:t>6/11/26</a:t>
             </a:fld>
             <a:endParaRPr lang="en-US"/>
           </a:p>
@@ -6124,7 +6515,7 @@
         <p:spPr>
           <a:xfrm>
             <a:off x="628647" y="3109070"/>
-            <a:ext cx="8033029" cy="3139321"/>
+            <a:ext cx="8033029" cy="3416320"/>
           </a:xfrm>
           <a:prstGeom prst="rect">
             <a:avLst/>
@@ -6160,7 +6551,15 @@
             </a:r>
             <a:r>
               <a:rPr lang="en-US" dirty="0"/>
-              <a:t>.  It also keeps track of 2 additional values for each work.  These 2 “biases” help adjust the final 50 vectors for when a specific word is used.  There are 2, one for when the word is center and one for when it’s context.</a:t>
+              <a:t>.  It also keeps track of 2 additional values for each work.  These 2 “biases” help adjust the final 50 vectors for when a specific word is used.  There are 2, one for when the word is center and one for when it’s context.  So each term has a final bias 2 values (center and context) to adjust the final </a:t>
+            </a:r>
+            <a:r>
+              <a:rPr lang="en-US" dirty="0" err="1"/>
+              <a:t>GLoVe</a:t>
+            </a:r>
+            <a:r>
+              <a:rPr lang="en-US" dirty="0"/>
+              <a:t> values.</a:t>
             </a:r>
             <a:endParaRPr lang="en-US" sz="2400" dirty="0"/>
           </a:p>
@@ -6297,7 +6696,7 @@
           <a:p>
             <a:fld id="{6700A58B-DD98-43D0-B791-721480A02982}" type="datetime1">
               <a:rPr lang="en-US" smtClean="0"/>
-              <a:t>6/26/25</a:t>
+              <a:t>6/11/26</a:t>
             </a:fld>
             <a:endParaRPr lang="en-US"/>
           </a:p>
@@ -6401,8 +6800,8 @@
         </p:nvSpPr>
         <p:spPr>
           <a:xfrm>
-            <a:off x="742950" y="1573111"/>
-            <a:ext cx="4572000" cy="707886"/>
+            <a:off x="330594" y="1210490"/>
+            <a:ext cx="7886700" cy="1631216"/>
           </a:xfrm>
           <a:prstGeom prst="rect">
             <a:avLst/>
@@ -6422,6 +6821,28 @@
           </a:p>
           <a:p>
             <a:r>
+              <a:rPr lang="en-US" sz="2000" b="1" dirty="0"/>
+              <a:t>The Token co-occurrence matrix has a value for Cat/Meow of log(20)</a:t>
+            </a:r>
+          </a:p>
+          <a:p>
+            <a:r>
+              <a:rPr lang="en-US" sz="2000" b="1" dirty="0" err="1"/>
+              <a:t>GLoVE</a:t>
+            </a:r>
+            <a:r>
+              <a:rPr lang="en-US" sz="2000" b="1" dirty="0"/>
+              <a:t> will fit a 50 vector set of numbers to approximate the entire TCM.</a:t>
+            </a:r>
+          </a:p>
+          <a:p>
+            <a:r>
+              <a:rPr lang="en-US" sz="2000" b="1" dirty="0"/>
+              <a:t>Then is will create word specific biases with the dot product.</a:t>
+            </a:r>
+          </a:p>
+          <a:p>
+            <a:r>
               <a:rPr lang="en-US" sz="2000" dirty="0"/>
               <a:t>(cat vector) • (meow vector) ≈ log(20)</a:t>
             </a:r>
@@ -6442,8 +6863,8 @@
         </p:nvSpPr>
         <p:spPr>
           <a:xfrm>
-            <a:off x="777492" y="2169635"/>
-            <a:ext cx="7439802" cy="3477875"/>
+            <a:off x="330593" y="3061038"/>
+            <a:ext cx="8637915" cy="2862322"/>
           </a:xfrm>
           <a:prstGeom prst="rect">
             <a:avLst/>
@@ -6458,13 +6879,6 @@
           <a:p>
             <a:r>
               <a:rPr lang="en-US" sz="2000" dirty="0"/>
-              <a:t>And this multiplication is actually the “dot product” you saw before:</a:t>
-            </a:r>
-            <a:br>
-              <a:rPr lang="en-US" sz="2000" dirty="0"/>
-            </a:br>
-            <a:r>
-              <a:rPr lang="en-US" sz="2000" dirty="0"/>
               <a:t>Cat vector​      =[</a:t>
             </a:r>
             <a:r>
@@ -6477,7 +6891,19 @@
             </a:r>
             <a:r>
               <a:rPr lang="en-US" sz="2000" dirty="0"/>
-              <a:t>,−0.5,0.8,...,0.1](50 numbers)</a:t>
+              <a:t>,−0.5,0.8,...,0.1](50 numbers) </a:t>
+            </a:r>
+            <a:r>
+              <a:rPr lang="en-US" sz="2000" i="1" dirty="0"/>
+              <a:t>– the </a:t>
+            </a:r>
+            <a:r>
+              <a:rPr lang="en-US" sz="2000" i="1" dirty="0" err="1"/>
+              <a:t>GloVe</a:t>
+            </a:r>
+            <a:r>
+              <a:rPr lang="en-US" sz="2000" i="1" dirty="0"/>
+              <a:t> fit numbers</a:t>
             </a:r>
           </a:p>
           <a:p>
@@ -6495,8 +6921,21 @@
             </a:r>
             <a:r>
               <a:rPr lang="en-US" sz="2000" dirty="0"/>
-              <a:t>,0.3,−0.2,...,0.5](50 numbers)</a:t>
-            </a:r>
+              <a:t>,0.3,−0.2,...,0.5](50 numbers) </a:t>
+            </a:r>
+            <a:r>
+              <a:rPr lang="en-US" sz="2000" i="1" dirty="0"/>
+              <a:t>– the </a:t>
+            </a:r>
+            <a:r>
+              <a:rPr lang="en-US" sz="2000" i="1" dirty="0" err="1"/>
+              <a:t>GloVe</a:t>
+            </a:r>
+            <a:r>
+              <a:rPr lang="en-US" sz="2000" i="1" dirty="0"/>
+              <a:t> fit numbers</a:t>
+            </a:r>
+            <a:endParaRPr lang="en-US" sz="2000" dirty="0"/>
           </a:p>
           <a:p>
             <a:r>
@@ -6522,7 +6961,7 @@
           <a:p>
             <a:r>
               <a:rPr lang="en-US" sz="2000" dirty="0"/>
-              <a:t>Then is adds two biases it learned to improve accuracy that are word specific Biases are specific word adjustments added to the 50 values to increase accuracy.</a:t>
+              <a:t>Then is adds two biases it learned to improve accuracy that are word specific. Biases are specific word adjustments added to the 50 values to increase accuracy.</a:t>
             </a:r>
           </a:p>
           <a:p>
@@ -6629,7 +7068,7 @@
           <a:p>
             <a:fld id="{6700A58B-DD98-43D0-B791-721480A02982}" type="datetime1">
               <a:rPr lang="en-US" smtClean="0"/>
-              <a:t>6/26/25</a:t>
+              <a:t>6/11/26</a:t>
             </a:fld>
             <a:endParaRPr lang="en-US"/>
           </a:p>
@@ -6960,7 +7399,7 @@
         <p:spPr>
           <a:xfrm>
             <a:off x="4572000" y="1169733"/>
-            <a:ext cx="4310738" cy="1200329"/>
+            <a:ext cx="4310738" cy="923330"/>
           </a:xfrm>
           <a:prstGeom prst="rect">
             <a:avLst/>
@@ -6975,7 +7414,7 @@
           <a:p>
             <a:r>
               <a:rPr lang="en-US" dirty="0"/>
-              <a:t>If we have a “man” vector and we add a “king” vector we have a new amount.  We know this represents the concept of “royalty” but it’s a numeric vector.</a:t>
+              <a:t>If we have a “man” vector and we add a “king” vector we have a new amount.  This is a numeric representation of royalty.  </a:t>
             </a:r>
           </a:p>
         </p:txBody>
@@ -7151,7 +7590,7 @@
           <a:p>
             <a:fld id="{6700A58B-DD98-43D0-B791-721480A02982}" type="datetime1">
               <a:rPr lang="en-US" smtClean="0"/>
-              <a:t>6/26/25</a:t>
+              <a:t>6/11/26</a:t>
             </a:fld>
             <a:endParaRPr lang="en-US"/>
           </a:p>
@@ -7857,7 +8296,7 @@
           <a:p>
             <a:fld id="{6700A58B-DD98-43D0-B791-721480A02982}" type="datetime1">
               <a:rPr lang="en-US" smtClean="0"/>
-              <a:t>6/26/25</a:t>
+              <a:t>6/11/26</a:t>
             </a:fld>
             <a:endParaRPr lang="en-US"/>
           </a:p>
@@ -8530,7 +8969,15 @@
           <a:p>
             <a:r>
               <a:rPr lang="en-US" sz="1400" dirty="0"/>
-              <a:t>Somewhere nearby in our TCM vectors should be the “Queen” vector because co-occurrence of man/king contexts is similar to woman/queen contexts even if the pair frequencies differ by group.</a:t>
+              <a:t>Somewhere nearby in our </a:t>
+            </a:r>
+            <a:r>
+              <a:rPr lang="en-US" sz="1400" dirty="0" err="1"/>
+              <a:t>GLoVe</a:t>
+            </a:r>
+            <a:r>
+              <a:rPr lang="en-US" sz="1400" dirty="0"/>
+              <a:t> vectors should be the “Queen” vector because co-occurrence of man/king contexts is similar to woman/queen contexts even if the pair frequencies differ within the original corpora.</a:t>
             </a:r>
           </a:p>
         </p:txBody>
@@ -8582,7 +9029,7 @@
           <a:p>
             <a:fld id="{6700A58B-DD98-43D0-B791-721480A02982}" type="datetime1">
               <a:rPr lang="en-US" smtClean="0"/>
-              <a:t>6/26/25</a:t>
+              <a:t>6/11/26</a:t>
             </a:fld>
             <a:endParaRPr lang="en-US"/>
           </a:p>
@@ -9082,7 +9529,7 @@
           <a:p>
             <a:fld id="{6700A58B-DD98-43D0-B791-721480A02982}" type="datetime1">
               <a:rPr lang="en-US" smtClean="0"/>
-              <a:t>6/26/25</a:t>
+              <a:t>6/11/26</a:t>
             </a:fld>
             <a:endParaRPr lang="en-US"/>
           </a:p>
@@ -9233,7 +9680,7 @@
           <a:p>
             <a:fld id="{6700A58B-DD98-43D0-B791-721480A02982}" type="datetime1">
               <a:rPr lang="en-US" smtClean="0"/>
-              <a:t>6/26/25</a:t>
+              <a:t>6/11/26</a:t>
             </a:fld>
             <a:endParaRPr lang="en-US"/>
           </a:p>
@@ -9262,7 +9709,7 @@
           <a:p>
             <a:r>
               <a:rPr lang="en-US" dirty="0"/>
-              <a:t>Interacting &amp; Improving with LLMs</a:t>
+              <a:t>Interacting &amp; Improving LLMs</a:t>
             </a:r>
           </a:p>
         </p:txBody>
@@ -9498,7 +9945,7 @@
           <a:p>
             <a:fld id="{6700A58B-DD98-43D0-B791-721480A02982}" type="datetime1">
               <a:rPr lang="en-US" smtClean="0"/>
-              <a:t>6/26/25</a:t>
+              <a:t>6/11/26</a:t>
             </a:fld>
             <a:endParaRPr lang="en-US"/>
           </a:p>
@@ -9741,7 +10188,7 @@
           <a:p>
             <a:fld id="{6700A58B-DD98-43D0-B791-721480A02982}" type="datetime1">
               <a:rPr lang="en-US" smtClean="0"/>
-              <a:t>6/26/25</a:t>
+              <a:t>6/11/26</a:t>
             </a:fld>
             <a:endParaRPr lang="en-US"/>
           </a:p>
@@ -9921,7 +10368,7 @@
         <p:spPr>
           <a:xfrm>
             <a:off x="3145134" y="2690336"/>
-            <a:ext cx="5370216" cy="1477328"/>
+            <a:ext cx="5370216" cy="2585323"/>
           </a:xfrm>
           <a:prstGeom prst="rect">
             <a:avLst/>
@@ -9941,6 +10388,15 @@
             <a:r>
               <a:rPr lang="en-US" i="1" dirty="0"/>
               <a:t>After building the workflow, the information retrieval and documents may need to be updated periodically but less difficult than fine-tuning (next slide).</a:t>
+            </a:r>
+          </a:p>
+          <a:p>
+            <a:endParaRPr lang="en-US" i="1" dirty="0"/>
+          </a:p>
+          <a:p>
+            <a:r>
+              <a:rPr lang="en-US" i="1" dirty="0"/>
+              <a:t>RAG is when your LLM searches the internet and gives you a cited answer.  You can build your own RAG data which is proprietary to your company’s knowledge.</a:t>
             </a:r>
           </a:p>
         </p:txBody>
@@ -10009,7 +10465,7 @@
           <a:p>
             <a:fld id="{6700A58B-DD98-43D0-B791-721480A02982}" type="datetime1">
               <a:rPr lang="en-US" smtClean="0"/>
-              <a:t>6/26/25</a:t>
+              <a:t>6/11/26</a:t>
             </a:fld>
             <a:endParaRPr lang="en-US"/>
           </a:p>
@@ -10284,7 +10740,7 @@
           <p:cNvPr id="2" name="Date Placeholder 1">
             <a:extLst>
               <a:ext uri="{FF2B5EF4-FFF2-40B4-BE49-F238E27FC236}">
-                <a16:creationId xmlns:a16="http://schemas.microsoft.com/office/drawing/2014/main" id="{6633163F-EC0B-A4AD-D4DD-AB8D3391BB2E}"/>
+                <a16:creationId xmlns:a16="http://schemas.microsoft.com/office/drawing/2014/main" id="{32EB48EC-2911-A561-79E7-B2937B19146B}"/>
               </a:ext>
             </a:extLst>
           </p:cNvPr>
@@ -10302,7 +10758,7 @@
           <a:p>
             <a:fld id="{6700A58B-DD98-43D0-B791-721480A02982}" type="datetime1">
               <a:rPr lang="en-US" smtClean="0"/>
-              <a:t>6/26/25</a:t>
+              <a:t>6/11/26</a:t>
             </a:fld>
             <a:endParaRPr lang="en-US"/>
           </a:p>
@@ -10313,7 +10769,7 @@
           <p:cNvPr id="3" name="Title 2">
             <a:extLst>
               <a:ext uri="{FF2B5EF4-FFF2-40B4-BE49-F238E27FC236}">
-                <a16:creationId xmlns:a16="http://schemas.microsoft.com/office/drawing/2014/main" id="{67A1F570-97BF-FEC1-BAAF-0FFAB037E655}"/>
+                <a16:creationId xmlns:a16="http://schemas.microsoft.com/office/drawing/2014/main" id="{8B10A81E-FD99-7A15-1F2B-5F6FB4CD5A59}"/>
               </a:ext>
             </a:extLst>
           </p:cNvPr>
@@ -10338,7 +10794,7 @@
           <p:cNvPr id="4" name="Footer Placeholder 3">
             <a:extLst>
               <a:ext uri="{FF2B5EF4-FFF2-40B4-BE49-F238E27FC236}">
-                <a16:creationId xmlns:a16="http://schemas.microsoft.com/office/drawing/2014/main" id="{A59F3914-EC9B-189D-C851-58D56760C081}"/>
+                <a16:creationId xmlns:a16="http://schemas.microsoft.com/office/drawing/2014/main" id="{CA24E469-97F7-10F4-F1FB-1EB311FCAC1B}"/>
               </a:ext>
             </a:extLst>
           </p:cNvPr>
@@ -10367,7 +10823,7 @@
           <p:cNvPr id="5" name="Slide Number Placeholder 4">
             <a:extLst>
               <a:ext uri="{FF2B5EF4-FFF2-40B4-BE49-F238E27FC236}">
-                <a16:creationId xmlns:a16="http://schemas.microsoft.com/office/drawing/2014/main" id="{4BE7B36A-38E0-E5C0-D25B-E49FABAD1188}"/>
+                <a16:creationId xmlns:a16="http://schemas.microsoft.com/office/drawing/2014/main" id="{C5160C6E-A56E-B79E-E6E6-30C43198E8D8}"/>
               </a:ext>
             </a:extLst>
           </p:cNvPr>
@@ -10397,7 +10853,7 @@
           <p:cNvPr id="6" name="Picture 5">
             <a:extLst>
               <a:ext uri="{FF2B5EF4-FFF2-40B4-BE49-F238E27FC236}">
-                <a16:creationId xmlns:a16="http://schemas.microsoft.com/office/drawing/2014/main" id="{8FB5AE6F-C663-05F9-E558-D28FAC5CE5DC}"/>
+                <a16:creationId xmlns:a16="http://schemas.microsoft.com/office/drawing/2014/main" id="{BA8AEDC6-A375-DC01-D224-0227E06C1512}"/>
               </a:ext>
             </a:extLst>
           </p:cNvPr>
@@ -10414,8 +10870,8 @@
         </p:blipFill>
         <p:spPr>
           <a:xfrm>
-            <a:off x="549817" y="1386549"/>
-            <a:ext cx="7965533" cy="4391254"/>
+            <a:off x="129887" y="1600592"/>
+            <a:ext cx="4689413" cy="4111769"/>
           </a:xfrm>
           <a:prstGeom prst="rect">
             <a:avLst/>
@@ -10427,7 +10883,7 @@
           <p:cNvPr id="7" name="Rectangle 6">
             <a:extLst>
               <a:ext uri="{FF2B5EF4-FFF2-40B4-BE49-F238E27FC236}">
-                <a16:creationId xmlns:a16="http://schemas.microsoft.com/office/drawing/2014/main" id="{118AC4B8-A497-67EB-C6BA-40345FBA9686}"/>
+                <a16:creationId xmlns:a16="http://schemas.microsoft.com/office/drawing/2014/main" id="{8802BD36-0918-601B-A8C9-A5EE084971B7}"/>
               </a:ext>
             </a:extLst>
           </p:cNvPr>
@@ -10436,509 +10892,7 @@
         </p:nvSpPr>
         <p:spPr>
           <a:xfrm>
-            <a:off x="2773345" y="4260501"/>
-            <a:ext cx="1798655" cy="492369"/>
-          </a:xfrm>
-          <a:prstGeom prst="rect">
-            <a:avLst/>
-          </a:prstGeom>
-          <a:noFill/>
-          <a:ln w="28575">
-            <a:solidFill>
-              <a:schemeClr val="accent1"/>
-            </a:solidFill>
-          </a:ln>
-        </p:spPr>
-        <p:style>
-          <a:lnRef idx="2">
-            <a:schemeClr val="accent1">
-              <a:shade val="15000"/>
-            </a:schemeClr>
-          </a:lnRef>
-          <a:fillRef idx="1">
-            <a:schemeClr val="accent1"/>
-          </a:fillRef>
-          <a:effectRef idx="0">
-            <a:schemeClr val="accent1"/>
-          </a:effectRef>
-          <a:fontRef idx="minor">
-            <a:schemeClr val="lt1"/>
-          </a:fontRef>
-        </p:style>
-        <p:txBody>
-          <a:bodyPr rtlCol="0" anchor="ctr"/>
-          <a:lstStyle/>
-          <a:p>
-            <a:pPr algn="ctr"/>
-            <a:endParaRPr lang="en-US"/>
-          </a:p>
-        </p:txBody>
-      </p:sp>
-    </p:spTree>
-    <p:extLst>
-      <p:ext uri="{BB962C8B-B14F-4D97-AF65-F5344CB8AC3E}">
-        <p14:creationId xmlns:p14="http://schemas.microsoft.com/office/powerpoint/2010/main" val="2414960521"/>
-      </p:ext>
-    </p:extLst>
-  </p:cSld>
-  <p:clrMapOvr>
-    <a:masterClrMapping/>
-  </p:clrMapOvr>
-</p:sld>
-</file>
-
-<file path=ppt/slides/slide26.xml><?xml version="1.0" encoding="utf-8"?>
-<p:sld xmlns:a="http://schemas.openxmlformats.org/drawingml/2006/main" xmlns:r="http://schemas.openxmlformats.org/officeDocument/2006/relationships" xmlns:p="http://schemas.openxmlformats.org/presentationml/2006/main">
-  <p:cSld>
-    <p:spTree>
-      <p:nvGrpSpPr>
-        <p:cNvPr id="1" name=""/>
-        <p:cNvGrpSpPr/>
-        <p:nvPr/>
-      </p:nvGrpSpPr>
-      <p:grpSpPr>
-        <a:xfrm>
-          <a:off x="0" y="0"/>
-          <a:ext cx="0" cy="0"/>
-          <a:chOff x="0" y="0"/>
-          <a:chExt cx="0" cy="0"/>
-        </a:xfrm>
-      </p:grpSpPr>
-      <p:sp>
-        <p:nvSpPr>
-          <p:cNvPr id="2" name="Date Placeholder 1">
-            <a:extLst>
-              <a:ext uri="{FF2B5EF4-FFF2-40B4-BE49-F238E27FC236}">
-                <a16:creationId xmlns:a16="http://schemas.microsoft.com/office/drawing/2014/main" id="{1EC0C8D9-ACEA-CF93-5002-7BCE351071BC}"/>
-              </a:ext>
-            </a:extLst>
-          </p:cNvPr>
-          <p:cNvSpPr>
-            <a:spLocks noGrp="1"/>
-          </p:cNvSpPr>
-          <p:nvPr>
-            <p:ph type="dt" sz="half" idx="10"/>
-          </p:nvPr>
-        </p:nvSpPr>
-        <p:spPr/>
-        <p:txBody>
-          <a:bodyPr/>
-          <a:lstStyle/>
-          <a:p>
-            <a:fld id="{6700A58B-DD98-43D0-B791-721480A02982}" type="datetime1">
-              <a:rPr lang="en-US" smtClean="0"/>
-              <a:t>6/26/25</a:t>
-            </a:fld>
-            <a:endParaRPr lang="en-US"/>
-          </a:p>
-        </p:txBody>
-      </p:sp>
-      <p:sp>
-        <p:nvSpPr>
-          <p:cNvPr id="3" name="Title 2">
-            <a:extLst>
-              <a:ext uri="{FF2B5EF4-FFF2-40B4-BE49-F238E27FC236}">
-                <a16:creationId xmlns:a16="http://schemas.microsoft.com/office/drawing/2014/main" id="{62016E52-85FA-8FA7-3764-5B83A12DABD3}"/>
-              </a:ext>
-            </a:extLst>
-          </p:cNvPr>
-          <p:cNvSpPr>
-            <a:spLocks noGrp="1"/>
-          </p:cNvSpPr>
-          <p:nvPr>
-            <p:ph type="title"/>
-          </p:nvPr>
-        </p:nvSpPr>
-        <p:spPr/>
-        <p:txBody>
-          <a:bodyPr/>
-          <a:lstStyle/>
-          <a:p>
-            <a:endParaRPr lang="en-US"/>
-          </a:p>
-        </p:txBody>
-      </p:sp>
-      <p:sp>
-        <p:nvSpPr>
-          <p:cNvPr id="4" name="Footer Placeholder 3">
-            <a:extLst>
-              <a:ext uri="{FF2B5EF4-FFF2-40B4-BE49-F238E27FC236}">
-                <a16:creationId xmlns:a16="http://schemas.microsoft.com/office/drawing/2014/main" id="{181DD7F8-AF00-FA84-6444-F9D4366B3CCF}"/>
-              </a:ext>
-            </a:extLst>
-          </p:cNvPr>
-          <p:cNvSpPr>
-            <a:spLocks noGrp="1"/>
-          </p:cNvSpPr>
-          <p:nvPr>
-            <p:ph type="ftr" sz="quarter" idx="3"/>
-          </p:nvPr>
-        </p:nvSpPr>
-        <p:spPr/>
-        <p:txBody>
-          <a:bodyPr/>
-          <a:lstStyle/>
-          <a:p>
-            <a:r>
-              <a:rPr lang="en-US"/>
-              <a:t>Kwartler</a:t>
-            </a:r>
-            <a:endParaRPr lang="en-US" dirty="0"/>
-          </a:p>
-        </p:txBody>
-      </p:sp>
-      <p:sp>
-        <p:nvSpPr>
-          <p:cNvPr id="5" name="Slide Number Placeholder 4">
-            <a:extLst>
-              <a:ext uri="{FF2B5EF4-FFF2-40B4-BE49-F238E27FC236}">
-                <a16:creationId xmlns:a16="http://schemas.microsoft.com/office/drawing/2014/main" id="{292C3BE8-3187-462E-F22C-473826523B2B}"/>
-              </a:ext>
-            </a:extLst>
-          </p:cNvPr>
-          <p:cNvSpPr>
-            <a:spLocks noGrp="1"/>
-          </p:cNvSpPr>
-          <p:nvPr>
-            <p:ph type="sldNum" sz="quarter" idx="4"/>
-          </p:nvPr>
-        </p:nvSpPr>
-        <p:spPr/>
-        <p:txBody>
-          <a:bodyPr/>
-          <a:lstStyle/>
-          <a:p>
-            <a:fld id="{37290FF7-652B-4475-AEAB-8B1A5D23AE09}" type="slidenum">
-              <a:rPr lang="en-US" smtClean="0"/>
-              <a:pPr/>
-              <a:t>26</a:t>
-            </a:fld>
-            <a:endParaRPr lang="en-US" dirty="0"/>
-          </a:p>
-        </p:txBody>
-      </p:sp>
-      <p:pic>
-        <p:nvPicPr>
-          <p:cNvPr id="7" name="Picture 6">
-            <a:extLst>
-              <a:ext uri="{FF2B5EF4-FFF2-40B4-BE49-F238E27FC236}">
-                <a16:creationId xmlns:a16="http://schemas.microsoft.com/office/drawing/2014/main" id="{444E34DA-A855-376C-5BC0-F6A216E777AB}"/>
-              </a:ext>
-            </a:extLst>
-          </p:cNvPr>
-          <p:cNvPicPr>
-            <a:picLocks noChangeAspect="1"/>
-          </p:cNvPicPr>
-          <p:nvPr/>
-        </p:nvPicPr>
-        <p:blipFill>
-          <a:blip r:embed="rId2"/>
-          <a:stretch>
-            <a:fillRect/>
-          </a:stretch>
-        </p:blipFill>
-        <p:spPr>
-          <a:xfrm>
-            <a:off x="947187" y="0"/>
-            <a:ext cx="7249625" cy="6858000"/>
-          </a:xfrm>
-          <a:prstGeom prst="rect">
-            <a:avLst/>
-          </a:prstGeom>
-        </p:spPr>
-      </p:pic>
-      <p:sp>
-        <p:nvSpPr>
-          <p:cNvPr id="8" name="Rectangle 7">
-            <a:extLst>
-              <a:ext uri="{FF2B5EF4-FFF2-40B4-BE49-F238E27FC236}">
-                <a16:creationId xmlns:a16="http://schemas.microsoft.com/office/drawing/2014/main" id="{461B964B-2AA8-D812-A594-233291C751D0}"/>
-              </a:ext>
-            </a:extLst>
-          </p:cNvPr>
-          <p:cNvSpPr/>
-          <p:nvPr/>
-        </p:nvSpPr>
-        <p:spPr>
-          <a:xfrm>
-            <a:off x="3938954" y="2411604"/>
-            <a:ext cx="1798655" cy="492369"/>
-          </a:xfrm>
-          <a:prstGeom prst="rect">
-            <a:avLst/>
-          </a:prstGeom>
-          <a:noFill/>
-          <a:ln w="28575">
-            <a:solidFill>
-              <a:schemeClr val="accent1"/>
-            </a:solidFill>
-          </a:ln>
-        </p:spPr>
-        <p:style>
-          <a:lnRef idx="2">
-            <a:schemeClr val="accent1">
-              <a:shade val="15000"/>
-            </a:schemeClr>
-          </a:lnRef>
-          <a:fillRef idx="1">
-            <a:schemeClr val="accent1"/>
-          </a:fillRef>
-          <a:effectRef idx="0">
-            <a:schemeClr val="accent1"/>
-          </a:effectRef>
-          <a:fontRef idx="minor">
-            <a:schemeClr val="lt1"/>
-          </a:fontRef>
-        </p:style>
-        <p:txBody>
-          <a:bodyPr rtlCol="0" anchor="ctr"/>
-          <a:lstStyle/>
-          <a:p>
-            <a:pPr algn="ctr"/>
-            <a:endParaRPr lang="en-US"/>
-          </a:p>
-        </p:txBody>
-      </p:sp>
-      <p:sp>
-        <p:nvSpPr>
-          <p:cNvPr id="9" name="Rectangle 8">
-            <a:extLst>
-              <a:ext uri="{FF2B5EF4-FFF2-40B4-BE49-F238E27FC236}">
-                <a16:creationId xmlns:a16="http://schemas.microsoft.com/office/drawing/2014/main" id="{C36A0B9C-37D2-EAD7-A6AC-5A7DEC6B9E4A}"/>
-              </a:ext>
-            </a:extLst>
-          </p:cNvPr>
-          <p:cNvSpPr/>
-          <p:nvPr/>
-        </p:nvSpPr>
-        <p:spPr>
-          <a:xfrm>
-            <a:off x="1230295" y="5174902"/>
-            <a:ext cx="2176096" cy="211016"/>
-          </a:xfrm>
-          <a:prstGeom prst="rect">
-            <a:avLst/>
-          </a:prstGeom>
-          <a:noFill/>
-          <a:ln w="28575">
-            <a:solidFill>
-              <a:schemeClr val="accent1"/>
-            </a:solidFill>
-          </a:ln>
-        </p:spPr>
-        <p:style>
-          <a:lnRef idx="2">
-            <a:schemeClr val="accent1">
-              <a:shade val="15000"/>
-            </a:schemeClr>
-          </a:lnRef>
-          <a:fillRef idx="1">
-            <a:schemeClr val="accent1"/>
-          </a:fillRef>
-          <a:effectRef idx="0">
-            <a:schemeClr val="accent1"/>
-          </a:effectRef>
-          <a:fontRef idx="minor">
-            <a:schemeClr val="lt1"/>
-          </a:fontRef>
-        </p:style>
-        <p:txBody>
-          <a:bodyPr rtlCol="0" anchor="ctr"/>
-          <a:lstStyle/>
-          <a:p>
-            <a:pPr algn="ctr"/>
-            <a:endParaRPr lang="en-US"/>
-          </a:p>
-        </p:txBody>
-      </p:sp>
-    </p:spTree>
-    <p:extLst>
-      <p:ext uri="{BB962C8B-B14F-4D97-AF65-F5344CB8AC3E}">
-        <p14:creationId xmlns:p14="http://schemas.microsoft.com/office/powerpoint/2010/main" val="180302517"/>
-      </p:ext>
-    </p:extLst>
-  </p:cSld>
-  <p:clrMapOvr>
-    <a:masterClrMapping/>
-  </p:clrMapOvr>
-</p:sld>
-</file>
-
-<file path=ppt/slides/slide27.xml><?xml version="1.0" encoding="utf-8"?>
-<p:sld xmlns:a="http://schemas.openxmlformats.org/drawingml/2006/main" xmlns:r="http://schemas.openxmlformats.org/officeDocument/2006/relationships" xmlns:p="http://schemas.openxmlformats.org/presentationml/2006/main">
-  <p:cSld>
-    <p:spTree>
-      <p:nvGrpSpPr>
-        <p:cNvPr id="1" name=""/>
-        <p:cNvGrpSpPr/>
-        <p:nvPr/>
-      </p:nvGrpSpPr>
-      <p:grpSpPr>
-        <a:xfrm>
-          <a:off x="0" y="0"/>
-          <a:ext cx="0" cy="0"/>
-          <a:chOff x="0" y="0"/>
-          <a:chExt cx="0" cy="0"/>
-        </a:xfrm>
-      </p:grpSpPr>
-      <p:sp>
-        <p:nvSpPr>
-          <p:cNvPr id="2" name="Date Placeholder 1">
-            <a:extLst>
-              <a:ext uri="{FF2B5EF4-FFF2-40B4-BE49-F238E27FC236}">
-                <a16:creationId xmlns:a16="http://schemas.microsoft.com/office/drawing/2014/main" id="{FEE982D9-07FE-E26F-797D-D59F41C98A02}"/>
-              </a:ext>
-            </a:extLst>
-          </p:cNvPr>
-          <p:cNvSpPr>
-            <a:spLocks noGrp="1"/>
-          </p:cNvSpPr>
-          <p:nvPr>
-            <p:ph type="dt" sz="half" idx="10"/>
-          </p:nvPr>
-        </p:nvSpPr>
-        <p:spPr/>
-        <p:txBody>
-          <a:bodyPr/>
-          <a:lstStyle/>
-          <a:p>
-            <a:fld id="{6700A58B-DD98-43D0-B791-721480A02982}" type="datetime1">
-              <a:rPr lang="en-US" smtClean="0"/>
-              <a:t>6/26/25</a:t>
-            </a:fld>
-            <a:endParaRPr lang="en-US"/>
-          </a:p>
-        </p:txBody>
-      </p:sp>
-      <p:sp>
-        <p:nvSpPr>
-          <p:cNvPr id="3" name="Title 2">
-            <a:extLst>
-              <a:ext uri="{FF2B5EF4-FFF2-40B4-BE49-F238E27FC236}">
-                <a16:creationId xmlns:a16="http://schemas.microsoft.com/office/drawing/2014/main" id="{95B2BC4D-0529-9FAC-CB74-6CED3BB12791}"/>
-              </a:ext>
-            </a:extLst>
-          </p:cNvPr>
-          <p:cNvSpPr>
-            <a:spLocks noGrp="1"/>
-          </p:cNvSpPr>
-          <p:nvPr>
-            <p:ph type="title"/>
-          </p:nvPr>
-        </p:nvSpPr>
-        <p:spPr/>
-        <p:txBody>
-          <a:bodyPr/>
-          <a:lstStyle/>
-          <a:p>
-            <a:endParaRPr lang="en-US"/>
-          </a:p>
-        </p:txBody>
-      </p:sp>
-      <p:sp>
-        <p:nvSpPr>
-          <p:cNvPr id="4" name="Footer Placeholder 3">
-            <a:extLst>
-              <a:ext uri="{FF2B5EF4-FFF2-40B4-BE49-F238E27FC236}">
-                <a16:creationId xmlns:a16="http://schemas.microsoft.com/office/drawing/2014/main" id="{036135FA-DD9E-24A7-2E95-E4CCDE8596A4}"/>
-              </a:ext>
-            </a:extLst>
-          </p:cNvPr>
-          <p:cNvSpPr>
-            <a:spLocks noGrp="1"/>
-          </p:cNvSpPr>
-          <p:nvPr>
-            <p:ph type="ftr" sz="quarter" idx="3"/>
-          </p:nvPr>
-        </p:nvSpPr>
-        <p:spPr/>
-        <p:txBody>
-          <a:bodyPr/>
-          <a:lstStyle/>
-          <a:p>
-            <a:r>
-              <a:rPr lang="en-US"/>
-              <a:t>Kwartler</a:t>
-            </a:r>
-            <a:endParaRPr lang="en-US" dirty="0"/>
-          </a:p>
-        </p:txBody>
-      </p:sp>
-      <p:sp>
-        <p:nvSpPr>
-          <p:cNvPr id="5" name="Slide Number Placeholder 4">
-            <a:extLst>
-              <a:ext uri="{FF2B5EF4-FFF2-40B4-BE49-F238E27FC236}">
-                <a16:creationId xmlns:a16="http://schemas.microsoft.com/office/drawing/2014/main" id="{82E6FFD3-AC9D-0F5B-C525-EED3B1AB25EF}"/>
-              </a:ext>
-            </a:extLst>
-          </p:cNvPr>
-          <p:cNvSpPr>
-            <a:spLocks noGrp="1"/>
-          </p:cNvSpPr>
-          <p:nvPr>
-            <p:ph type="sldNum" sz="quarter" idx="4"/>
-          </p:nvPr>
-        </p:nvSpPr>
-        <p:spPr/>
-        <p:txBody>
-          <a:bodyPr/>
-          <a:lstStyle/>
-          <a:p>
-            <a:fld id="{37290FF7-652B-4475-AEAB-8B1A5D23AE09}" type="slidenum">
-              <a:rPr lang="en-US" smtClean="0"/>
-              <a:pPr/>
-              <a:t>27</a:t>
-            </a:fld>
-            <a:endParaRPr lang="en-US" dirty="0"/>
-          </a:p>
-        </p:txBody>
-      </p:sp>
-      <p:pic>
-        <p:nvPicPr>
-          <p:cNvPr id="6" name="Picture 5">
-            <a:extLst>
-              <a:ext uri="{FF2B5EF4-FFF2-40B4-BE49-F238E27FC236}">
-                <a16:creationId xmlns:a16="http://schemas.microsoft.com/office/drawing/2014/main" id="{3F5F70CF-6E8E-1EB1-24EE-324FF1AEFDFB}"/>
-              </a:ext>
-            </a:extLst>
-          </p:cNvPr>
-          <p:cNvPicPr>
-            <a:picLocks noChangeAspect="1"/>
-          </p:cNvPicPr>
-          <p:nvPr/>
-        </p:nvPicPr>
-        <p:blipFill>
-          <a:blip r:embed="rId2"/>
-          <a:stretch>
-            <a:fillRect/>
-          </a:stretch>
-        </p:blipFill>
-        <p:spPr>
-          <a:xfrm>
-            <a:off x="685800" y="2292009"/>
-            <a:ext cx="7772400" cy="2273982"/>
-          </a:xfrm>
-          <a:prstGeom prst="rect">
-            <a:avLst/>
-          </a:prstGeom>
-        </p:spPr>
-      </p:pic>
-      <p:sp>
-        <p:nvSpPr>
-          <p:cNvPr id="7" name="Rectangle 6">
-            <a:extLst>
-              <a:ext uri="{FF2B5EF4-FFF2-40B4-BE49-F238E27FC236}">
-                <a16:creationId xmlns:a16="http://schemas.microsoft.com/office/drawing/2014/main" id="{B455697C-02BF-3D7F-F777-F8AF73245CB4}"/>
-              </a:ext>
-            </a:extLst>
-          </p:cNvPr>
-          <p:cNvSpPr/>
-          <p:nvPr/>
-        </p:nvSpPr>
-        <p:spPr>
-          <a:xfrm>
-            <a:off x="4652386" y="3717890"/>
+            <a:off x="763878" y="2757308"/>
             <a:ext cx="3862963" cy="341644"/>
           </a:xfrm>
           <a:prstGeom prst="rect">
@@ -10981,7 +10935,7 @@
           <p:cNvPr id="8" name="Rectangle 7">
             <a:extLst>
               <a:ext uri="{FF2B5EF4-FFF2-40B4-BE49-F238E27FC236}">
-                <a16:creationId xmlns:a16="http://schemas.microsoft.com/office/drawing/2014/main" id="{16B3B4FA-6A85-C27B-04BB-ACC038AF627C}"/>
+                <a16:creationId xmlns:a16="http://schemas.microsoft.com/office/drawing/2014/main" id="{78858794-2C20-5D29-B20C-3CBD475BF859}"/>
               </a:ext>
             </a:extLst>
           </p:cNvPr>
@@ -10990,8 +10944,8 @@
         </p:nvSpPr>
         <p:spPr>
           <a:xfrm>
-            <a:off x="754569" y="3970774"/>
-            <a:ext cx="1365634" cy="341644"/>
+            <a:off x="3442424" y="4151999"/>
+            <a:ext cx="732414" cy="341644"/>
           </a:xfrm>
           <a:prstGeom prst="rect">
             <a:avLst/>
@@ -11028,10 +10982,443 @@
           </a:p>
         </p:txBody>
       </p:sp>
+      <p:pic>
+        <p:nvPicPr>
+          <p:cNvPr id="9" name="Picture 8">
+            <a:extLst>
+              <a:ext uri="{FF2B5EF4-FFF2-40B4-BE49-F238E27FC236}">
+                <a16:creationId xmlns:a16="http://schemas.microsoft.com/office/drawing/2014/main" id="{77CA40E8-FAB0-08E0-213B-6825A05C4A98}"/>
+              </a:ext>
+            </a:extLst>
+          </p:cNvPr>
+          <p:cNvPicPr>
+            <a:picLocks noChangeAspect="1"/>
+          </p:cNvPicPr>
+          <p:nvPr/>
+        </p:nvPicPr>
+        <p:blipFill>
+          <a:blip r:embed="rId3"/>
+          <a:stretch>
+            <a:fillRect/>
+          </a:stretch>
+        </p:blipFill>
+        <p:spPr>
+          <a:xfrm>
+            <a:off x="5453291" y="2497081"/>
+            <a:ext cx="3086101" cy="1203741"/>
+          </a:xfrm>
+          <a:prstGeom prst="rect">
+            <a:avLst/>
+          </a:prstGeom>
+        </p:spPr>
+      </p:pic>
     </p:spTree>
     <p:extLst>
       <p:ext uri="{BB962C8B-B14F-4D97-AF65-F5344CB8AC3E}">
-        <p14:creationId xmlns:p14="http://schemas.microsoft.com/office/powerpoint/2010/main" val="2500593444"/>
+        <p14:creationId xmlns:p14="http://schemas.microsoft.com/office/powerpoint/2010/main" val="1940084527"/>
+      </p:ext>
+    </p:extLst>
+  </p:cSld>
+  <p:clrMapOvr>
+    <a:masterClrMapping/>
+  </p:clrMapOvr>
+</p:sld>
+</file>
+
+<file path=ppt/slides/slide26.xml><?xml version="1.0" encoding="utf-8"?>
+<p:sld xmlns:a="http://schemas.openxmlformats.org/drawingml/2006/main" xmlns:r="http://schemas.openxmlformats.org/officeDocument/2006/relationships" xmlns:p="http://schemas.openxmlformats.org/presentationml/2006/main">
+  <p:cSld>
+    <p:spTree>
+      <p:nvGrpSpPr>
+        <p:cNvPr id="1" name=""/>
+        <p:cNvGrpSpPr/>
+        <p:nvPr/>
+      </p:nvGrpSpPr>
+      <p:grpSpPr>
+        <a:xfrm>
+          <a:off x="0" y="0"/>
+          <a:ext cx="0" cy="0"/>
+          <a:chOff x="0" y="0"/>
+          <a:chExt cx="0" cy="0"/>
+        </a:xfrm>
+      </p:grpSpPr>
+      <p:sp>
+        <p:nvSpPr>
+          <p:cNvPr id="2" name="Date Placeholder 1">
+            <a:extLst>
+              <a:ext uri="{FF2B5EF4-FFF2-40B4-BE49-F238E27FC236}">
+                <a16:creationId xmlns:a16="http://schemas.microsoft.com/office/drawing/2014/main" id="{CE52A38B-35A3-20D6-C8C7-7D8F954F5AB5}"/>
+              </a:ext>
+            </a:extLst>
+          </p:cNvPr>
+          <p:cNvSpPr>
+            <a:spLocks noGrp="1"/>
+          </p:cNvSpPr>
+          <p:nvPr>
+            <p:ph type="dt" sz="half" idx="10"/>
+          </p:nvPr>
+        </p:nvSpPr>
+        <p:spPr/>
+        <p:txBody>
+          <a:bodyPr/>
+          <a:lstStyle/>
+          <a:p>
+            <a:fld id="{6700A58B-DD98-43D0-B791-721480A02982}" type="datetime1">
+              <a:rPr lang="en-US" smtClean="0"/>
+              <a:t>6/11/26</a:t>
+            </a:fld>
+            <a:endParaRPr lang="en-US"/>
+          </a:p>
+        </p:txBody>
+      </p:sp>
+      <p:sp>
+        <p:nvSpPr>
+          <p:cNvPr id="3" name="Title 2">
+            <a:extLst>
+              <a:ext uri="{FF2B5EF4-FFF2-40B4-BE49-F238E27FC236}">
+                <a16:creationId xmlns:a16="http://schemas.microsoft.com/office/drawing/2014/main" id="{92F00115-AB45-27B3-FE6C-87D4636EA87D}"/>
+              </a:ext>
+            </a:extLst>
+          </p:cNvPr>
+          <p:cNvSpPr>
+            <a:spLocks noGrp="1"/>
+          </p:cNvSpPr>
+          <p:nvPr>
+            <p:ph type="title"/>
+          </p:nvPr>
+        </p:nvSpPr>
+        <p:spPr/>
+        <p:txBody>
+          <a:bodyPr/>
+          <a:lstStyle/>
+          <a:p>
+            <a:endParaRPr lang="en-US"/>
+          </a:p>
+        </p:txBody>
+      </p:sp>
+      <p:sp>
+        <p:nvSpPr>
+          <p:cNvPr id="4" name="Footer Placeholder 3">
+            <a:extLst>
+              <a:ext uri="{FF2B5EF4-FFF2-40B4-BE49-F238E27FC236}">
+                <a16:creationId xmlns:a16="http://schemas.microsoft.com/office/drawing/2014/main" id="{59879000-9898-8D92-A24D-9D7FC1924E60}"/>
+              </a:ext>
+            </a:extLst>
+          </p:cNvPr>
+          <p:cNvSpPr>
+            <a:spLocks noGrp="1"/>
+          </p:cNvSpPr>
+          <p:nvPr>
+            <p:ph type="ftr" sz="quarter" idx="3"/>
+          </p:nvPr>
+        </p:nvSpPr>
+        <p:spPr/>
+        <p:txBody>
+          <a:bodyPr/>
+          <a:lstStyle/>
+          <a:p>
+            <a:r>
+              <a:rPr lang="en-US"/>
+              <a:t>Kwartler</a:t>
+            </a:r>
+            <a:endParaRPr lang="en-US" dirty="0"/>
+          </a:p>
+        </p:txBody>
+      </p:sp>
+      <p:sp>
+        <p:nvSpPr>
+          <p:cNvPr id="5" name="Slide Number Placeholder 4">
+            <a:extLst>
+              <a:ext uri="{FF2B5EF4-FFF2-40B4-BE49-F238E27FC236}">
+                <a16:creationId xmlns:a16="http://schemas.microsoft.com/office/drawing/2014/main" id="{830A4058-E180-BFB1-9FC3-73A0436F3D9D}"/>
+              </a:ext>
+            </a:extLst>
+          </p:cNvPr>
+          <p:cNvSpPr>
+            <a:spLocks noGrp="1"/>
+          </p:cNvSpPr>
+          <p:nvPr>
+            <p:ph type="sldNum" sz="quarter" idx="4"/>
+          </p:nvPr>
+        </p:nvSpPr>
+        <p:spPr/>
+        <p:txBody>
+          <a:bodyPr/>
+          <a:lstStyle/>
+          <a:p>
+            <a:fld id="{37290FF7-652B-4475-AEAB-8B1A5D23AE09}" type="slidenum">
+              <a:rPr lang="en-US" smtClean="0"/>
+              <a:pPr/>
+              <a:t>26</a:t>
+            </a:fld>
+            <a:endParaRPr lang="en-US" dirty="0"/>
+          </a:p>
+        </p:txBody>
+      </p:sp>
+      <p:pic>
+        <p:nvPicPr>
+          <p:cNvPr id="6" name="Picture 5">
+            <a:extLst>
+              <a:ext uri="{FF2B5EF4-FFF2-40B4-BE49-F238E27FC236}">
+                <a16:creationId xmlns:a16="http://schemas.microsoft.com/office/drawing/2014/main" id="{21153407-CB1A-FB68-49CC-C22B5B1B5AD0}"/>
+              </a:ext>
+            </a:extLst>
+          </p:cNvPr>
+          <p:cNvPicPr>
+            <a:picLocks noChangeAspect="1"/>
+          </p:cNvPicPr>
+          <p:nvPr/>
+        </p:nvPicPr>
+        <p:blipFill>
+          <a:blip r:embed="rId2"/>
+          <a:stretch>
+            <a:fillRect/>
+          </a:stretch>
+        </p:blipFill>
+        <p:spPr>
+          <a:xfrm>
+            <a:off x="1887542" y="1493406"/>
+            <a:ext cx="5368916" cy="4862945"/>
+          </a:xfrm>
+          <a:prstGeom prst="rect">
+            <a:avLst/>
+          </a:prstGeom>
+        </p:spPr>
+      </p:pic>
+    </p:spTree>
+    <p:extLst>
+      <p:ext uri="{BB962C8B-B14F-4D97-AF65-F5344CB8AC3E}">
+        <p14:creationId xmlns:p14="http://schemas.microsoft.com/office/powerpoint/2010/main" val="3449966819"/>
+      </p:ext>
+    </p:extLst>
+  </p:cSld>
+  <p:clrMapOvr>
+    <a:masterClrMapping/>
+  </p:clrMapOvr>
+</p:sld>
+</file>
+
+<file path=ppt/slides/slide27.xml><?xml version="1.0" encoding="utf-8"?>
+<p:sld xmlns:a="http://schemas.openxmlformats.org/drawingml/2006/main" xmlns:r="http://schemas.openxmlformats.org/officeDocument/2006/relationships" xmlns:p="http://schemas.openxmlformats.org/presentationml/2006/main">
+  <p:cSld>
+    <p:spTree>
+      <p:nvGrpSpPr>
+        <p:cNvPr id="1" name=""/>
+        <p:cNvGrpSpPr/>
+        <p:nvPr/>
+      </p:nvGrpSpPr>
+      <p:grpSpPr>
+        <a:xfrm>
+          <a:off x="0" y="0"/>
+          <a:ext cx="0" cy="0"/>
+          <a:chOff x="0" y="0"/>
+          <a:chExt cx="0" cy="0"/>
+        </a:xfrm>
+      </p:grpSpPr>
+      <p:sp>
+        <p:nvSpPr>
+          <p:cNvPr id="2" name="Date Placeholder 1">
+            <a:extLst>
+              <a:ext uri="{FF2B5EF4-FFF2-40B4-BE49-F238E27FC236}">
+                <a16:creationId xmlns:a16="http://schemas.microsoft.com/office/drawing/2014/main" id="{C5CBBBD6-BC60-327C-1753-12FB8404060B}"/>
+              </a:ext>
+            </a:extLst>
+          </p:cNvPr>
+          <p:cNvSpPr>
+            <a:spLocks noGrp="1"/>
+          </p:cNvSpPr>
+          <p:nvPr>
+            <p:ph type="dt" sz="half" idx="10"/>
+          </p:nvPr>
+        </p:nvSpPr>
+        <p:spPr/>
+        <p:txBody>
+          <a:bodyPr/>
+          <a:lstStyle/>
+          <a:p>
+            <a:fld id="{6700A58B-DD98-43D0-B791-721480A02982}" type="datetime1">
+              <a:rPr lang="en-US" smtClean="0"/>
+              <a:t>6/11/26</a:t>
+            </a:fld>
+            <a:endParaRPr lang="en-US"/>
+          </a:p>
+        </p:txBody>
+      </p:sp>
+      <p:sp>
+        <p:nvSpPr>
+          <p:cNvPr id="3" name="Title 2">
+            <a:extLst>
+              <a:ext uri="{FF2B5EF4-FFF2-40B4-BE49-F238E27FC236}">
+                <a16:creationId xmlns:a16="http://schemas.microsoft.com/office/drawing/2014/main" id="{D9C7FE54-767D-7175-5255-BAF33DF7AC5F}"/>
+              </a:ext>
+            </a:extLst>
+          </p:cNvPr>
+          <p:cNvSpPr>
+            <a:spLocks noGrp="1"/>
+          </p:cNvSpPr>
+          <p:nvPr>
+            <p:ph type="title"/>
+          </p:nvPr>
+        </p:nvSpPr>
+        <p:spPr>
+          <a:xfrm>
+            <a:off x="514350" y="224449"/>
+            <a:ext cx="7886700" cy="591477"/>
+          </a:xfrm>
+        </p:spPr>
+        <p:txBody>
+          <a:bodyPr/>
+          <a:lstStyle/>
+          <a:p>
+            <a:r>
+              <a:rPr lang="en-US" sz="2400" dirty="0"/>
+              <a:t>Although the knowledge of the model is static, the response has been “augmented” with contemporary information </a:t>
+            </a:r>
+          </a:p>
+        </p:txBody>
+      </p:sp>
+      <p:sp>
+        <p:nvSpPr>
+          <p:cNvPr id="4" name="Footer Placeholder 3">
+            <a:extLst>
+              <a:ext uri="{FF2B5EF4-FFF2-40B4-BE49-F238E27FC236}">
+                <a16:creationId xmlns:a16="http://schemas.microsoft.com/office/drawing/2014/main" id="{2E6C271F-C02D-D435-CBF2-2A8B23EED336}"/>
+              </a:ext>
+            </a:extLst>
+          </p:cNvPr>
+          <p:cNvSpPr>
+            <a:spLocks noGrp="1"/>
+          </p:cNvSpPr>
+          <p:nvPr>
+            <p:ph type="ftr" sz="quarter" idx="3"/>
+          </p:nvPr>
+        </p:nvSpPr>
+        <p:spPr/>
+        <p:txBody>
+          <a:bodyPr/>
+          <a:lstStyle/>
+          <a:p>
+            <a:r>
+              <a:rPr lang="en-US"/>
+              <a:t>Kwartler</a:t>
+            </a:r>
+            <a:endParaRPr lang="en-US" dirty="0"/>
+          </a:p>
+        </p:txBody>
+      </p:sp>
+      <p:sp>
+        <p:nvSpPr>
+          <p:cNvPr id="5" name="Slide Number Placeholder 4">
+            <a:extLst>
+              <a:ext uri="{FF2B5EF4-FFF2-40B4-BE49-F238E27FC236}">
+                <a16:creationId xmlns:a16="http://schemas.microsoft.com/office/drawing/2014/main" id="{717822C5-4A19-B0BE-6442-2491A376A7F7}"/>
+              </a:ext>
+            </a:extLst>
+          </p:cNvPr>
+          <p:cNvSpPr>
+            <a:spLocks noGrp="1"/>
+          </p:cNvSpPr>
+          <p:nvPr>
+            <p:ph type="sldNum" sz="quarter" idx="4"/>
+          </p:nvPr>
+        </p:nvSpPr>
+        <p:spPr/>
+        <p:txBody>
+          <a:bodyPr/>
+          <a:lstStyle/>
+          <a:p>
+            <a:fld id="{37290FF7-652B-4475-AEAB-8B1A5D23AE09}" type="slidenum">
+              <a:rPr lang="en-US" smtClean="0"/>
+              <a:pPr/>
+              <a:t>27</a:t>
+            </a:fld>
+            <a:endParaRPr lang="en-US" dirty="0"/>
+          </a:p>
+        </p:txBody>
+      </p:sp>
+      <p:pic>
+        <p:nvPicPr>
+          <p:cNvPr id="6" name="Picture 5">
+            <a:extLst>
+              <a:ext uri="{FF2B5EF4-FFF2-40B4-BE49-F238E27FC236}">
+                <a16:creationId xmlns:a16="http://schemas.microsoft.com/office/drawing/2014/main" id="{DC404C68-BEBC-371E-86B2-7871BF9CC9E3}"/>
+              </a:ext>
+            </a:extLst>
+          </p:cNvPr>
+          <p:cNvPicPr>
+            <a:picLocks noChangeAspect="1"/>
+          </p:cNvPicPr>
+          <p:nvPr/>
+        </p:nvPicPr>
+        <p:blipFill>
+          <a:blip r:embed="rId2"/>
+          <a:stretch>
+            <a:fillRect/>
+          </a:stretch>
+        </p:blipFill>
+        <p:spPr>
+          <a:xfrm>
+            <a:off x="628650" y="1098960"/>
+            <a:ext cx="7772400" cy="4070006"/>
+          </a:xfrm>
+          <a:prstGeom prst="rect">
+            <a:avLst/>
+          </a:prstGeom>
+        </p:spPr>
+      </p:pic>
+      <p:sp>
+        <p:nvSpPr>
+          <p:cNvPr id="7" name="Rectangle 6">
+            <a:extLst>
+              <a:ext uri="{FF2B5EF4-FFF2-40B4-BE49-F238E27FC236}">
+                <a16:creationId xmlns:a16="http://schemas.microsoft.com/office/drawing/2014/main" id="{3E771BC4-0A56-4632-527A-08333F048E87}"/>
+              </a:ext>
+            </a:extLst>
+          </p:cNvPr>
+          <p:cNvSpPr/>
+          <p:nvPr/>
+        </p:nvSpPr>
+        <p:spPr>
+          <a:xfrm>
+            <a:off x="514350" y="5617029"/>
+            <a:ext cx="7886700" cy="502417"/>
+          </a:xfrm>
+          <a:prstGeom prst="rect">
+            <a:avLst/>
+          </a:prstGeom>
+        </p:spPr>
+        <p:style>
+          <a:lnRef idx="2">
+            <a:schemeClr val="accent1">
+              <a:shade val="15000"/>
+            </a:schemeClr>
+          </a:lnRef>
+          <a:fillRef idx="1">
+            <a:schemeClr val="accent1"/>
+          </a:fillRef>
+          <a:effectRef idx="0">
+            <a:schemeClr val="accent1"/>
+          </a:effectRef>
+          <a:fontRef idx="minor">
+            <a:schemeClr val="lt1"/>
+          </a:fontRef>
+        </p:style>
+        <p:txBody>
+          <a:bodyPr rtlCol="0" anchor="ctr"/>
+          <a:lstStyle/>
+          <a:p>
+            <a:pPr algn="ctr"/>
+            <a:r>
+              <a:rPr lang="en-US" dirty="0"/>
+              <a:t>We are going to make a vastly simplified version of this augmented workflow.</a:t>
+            </a:r>
+          </a:p>
+        </p:txBody>
+      </p:sp>
+    </p:spTree>
+    <p:extLst>
+      <p:ext uri="{BB962C8B-B14F-4D97-AF65-F5344CB8AC3E}">
+        <p14:creationId xmlns:p14="http://schemas.microsoft.com/office/powerpoint/2010/main" val="2275084196"/>
       </p:ext>
     </p:extLst>
   </p:cSld>
@@ -11063,7 +11450,7 @@
           <p:cNvPr id="2" name="Date Placeholder 1">
             <a:extLst>
               <a:ext uri="{FF2B5EF4-FFF2-40B4-BE49-F238E27FC236}">
-                <a16:creationId xmlns:a16="http://schemas.microsoft.com/office/drawing/2014/main" id="{C5CBBBD6-BC60-327C-1753-12FB8404060B}"/>
+                <a16:creationId xmlns:a16="http://schemas.microsoft.com/office/drawing/2014/main" id="{7F467E3F-D700-C40B-FAB5-7B3DBE3C529E}"/>
               </a:ext>
             </a:extLst>
           </p:cNvPr>
@@ -11081,7 +11468,7 @@
           <a:p>
             <a:fld id="{6700A58B-DD98-43D0-B791-721480A02982}" type="datetime1">
               <a:rPr lang="en-US" smtClean="0"/>
-              <a:t>6/26/25</a:t>
+              <a:t>6/11/26</a:t>
             </a:fld>
             <a:endParaRPr lang="en-US"/>
           </a:p>
@@ -11092,7 +11479,7 @@
           <p:cNvPr id="3" name="Title 2">
             <a:extLst>
               <a:ext uri="{FF2B5EF4-FFF2-40B4-BE49-F238E27FC236}">
-                <a16:creationId xmlns:a16="http://schemas.microsoft.com/office/drawing/2014/main" id="{D9C7FE54-767D-7175-5255-BAF33DF7AC5F}"/>
+                <a16:creationId xmlns:a16="http://schemas.microsoft.com/office/drawing/2014/main" id="{547365B7-C1D3-9AA4-905E-B6235B2E5101}"/>
               </a:ext>
             </a:extLst>
           </p:cNvPr>
@@ -11103,19 +11490,14 @@
             <p:ph type="title"/>
           </p:nvPr>
         </p:nvSpPr>
-        <p:spPr>
-          <a:xfrm>
-            <a:off x="514350" y="224449"/>
-            <a:ext cx="7886700" cy="591477"/>
-          </a:xfrm>
-        </p:spPr>
+        <p:spPr/>
         <p:txBody>
           <a:bodyPr/>
           <a:lstStyle/>
           <a:p>
             <a:r>
-              <a:rPr lang="en-US" sz="2400" dirty="0"/>
-              <a:t>Although the knowledge of the model is static, the response has been “augmented” with contemporary information </a:t>
+              <a:rPr lang="en-US" dirty="0"/>
+              <a:t>Retrieval Augmented Generation</a:t>
             </a:r>
           </a:p>
         </p:txBody>
@@ -11125,7 +11507,7 @@
           <p:cNvPr id="4" name="Footer Placeholder 3">
             <a:extLst>
               <a:ext uri="{FF2B5EF4-FFF2-40B4-BE49-F238E27FC236}">
-                <a16:creationId xmlns:a16="http://schemas.microsoft.com/office/drawing/2014/main" id="{2E6C271F-C02D-D435-CBF2-2A8B23EED336}"/>
+                <a16:creationId xmlns:a16="http://schemas.microsoft.com/office/drawing/2014/main" id="{C251FB5D-AE86-3D0A-9778-A8D3EF0A8D58}"/>
               </a:ext>
             </a:extLst>
           </p:cNvPr>
@@ -11154,7 +11536,7 @@
           <p:cNvPr id="5" name="Slide Number Placeholder 4">
             <a:extLst>
               <a:ext uri="{FF2B5EF4-FFF2-40B4-BE49-F238E27FC236}">
-                <a16:creationId xmlns:a16="http://schemas.microsoft.com/office/drawing/2014/main" id="{717822C5-4A19-B0BE-6442-2491A376A7F7}"/>
+                <a16:creationId xmlns:a16="http://schemas.microsoft.com/office/drawing/2014/main" id="{5CE8D14E-30BE-5CE2-24B2-5C4AA869911C}"/>
               </a:ext>
             </a:extLst>
           </p:cNvPr>
@@ -11174,231 +11556,6 @@
               <a:rPr lang="en-US" smtClean="0"/>
               <a:pPr/>
               <a:t>28</a:t>
-            </a:fld>
-            <a:endParaRPr lang="en-US" dirty="0"/>
-          </a:p>
-        </p:txBody>
-      </p:sp>
-      <p:pic>
-        <p:nvPicPr>
-          <p:cNvPr id="6" name="Picture 5">
-            <a:extLst>
-              <a:ext uri="{FF2B5EF4-FFF2-40B4-BE49-F238E27FC236}">
-                <a16:creationId xmlns:a16="http://schemas.microsoft.com/office/drawing/2014/main" id="{DC404C68-BEBC-371E-86B2-7871BF9CC9E3}"/>
-              </a:ext>
-            </a:extLst>
-          </p:cNvPr>
-          <p:cNvPicPr>
-            <a:picLocks noChangeAspect="1"/>
-          </p:cNvPicPr>
-          <p:nvPr/>
-        </p:nvPicPr>
-        <p:blipFill>
-          <a:blip r:embed="rId2"/>
-          <a:stretch>
-            <a:fillRect/>
-          </a:stretch>
-        </p:blipFill>
-        <p:spPr>
-          <a:xfrm>
-            <a:off x="628650" y="1098960"/>
-            <a:ext cx="7772400" cy="4070006"/>
-          </a:xfrm>
-          <a:prstGeom prst="rect">
-            <a:avLst/>
-          </a:prstGeom>
-        </p:spPr>
-      </p:pic>
-      <p:sp>
-        <p:nvSpPr>
-          <p:cNvPr id="7" name="Rectangle 6">
-            <a:extLst>
-              <a:ext uri="{FF2B5EF4-FFF2-40B4-BE49-F238E27FC236}">
-                <a16:creationId xmlns:a16="http://schemas.microsoft.com/office/drawing/2014/main" id="{3E771BC4-0A56-4632-527A-08333F048E87}"/>
-              </a:ext>
-            </a:extLst>
-          </p:cNvPr>
-          <p:cNvSpPr/>
-          <p:nvPr/>
-        </p:nvSpPr>
-        <p:spPr>
-          <a:xfrm>
-            <a:off x="514350" y="5617029"/>
-            <a:ext cx="7886700" cy="502417"/>
-          </a:xfrm>
-          <a:prstGeom prst="rect">
-            <a:avLst/>
-          </a:prstGeom>
-        </p:spPr>
-        <p:style>
-          <a:lnRef idx="2">
-            <a:schemeClr val="accent1">
-              <a:shade val="15000"/>
-            </a:schemeClr>
-          </a:lnRef>
-          <a:fillRef idx="1">
-            <a:schemeClr val="accent1"/>
-          </a:fillRef>
-          <a:effectRef idx="0">
-            <a:schemeClr val="accent1"/>
-          </a:effectRef>
-          <a:fontRef idx="minor">
-            <a:schemeClr val="lt1"/>
-          </a:fontRef>
-        </p:style>
-        <p:txBody>
-          <a:bodyPr rtlCol="0" anchor="ctr"/>
-          <a:lstStyle/>
-          <a:p>
-            <a:pPr algn="ctr"/>
-            <a:r>
-              <a:rPr lang="en-US" dirty="0"/>
-              <a:t>We are going to make a vastly simplified version of this augmented workflow.</a:t>
-            </a:r>
-          </a:p>
-        </p:txBody>
-      </p:sp>
-    </p:spTree>
-    <p:extLst>
-      <p:ext uri="{BB962C8B-B14F-4D97-AF65-F5344CB8AC3E}">
-        <p14:creationId xmlns:p14="http://schemas.microsoft.com/office/powerpoint/2010/main" val="2275084196"/>
-      </p:ext>
-    </p:extLst>
-  </p:cSld>
-  <p:clrMapOvr>
-    <a:masterClrMapping/>
-  </p:clrMapOvr>
-</p:sld>
-</file>
-
-<file path=ppt/slides/slide29.xml><?xml version="1.0" encoding="utf-8"?>
-<p:sld xmlns:a="http://schemas.openxmlformats.org/drawingml/2006/main" xmlns:r="http://schemas.openxmlformats.org/officeDocument/2006/relationships" xmlns:p="http://schemas.openxmlformats.org/presentationml/2006/main">
-  <p:cSld>
-    <p:spTree>
-      <p:nvGrpSpPr>
-        <p:cNvPr id="1" name=""/>
-        <p:cNvGrpSpPr/>
-        <p:nvPr/>
-      </p:nvGrpSpPr>
-      <p:grpSpPr>
-        <a:xfrm>
-          <a:off x="0" y="0"/>
-          <a:ext cx="0" cy="0"/>
-          <a:chOff x="0" y="0"/>
-          <a:chExt cx="0" cy="0"/>
-        </a:xfrm>
-      </p:grpSpPr>
-      <p:sp>
-        <p:nvSpPr>
-          <p:cNvPr id="2" name="Date Placeholder 1">
-            <a:extLst>
-              <a:ext uri="{FF2B5EF4-FFF2-40B4-BE49-F238E27FC236}">
-                <a16:creationId xmlns:a16="http://schemas.microsoft.com/office/drawing/2014/main" id="{7F467E3F-D700-C40B-FAB5-7B3DBE3C529E}"/>
-              </a:ext>
-            </a:extLst>
-          </p:cNvPr>
-          <p:cNvSpPr>
-            <a:spLocks noGrp="1"/>
-          </p:cNvSpPr>
-          <p:nvPr>
-            <p:ph type="dt" sz="half" idx="10"/>
-          </p:nvPr>
-        </p:nvSpPr>
-        <p:spPr/>
-        <p:txBody>
-          <a:bodyPr/>
-          <a:lstStyle/>
-          <a:p>
-            <a:fld id="{6700A58B-DD98-43D0-B791-721480A02982}" type="datetime1">
-              <a:rPr lang="en-US" smtClean="0"/>
-              <a:t>6/26/25</a:t>
-            </a:fld>
-            <a:endParaRPr lang="en-US"/>
-          </a:p>
-        </p:txBody>
-      </p:sp>
-      <p:sp>
-        <p:nvSpPr>
-          <p:cNvPr id="3" name="Title 2">
-            <a:extLst>
-              <a:ext uri="{FF2B5EF4-FFF2-40B4-BE49-F238E27FC236}">
-                <a16:creationId xmlns:a16="http://schemas.microsoft.com/office/drawing/2014/main" id="{547365B7-C1D3-9AA4-905E-B6235B2E5101}"/>
-              </a:ext>
-            </a:extLst>
-          </p:cNvPr>
-          <p:cNvSpPr>
-            <a:spLocks noGrp="1"/>
-          </p:cNvSpPr>
-          <p:nvPr>
-            <p:ph type="title"/>
-          </p:nvPr>
-        </p:nvSpPr>
-        <p:spPr/>
-        <p:txBody>
-          <a:bodyPr/>
-          <a:lstStyle/>
-          <a:p>
-            <a:r>
-              <a:rPr lang="en-US" dirty="0"/>
-              <a:t>Retrieval Augmented Generation</a:t>
-            </a:r>
-          </a:p>
-        </p:txBody>
-      </p:sp>
-      <p:sp>
-        <p:nvSpPr>
-          <p:cNvPr id="4" name="Footer Placeholder 3">
-            <a:extLst>
-              <a:ext uri="{FF2B5EF4-FFF2-40B4-BE49-F238E27FC236}">
-                <a16:creationId xmlns:a16="http://schemas.microsoft.com/office/drawing/2014/main" id="{C251FB5D-AE86-3D0A-9778-A8D3EF0A8D58}"/>
-              </a:ext>
-            </a:extLst>
-          </p:cNvPr>
-          <p:cNvSpPr>
-            <a:spLocks noGrp="1"/>
-          </p:cNvSpPr>
-          <p:nvPr>
-            <p:ph type="ftr" sz="quarter" idx="3"/>
-          </p:nvPr>
-        </p:nvSpPr>
-        <p:spPr/>
-        <p:txBody>
-          <a:bodyPr/>
-          <a:lstStyle/>
-          <a:p>
-            <a:r>
-              <a:rPr lang="en-US"/>
-              <a:t>Kwartler</a:t>
-            </a:r>
-            <a:endParaRPr lang="en-US" dirty="0"/>
-          </a:p>
-        </p:txBody>
-      </p:sp>
-      <p:sp>
-        <p:nvSpPr>
-          <p:cNvPr id="5" name="Slide Number Placeholder 4">
-            <a:extLst>
-              <a:ext uri="{FF2B5EF4-FFF2-40B4-BE49-F238E27FC236}">
-                <a16:creationId xmlns:a16="http://schemas.microsoft.com/office/drawing/2014/main" id="{5CE8D14E-30BE-5CE2-24B2-5C4AA869911C}"/>
-              </a:ext>
-            </a:extLst>
-          </p:cNvPr>
-          <p:cNvSpPr>
-            <a:spLocks noGrp="1"/>
-          </p:cNvSpPr>
-          <p:nvPr>
-            <p:ph type="sldNum" sz="quarter" idx="4"/>
-          </p:nvPr>
-        </p:nvSpPr>
-        <p:spPr/>
-        <p:txBody>
-          <a:bodyPr/>
-          <a:lstStyle/>
-          <a:p>
-            <a:fld id="{37290FF7-652B-4475-AEAB-8B1A5D23AE09}" type="slidenum">
-              <a:rPr lang="en-US" smtClean="0"/>
-              <a:pPr/>
-              <a:t>29</a:t>
             </a:fld>
             <a:endParaRPr lang="en-US" dirty="0"/>
           </a:p>
@@ -11464,6 +11621,274 @@
 </p:sld>
 </file>
 
+<file path=ppt/slides/slide29.xml><?xml version="1.0" encoding="utf-8"?>
+<p:sld xmlns:a="http://schemas.openxmlformats.org/drawingml/2006/main" xmlns:r="http://schemas.openxmlformats.org/officeDocument/2006/relationships" xmlns:p="http://schemas.openxmlformats.org/presentationml/2006/main">
+  <p:cSld>
+    <p:spTree>
+      <p:nvGrpSpPr>
+        <p:cNvPr id="1" name=""/>
+        <p:cNvGrpSpPr/>
+        <p:nvPr/>
+      </p:nvGrpSpPr>
+      <p:grpSpPr>
+        <a:xfrm>
+          <a:off x="0" y="0"/>
+          <a:ext cx="0" cy="0"/>
+          <a:chOff x="0" y="0"/>
+          <a:chExt cx="0" cy="0"/>
+        </a:xfrm>
+      </p:grpSpPr>
+      <p:sp>
+        <p:nvSpPr>
+          <p:cNvPr id="2" name="Date Placeholder 1">
+            <a:extLst>
+              <a:ext uri="{FF2B5EF4-FFF2-40B4-BE49-F238E27FC236}">
+                <a16:creationId xmlns:a16="http://schemas.microsoft.com/office/drawing/2014/main" id="{382E6408-6DE3-5EFA-DD6C-3A3A180B17BD}"/>
+              </a:ext>
+            </a:extLst>
+          </p:cNvPr>
+          <p:cNvSpPr>
+            <a:spLocks noGrp="1"/>
+          </p:cNvSpPr>
+          <p:nvPr>
+            <p:ph type="dt" sz="half" idx="10"/>
+          </p:nvPr>
+        </p:nvSpPr>
+        <p:spPr/>
+        <p:txBody>
+          <a:bodyPr/>
+          <a:lstStyle/>
+          <a:p>
+            <a:fld id="{6700A58B-DD98-43D0-B791-721480A02982}" type="datetime1">
+              <a:rPr lang="en-US" smtClean="0"/>
+              <a:t>6/11/26</a:t>
+            </a:fld>
+            <a:endParaRPr lang="en-US"/>
+          </a:p>
+        </p:txBody>
+      </p:sp>
+      <p:sp>
+        <p:nvSpPr>
+          <p:cNvPr id="3" name="Title 2">
+            <a:extLst>
+              <a:ext uri="{FF2B5EF4-FFF2-40B4-BE49-F238E27FC236}">
+                <a16:creationId xmlns:a16="http://schemas.microsoft.com/office/drawing/2014/main" id="{49A30653-E178-6320-D22E-C326C3E3F3BE}"/>
+              </a:ext>
+            </a:extLst>
+          </p:cNvPr>
+          <p:cNvSpPr>
+            <a:spLocks noGrp="1"/>
+          </p:cNvSpPr>
+          <p:nvPr>
+            <p:ph type="title"/>
+          </p:nvPr>
+        </p:nvSpPr>
+        <p:spPr/>
+        <p:txBody>
+          <a:bodyPr/>
+          <a:lstStyle/>
+          <a:p>
+            <a:r>
+              <a:rPr lang="en-US" dirty="0"/>
+              <a:t>How does RAG work?</a:t>
+            </a:r>
+          </a:p>
+        </p:txBody>
+      </p:sp>
+      <p:sp>
+        <p:nvSpPr>
+          <p:cNvPr id="4" name="Footer Placeholder 3">
+            <a:extLst>
+              <a:ext uri="{FF2B5EF4-FFF2-40B4-BE49-F238E27FC236}">
+                <a16:creationId xmlns:a16="http://schemas.microsoft.com/office/drawing/2014/main" id="{EE4EE24F-DC42-C0F2-BC7C-CE19BC983103}"/>
+              </a:ext>
+            </a:extLst>
+          </p:cNvPr>
+          <p:cNvSpPr>
+            <a:spLocks noGrp="1"/>
+          </p:cNvSpPr>
+          <p:nvPr>
+            <p:ph type="ftr" sz="quarter" idx="3"/>
+          </p:nvPr>
+        </p:nvSpPr>
+        <p:spPr/>
+        <p:txBody>
+          <a:bodyPr/>
+          <a:lstStyle/>
+          <a:p>
+            <a:r>
+              <a:rPr lang="en-US"/>
+              <a:t>Kwartler</a:t>
+            </a:r>
+            <a:endParaRPr lang="en-US" dirty="0"/>
+          </a:p>
+        </p:txBody>
+      </p:sp>
+      <p:sp>
+        <p:nvSpPr>
+          <p:cNvPr id="5" name="Slide Number Placeholder 4">
+            <a:extLst>
+              <a:ext uri="{FF2B5EF4-FFF2-40B4-BE49-F238E27FC236}">
+                <a16:creationId xmlns:a16="http://schemas.microsoft.com/office/drawing/2014/main" id="{78A7129D-183D-BFE4-B98E-05E61D4D5D64}"/>
+              </a:ext>
+            </a:extLst>
+          </p:cNvPr>
+          <p:cNvSpPr>
+            <a:spLocks noGrp="1"/>
+          </p:cNvSpPr>
+          <p:nvPr>
+            <p:ph type="sldNum" sz="quarter" idx="4"/>
+          </p:nvPr>
+        </p:nvSpPr>
+        <p:spPr/>
+        <p:txBody>
+          <a:bodyPr/>
+          <a:lstStyle/>
+          <a:p>
+            <a:fld id="{37290FF7-652B-4475-AEAB-8B1A5D23AE09}" type="slidenum">
+              <a:rPr lang="en-US" smtClean="0"/>
+              <a:pPr/>
+              <a:t>29</a:t>
+            </a:fld>
+            <a:endParaRPr lang="en-US" dirty="0"/>
+          </a:p>
+        </p:txBody>
+      </p:sp>
+      <p:sp>
+        <p:nvSpPr>
+          <p:cNvPr id="9" name="TextBox 8">
+            <a:extLst>
+              <a:ext uri="{FF2B5EF4-FFF2-40B4-BE49-F238E27FC236}">
+                <a16:creationId xmlns:a16="http://schemas.microsoft.com/office/drawing/2014/main" id="{B24FA475-2BB7-444F-96D3-CF1D03CB8AF8}"/>
+              </a:ext>
+            </a:extLst>
+          </p:cNvPr>
+          <p:cNvSpPr txBox="1"/>
+          <p:nvPr/>
+        </p:nvSpPr>
+        <p:spPr>
+          <a:xfrm>
+            <a:off x="371789" y="1305341"/>
+            <a:ext cx="8420519" cy="4585871"/>
+          </a:xfrm>
+          <a:prstGeom prst="rect">
+            <a:avLst/>
+          </a:prstGeom>
+          <a:noFill/>
+        </p:spPr>
+        <p:txBody>
+          <a:bodyPr wrap="square">
+            <a:spAutoFit/>
+          </a:bodyPr>
+          <a:lstStyle/>
+          <a:p>
+            <a:r>
+              <a:rPr lang="en-US" sz="2000" b="1" dirty="0">
+                <a:solidFill>
+                  <a:schemeClr val="accent1"/>
+                </a:solidFill>
+              </a:rPr>
+              <a:t>How RAG Works:</a:t>
+            </a:r>
+          </a:p>
+          <a:p>
+            <a:pPr marL="285750" indent="-285750">
+              <a:buFont typeface="Arial" panose="020B0604020202020204" pitchFamily="34" charset="0"/>
+              <a:buChar char="•"/>
+            </a:pPr>
+            <a:r>
+              <a:rPr lang="en-US" dirty="0"/>
+              <a:t>Query Input: User submits a question or prompt.</a:t>
+            </a:r>
+          </a:p>
+          <a:p>
+            <a:pPr marL="285750" indent="-285750">
+              <a:buFont typeface="Arial" panose="020B0604020202020204" pitchFamily="34" charset="0"/>
+              <a:buChar char="•"/>
+            </a:pPr>
+            <a:r>
+              <a:rPr lang="en-US" dirty="0"/>
+              <a:t>Document Retrieval: Relevant documents are fetched from a vector database or external sources that have semantic meaning similar to the user’s prompt (nearby vectors).</a:t>
+            </a:r>
+          </a:p>
+          <a:p>
+            <a:pPr marL="285750" indent="-285750">
+              <a:buFont typeface="Arial" panose="020B0604020202020204" pitchFamily="34" charset="0"/>
+              <a:buChar char="•"/>
+            </a:pPr>
+            <a:r>
+              <a:rPr lang="en-US" dirty="0"/>
+              <a:t>Contextual Response Generation: The user’s prompt + Retrieved documents are used to generate a coherent response.</a:t>
+            </a:r>
+          </a:p>
+          <a:p>
+            <a:pPr marL="285750" indent="-285750">
+              <a:buFont typeface="Arial" panose="020B0604020202020204" pitchFamily="34" charset="0"/>
+              <a:buChar char="•"/>
+            </a:pPr>
+            <a:r>
+              <a:rPr lang="en-US" dirty="0"/>
+              <a:t>Final Output: Response is returned to the user, grounded in retrieved knowledge.</a:t>
+            </a:r>
+          </a:p>
+          <a:p>
+            <a:endParaRPr lang="en-US" dirty="0"/>
+          </a:p>
+          <a:p>
+            <a:r>
+              <a:rPr lang="en-US" sz="2000" b="1" dirty="0">
+                <a:solidFill>
+                  <a:schemeClr val="accent1"/>
+                </a:solidFill>
+              </a:rPr>
+              <a:t>Benefits of RAG:</a:t>
+            </a:r>
+          </a:p>
+          <a:p>
+            <a:r>
+              <a:rPr lang="en-US" b="1" dirty="0"/>
+              <a:t>Improved Accuracy</a:t>
+            </a:r>
+            <a:r>
+              <a:rPr lang="en-US" dirty="0"/>
+              <a:t>: By referencing external knowledge bases, RAG reduces errors and hallucinations.</a:t>
+            </a:r>
+          </a:p>
+          <a:p>
+            <a:r>
+              <a:rPr lang="en-US" b="1" dirty="0"/>
+              <a:t>Up-to-Date Information</a:t>
+            </a:r>
+            <a:r>
+              <a:rPr lang="en-US" dirty="0"/>
+              <a:t>: RAG allows LLMs to access current information, overcoming knowledge cut-offs</a:t>
+            </a:r>
+          </a:p>
+          <a:p>
+            <a:r>
+              <a:rPr lang="en-US" b="1" dirty="0"/>
+              <a:t>Flexibility and Scalability</a:t>
+            </a:r>
+            <a:r>
+              <a:rPr lang="en-US" dirty="0"/>
+              <a:t>: RAG can be customized for specific domains, companies and industries, adding non-public information to your LLM responses </a:t>
+            </a:r>
+          </a:p>
+        </p:txBody>
+      </p:sp>
+    </p:spTree>
+    <p:extLst>
+      <p:ext uri="{BB962C8B-B14F-4D97-AF65-F5344CB8AC3E}">
+        <p14:creationId xmlns:p14="http://schemas.microsoft.com/office/powerpoint/2010/main" val="91603051"/>
+      </p:ext>
+    </p:extLst>
+  </p:cSld>
+  <p:clrMapOvr>
+    <a:masterClrMapping/>
+  </p:clrMapOvr>
+</p:sld>
+</file>
+
 <file path=ppt/slides/slide3.xml><?xml version="1.0" encoding="utf-8"?>
 <p:sld xmlns:a="http://schemas.openxmlformats.org/drawingml/2006/main" xmlns:r="http://schemas.openxmlformats.org/officeDocument/2006/relationships" xmlns:p="http://schemas.openxmlformats.org/presentationml/2006/main">
   <p:cSld>
@@ -11504,7 +11929,7 @@
           <a:p>
             <a:fld id="{6700A58B-DD98-43D0-B791-721480A02982}" type="datetime1">
               <a:rPr lang="en-US" smtClean="0"/>
-              <a:t>6/26/25</a:t>
+              <a:t>6/11/26</a:t>
             </a:fld>
             <a:endParaRPr lang="en-US"/>
           </a:p>
@@ -12894,7 +13319,7 @@
           <p:cNvPr id="2" name="Date Placeholder 1">
             <a:extLst>
               <a:ext uri="{FF2B5EF4-FFF2-40B4-BE49-F238E27FC236}">
-                <a16:creationId xmlns:a16="http://schemas.microsoft.com/office/drawing/2014/main" id="{382E6408-6DE3-5EFA-DD6C-3A3A180B17BD}"/>
+                <a16:creationId xmlns:a16="http://schemas.microsoft.com/office/drawing/2014/main" id="{02E9BAFB-0811-F19D-6FAD-6BA687F2B0E9}"/>
               </a:ext>
             </a:extLst>
           </p:cNvPr>
@@ -12912,7 +13337,7 @@
           <a:p>
             <a:fld id="{6700A58B-DD98-43D0-B791-721480A02982}" type="datetime1">
               <a:rPr lang="en-US" smtClean="0"/>
-              <a:t>6/26/25</a:t>
+              <a:t>6/11/26</a:t>
             </a:fld>
             <a:endParaRPr lang="en-US"/>
           </a:p>
@@ -12923,7 +13348,7 @@
           <p:cNvPr id="3" name="Title 2">
             <a:extLst>
               <a:ext uri="{FF2B5EF4-FFF2-40B4-BE49-F238E27FC236}">
-                <a16:creationId xmlns:a16="http://schemas.microsoft.com/office/drawing/2014/main" id="{49A30653-E178-6320-D22E-C326C3E3F3BE}"/>
+                <a16:creationId xmlns:a16="http://schemas.microsoft.com/office/drawing/2014/main" id="{594FF8C1-1192-F1E7-FCC1-8DA2D869E504}"/>
               </a:ext>
             </a:extLst>
           </p:cNvPr>
@@ -12934,14 +13359,19 @@
             <p:ph type="title"/>
           </p:nvPr>
         </p:nvSpPr>
-        <p:spPr/>
+        <p:spPr>
+          <a:xfrm>
+            <a:off x="120579" y="365126"/>
+            <a:ext cx="3868617" cy="591477"/>
+          </a:xfrm>
+        </p:spPr>
         <p:txBody>
           <a:bodyPr/>
           <a:lstStyle/>
           <a:p>
             <a:r>
               <a:rPr lang="en-US" dirty="0"/>
-              <a:t>How does RAG work?</a:t>
+              <a:t>Open the files that put our RAG workflow together</a:t>
             </a:r>
           </a:p>
         </p:txBody>
@@ -12951,7 +13381,7 @@
           <p:cNvPr id="4" name="Footer Placeholder 3">
             <a:extLst>
               <a:ext uri="{FF2B5EF4-FFF2-40B4-BE49-F238E27FC236}">
-                <a16:creationId xmlns:a16="http://schemas.microsoft.com/office/drawing/2014/main" id="{EE4EE24F-DC42-C0F2-BC7C-CE19BC983103}"/>
+                <a16:creationId xmlns:a16="http://schemas.microsoft.com/office/drawing/2014/main" id="{53F73DB1-0A28-0865-F8CB-9DD878610C45}"/>
               </a:ext>
             </a:extLst>
           </p:cNvPr>
@@ -12980,7 +13410,7 @@
           <p:cNvPr id="5" name="Slide Number Placeholder 4">
             <a:extLst>
               <a:ext uri="{FF2B5EF4-FFF2-40B4-BE49-F238E27FC236}">
-                <a16:creationId xmlns:a16="http://schemas.microsoft.com/office/drawing/2014/main" id="{78A7129D-183D-BFE4-B98E-05E61D4D5D64}"/>
+                <a16:creationId xmlns:a16="http://schemas.microsoft.com/office/drawing/2014/main" id="{8858003B-A5C8-4E73-EC53-0C3071E2D465}"/>
               </a:ext>
             </a:extLst>
           </p:cNvPr>
@@ -13007,10 +13437,10 @@
       </p:sp>
       <p:sp>
         <p:nvSpPr>
-          <p:cNvPr id="9" name="TextBox 8">
-            <a:extLst>
-              <a:ext uri="{FF2B5EF4-FFF2-40B4-BE49-F238E27FC236}">
-                <a16:creationId xmlns:a16="http://schemas.microsoft.com/office/drawing/2014/main" id="{B24FA475-2BB7-444F-96D3-CF1D03CB8AF8}"/>
+          <p:cNvPr id="6" name="TextBox 5">
+            <a:extLst>
+              <a:ext uri="{FF2B5EF4-FFF2-40B4-BE49-F238E27FC236}">
+                <a16:creationId xmlns:a16="http://schemas.microsoft.com/office/drawing/2014/main" id="{254EE36F-7704-BA5C-55FD-7598BC9ADD3A}"/>
               </a:ext>
             </a:extLst>
           </p:cNvPr>
@@ -13019,8 +13449,8 @@
         </p:nvSpPr>
         <p:spPr>
           <a:xfrm>
-            <a:off x="371789" y="1305341"/>
-            <a:ext cx="8420519" cy="4308872"/>
+            <a:off x="333793" y="3333311"/>
+            <a:ext cx="2934119" cy="646331"/>
           </a:xfrm>
           <a:prstGeom prst="rect">
             <a:avLst/>
@@ -13028,109 +13458,67 @@
           <a:noFill/>
         </p:spPr>
         <p:txBody>
-          <a:bodyPr wrap="square">
+          <a:bodyPr wrap="square" rtlCol="0">
             <a:spAutoFit/>
           </a:bodyPr>
           <a:lstStyle/>
           <a:p>
             <a:r>
-              <a:rPr lang="en-US" sz="2000" b="1" dirty="0">
-                <a:solidFill>
-                  <a:schemeClr val="accent1"/>
-                </a:solidFill>
-              </a:rPr>
-              <a:t>How RAG Works:</a:t>
-            </a:r>
-          </a:p>
-          <a:p>
-            <a:pPr marL="285750" indent="-285750">
-              <a:buFont typeface="Arial" panose="020B0604020202020204" pitchFamily="34" charset="0"/>
-              <a:buChar char="•"/>
-            </a:pPr>
-            <a:r>
-              <a:rPr lang="en-US" dirty="0"/>
-              <a:t>Query Input: User submits a question or prompt.</a:t>
-            </a:r>
-          </a:p>
-          <a:p>
-            <a:pPr marL="285750" indent="-285750">
-              <a:buFont typeface="Arial" panose="020B0604020202020204" pitchFamily="34" charset="0"/>
-              <a:buChar char="•"/>
-            </a:pPr>
-            <a:r>
-              <a:rPr lang="en-US" dirty="0"/>
-              <a:t>Document Retrieval: Relevant documents are fetched from a vector database or external sources.</a:t>
-            </a:r>
-          </a:p>
-          <a:p>
-            <a:pPr marL="285750" indent="-285750">
-              <a:buFont typeface="Arial" panose="020B0604020202020204" pitchFamily="34" charset="0"/>
-              <a:buChar char="•"/>
-            </a:pPr>
-            <a:r>
-              <a:rPr lang="en-US" dirty="0"/>
-              <a:t>Contextual Response Generation: Retrieved documents are used to generate a response.</a:t>
-            </a:r>
-          </a:p>
-          <a:p>
-            <a:pPr marL="285750" indent="-285750">
-              <a:buFont typeface="Arial" panose="020B0604020202020204" pitchFamily="34" charset="0"/>
-              <a:buChar char="•"/>
-            </a:pPr>
-            <a:r>
-              <a:rPr lang="en-US" dirty="0"/>
-              <a:t>Final Output: Response is returned to the user, grounded in retrieved knowledge.</a:t>
-            </a:r>
-          </a:p>
-          <a:p>
+              <a:rPr lang="en-US" dirty="0" err="1"/>
+              <a:t>C_basicVectors.R</a:t>
+            </a:r>
             <a:endParaRPr lang="en-US" dirty="0"/>
           </a:p>
           <a:p>
             <a:r>
-              <a:rPr lang="en-US" sz="2000" b="1" dirty="0">
-                <a:solidFill>
-                  <a:schemeClr val="accent1"/>
-                </a:solidFill>
-              </a:rPr>
-              <a:t>Benefits of RAG:</a:t>
-            </a:r>
-          </a:p>
-          <a:p>
-            <a:r>
-              <a:rPr lang="en-US" b="1" dirty="0"/>
-              <a:t>Improved Accuracy</a:t>
-            </a:r>
-            <a:r>
-              <a:rPr lang="en-US" dirty="0"/>
-              <a:t>: By referencing external knowledge bases, RAG reduces errors and hallucinations.</a:t>
-            </a:r>
-          </a:p>
-          <a:p>
-            <a:r>
-              <a:rPr lang="en-US" b="1" dirty="0"/>
-              <a:t>Up-to-Date Information</a:t>
-            </a:r>
-            <a:r>
-              <a:rPr lang="en-US" dirty="0"/>
-              <a:t>: RAG allows LLMs to access current information, overcoming knowledge cut-offs</a:t>
-            </a:r>
-          </a:p>
-          <a:p>
-            <a:r>
-              <a:rPr lang="en-US" b="1" dirty="0"/>
-              <a:t>Flexibility and Scalability</a:t>
-            </a:r>
-            <a:r>
-              <a:rPr lang="en-US" dirty="0"/>
-              <a:t>: RAG can be customized for specific domains and industries, adding non-public information to your LLM responses </a:t>
-            </a:r>
-          </a:p>
-        </p:txBody>
-      </p:sp>
+              <a:rPr lang="en-US" dirty="0" err="1"/>
+              <a:t>D_basicRAG.R</a:t>
+            </a:r>
+            <a:endParaRPr lang="en-US" dirty="0"/>
+          </a:p>
+        </p:txBody>
+      </p:sp>
+      <p:pic>
+        <p:nvPicPr>
+          <p:cNvPr id="8" name="Picture 7">
+            <a:extLst>
+              <a:ext uri="{FF2B5EF4-FFF2-40B4-BE49-F238E27FC236}">
+                <a16:creationId xmlns:a16="http://schemas.microsoft.com/office/drawing/2014/main" id="{30397D71-B48E-0BF4-5EDE-140D61BF8EE3}"/>
+              </a:ext>
+            </a:extLst>
+          </p:cNvPr>
+          <p:cNvPicPr>
+            <a:picLocks noChangeAspect="1"/>
+          </p:cNvPicPr>
+          <p:nvPr/>
+        </p:nvPicPr>
+        <p:blipFill>
+          <a:blip r:embed="rId2">
+            <a:extLst>
+              <a:ext uri="{28A0092B-C50C-407E-A947-70E740481C1C}">
+                <a14:useLocalDpi xmlns:a14="http://schemas.microsoft.com/office/drawing/2010/main" val="0"/>
+              </a:ext>
+            </a:extLst>
+          </a:blip>
+          <a:srcRect l="17802"/>
+          <a:stretch>
+            <a:fillRect/>
+          </a:stretch>
+        </p:blipFill>
+        <p:spPr>
+          <a:xfrm>
+            <a:off x="3506874" y="0"/>
+            <a:ext cx="5637125" cy="6858000"/>
+          </a:xfrm>
+          <a:prstGeom prst="rect">
+            <a:avLst/>
+          </a:prstGeom>
+        </p:spPr>
+      </p:pic>
     </p:spTree>
     <p:extLst>
       <p:ext uri="{BB962C8B-B14F-4D97-AF65-F5344CB8AC3E}">
-        <p14:creationId xmlns:p14="http://schemas.microsoft.com/office/powerpoint/2010/main" val="91603051"/>
+        <p14:creationId xmlns:p14="http://schemas.microsoft.com/office/powerpoint/2010/main" val="1228226668"/>
       </p:ext>
     </p:extLst>
   </p:cSld>
@@ -13141,7 +13529,7 @@
 </file>
 
 <file path=ppt/slides/slide31.xml><?xml version="1.0" encoding="utf-8"?>
-<p:sld xmlns:a="http://schemas.openxmlformats.org/drawingml/2006/main" xmlns:r="http://schemas.openxmlformats.org/officeDocument/2006/relationships" xmlns:p="http://schemas.openxmlformats.org/presentationml/2006/main">
+<p:sld xmlns:a="http://schemas.openxmlformats.org/drawingml/2006/main" xmlns:r="http://schemas.openxmlformats.org/officeDocument/2006/relationships" xmlns:p="http://schemas.openxmlformats.org/presentationml/2006/main" show="0">
   <p:cSld>
     <p:spTree>
       <p:nvGrpSpPr>
@@ -13180,7 +13568,7 @@
           <a:p>
             <a:fld id="{6700A58B-DD98-43D0-B791-721480A02982}" type="datetime1">
               <a:rPr lang="en-US" smtClean="0"/>
-              <a:t>6/27/25</a:t>
+              <a:t>6/11/26</a:t>
             </a:fld>
             <a:endParaRPr lang="en-US"/>
           </a:p>
@@ -13315,7 +13703,7 @@
 </file>
 
 <file path=ppt/slides/slide32.xml><?xml version="1.0" encoding="utf-8"?>
-<p:sld xmlns:a="http://schemas.openxmlformats.org/drawingml/2006/main" xmlns:r="http://schemas.openxmlformats.org/officeDocument/2006/relationships" xmlns:p="http://schemas.openxmlformats.org/presentationml/2006/main">
+<p:sld xmlns:a="http://schemas.openxmlformats.org/drawingml/2006/main" xmlns:r="http://schemas.openxmlformats.org/officeDocument/2006/relationships" xmlns:p="http://schemas.openxmlformats.org/presentationml/2006/main" show="0">
   <p:cSld>
     <p:spTree>
       <p:nvGrpSpPr>
@@ -13336,7 +13724,7 @@
           <p:cNvPr id="2" name="Date Placeholder 1">
             <a:extLst>
               <a:ext uri="{FF2B5EF4-FFF2-40B4-BE49-F238E27FC236}">
-                <a16:creationId xmlns:a16="http://schemas.microsoft.com/office/drawing/2014/main" id="{02E9BAFB-0811-F19D-6FAD-6BA687F2B0E9}"/>
+                <a16:creationId xmlns:a16="http://schemas.microsoft.com/office/drawing/2014/main" id="{FEE982D9-07FE-E26F-797D-D59F41C98A02}"/>
               </a:ext>
             </a:extLst>
           </p:cNvPr>
@@ -13354,7 +13742,7 @@
           <a:p>
             <a:fld id="{6700A58B-DD98-43D0-B791-721480A02982}" type="datetime1">
               <a:rPr lang="en-US" smtClean="0"/>
-              <a:t>6/27/25</a:t>
+              <a:t>6/11/26</a:t>
             </a:fld>
             <a:endParaRPr lang="en-US"/>
           </a:p>
@@ -13365,7 +13753,7 @@
           <p:cNvPr id="3" name="Title 2">
             <a:extLst>
               <a:ext uri="{FF2B5EF4-FFF2-40B4-BE49-F238E27FC236}">
-                <a16:creationId xmlns:a16="http://schemas.microsoft.com/office/drawing/2014/main" id="{594FF8C1-1192-F1E7-FCC1-8DA2D869E504}"/>
+                <a16:creationId xmlns:a16="http://schemas.microsoft.com/office/drawing/2014/main" id="{95B2BC4D-0529-9FAC-CB74-6CED3BB12791}"/>
               </a:ext>
             </a:extLst>
           </p:cNvPr>
@@ -13376,20 +13764,12 @@
             <p:ph type="title"/>
           </p:nvPr>
         </p:nvSpPr>
-        <p:spPr>
-          <a:xfrm>
-            <a:off x="120579" y="365126"/>
-            <a:ext cx="3868617" cy="591477"/>
-          </a:xfrm>
-        </p:spPr>
+        <p:spPr/>
         <p:txBody>
           <a:bodyPr/>
           <a:lstStyle/>
           <a:p>
-            <a:r>
-              <a:rPr lang="en-US" dirty="0"/>
-              <a:t>Open the files that put our RAG workflow together</a:t>
-            </a:r>
+            <a:endParaRPr lang="en-US"/>
           </a:p>
         </p:txBody>
       </p:sp>
@@ -13398,7 +13778,7 @@
           <p:cNvPr id="4" name="Footer Placeholder 3">
             <a:extLst>
               <a:ext uri="{FF2B5EF4-FFF2-40B4-BE49-F238E27FC236}">
-                <a16:creationId xmlns:a16="http://schemas.microsoft.com/office/drawing/2014/main" id="{53F73DB1-0A28-0865-F8CB-9DD878610C45}"/>
+                <a16:creationId xmlns:a16="http://schemas.microsoft.com/office/drawing/2014/main" id="{036135FA-DD9E-24A7-2E95-E4CCDE8596A4}"/>
               </a:ext>
             </a:extLst>
           </p:cNvPr>
@@ -13427,7 +13807,7 @@
           <p:cNvPr id="5" name="Slide Number Placeholder 4">
             <a:extLst>
               <a:ext uri="{FF2B5EF4-FFF2-40B4-BE49-F238E27FC236}">
-                <a16:creationId xmlns:a16="http://schemas.microsoft.com/office/drawing/2014/main" id="{8858003B-A5C8-4E73-EC53-0C3071E2D465}"/>
+                <a16:creationId xmlns:a16="http://schemas.microsoft.com/office/drawing/2014/main" id="{82E6FFD3-AC9D-0F5B-C525-EED3B1AB25EF}"/>
               </a:ext>
             </a:extLst>
           </p:cNvPr>
@@ -13452,55 +13832,12 @@
           </a:p>
         </p:txBody>
       </p:sp>
-      <p:sp>
-        <p:nvSpPr>
-          <p:cNvPr id="6" name="TextBox 5">
-            <a:extLst>
-              <a:ext uri="{FF2B5EF4-FFF2-40B4-BE49-F238E27FC236}">
-                <a16:creationId xmlns:a16="http://schemas.microsoft.com/office/drawing/2014/main" id="{254EE36F-7704-BA5C-55FD-7598BC9ADD3A}"/>
-              </a:ext>
-            </a:extLst>
-          </p:cNvPr>
-          <p:cNvSpPr txBox="1"/>
-          <p:nvPr/>
-        </p:nvSpPr>
-        <p:spPr>
-          <a:xfrm>
-            <a:off x="333793" y="3333311"/>
-            <a:ext cx="2934119" cy="646331"/>
-          </a:xfrm>
-          <a:prstGeom prst="rect">
-            <a:avLst/>
-          </a:prstGeom>
-          <a:noFill/>
-        </p:spPr>
-        <p:txBody>
-          <a:bodyPr wrap="square" rtlCol="0">
-            <a:spAutoFit/>
-          </a:bodyPr>
-          <a:lstStyle/>
-          <a:p>
-            <a:r>
-              <a:rPr lang="en-US" dirty="0" err="1"/>
-              <a:t>C_basicVectors.R</a:t>
-            </a:r>
-            <a:endParaRPr lang="en-US" dirty="0"/>
-          </a:p>
-          <a:p>
-            <a:r>
-              <a:rPr lang="en-US" dirty="0" err="1"/>
-              <a:t>D_basicRAG.R</a:t>
-            </a:r>
-            <a:endParaRPr lang="en-US" dirty="0"/>
-          </a:p>
-        </p:txBody>
-      </p:sp>
       <p:pic>
         <p:nvPicPr>
-          <p:cNvPr id="8" name="Picture 7">
-            <a:extLst>
-              <a:ext uri="{FF2B5EF4-FFF2-40B4-BE49-F238E27FC236}">
-                <a16:creationId xmlns:a16="http://schemas.microsoft.com/office/drawing/2014/main" id="{30397D71-B48E-0BF4-5EDE-140D61BF8EE3}"/>
+          <p:cNvPr id="6" name="Picture 5">
+            <a:extLst>
+              <a:ext uri="{FF2B5EF4-FFF2-40B4-BE49-F238E27FC236}">
+                <a16:creationId xmlns:a16="http://schemas.microsoft.com/office/drawing/2014/main" id="{3F5F70CF-6E8E-1EB1-24EE-324FF1AEFDFB}"/>
               </a:ext>
             </a:extLst>
           </p:cNvPr>
@@ -13510,32 +13847,631 @@
           <p:nvPr/>
         </p:nvPicPr>
         <p:blipFill>
-          <a:blip r:embed="rId2">
-            <a:extLst>
-              <a:ext uri="{28A0092B-C50C-407E-A947-70E740481C1C}">
-                <a14:useLocalDpi xmlns:a14="http://schemas.microsoft.com/office/drawing/2010/main" val="0"/>
-              </a:ext>
-            </a:extLst>
-          </a:blip>
-          <a:srcRect l="17802"/>
+          <a:blip r:embed="rId2"/>
           <a:stretch>
             <a:fillRect/>
           </a:stretch>
         </p:blipFill>
         <p:spPr>
           <a:xfrm>
-            <a:off x="3506874" y="0"/>
-            <a:ext cx="5637125" cy="6858000"/>
+            <a:off x="685800" y="2292009"/>
+            <a:ext cx="7772400" cy="2273982"/>
           </a:xfrm>
           <a:prstGeom prst="rect">
             <a:avLst/>
           </a:prstGeom>
         </p:spPr>
       </p:pic>
+      <p:sp>
+        <p:nvSpPr>
+          <p:cNvPr id="7" name="Rectangle 6">
+            <a:extLst>
+              <a:ext uri="{FF2B5EF4-FFF2-40B4-BE49-F238E27FC236}">
+                <a16:creationId xmlns:a16="http://schemas.microsoft.com/office/drawing/2014/main" id="{B455697C-02BF-3D7F-F777-F8AF73245CB4}"/>
+              </a:ext>
+            </a:extLst>
+          </p:cNvPr>
+          <p:cNvSpPr/>
+          <p:nvPr/>
+        </p:nvSpPr>
+        <p:spPr>
+          <a:xfrm>
+            <a:off x="4652386" y="3717890"/>
+            <a:ext cx="3862963" cy="341644"/>
+          </a:xfrm>
+          <a:prstGeom prst="rect">
+            <a:avLst/>
+          </a:prstGeom>
+          <a:noFill/>
+          <a:ln w="28575">
+            <a:solidFill>
+              <a:schemeClr val="accent1"/>
+            </a:solidFill>
+          </a:ln>
+        </p:spPr>
+        <p:style>
+          <a:lnRef idx="2">
+            <a:schemeClr val="accent1">
+              <a:shade val="15000"/>
+            </a:schemeClr>
+          </a:lnRef>
+          <a:fillRef idx="1">
+            <a:schemeClr val="accent1"/>
+          </a:fillRef>
+          <a:effectRef idx="0">
+            <a:schemeClr val="accent1"/>
+          </a:effectRef>
+          <a:fontRef idx="minor">
+            <a:schemeClr val="lt1"/>
+          </a:fontRef>
+        </p:style>
+        <p:txBody>
+          <a:bodyPr rtlCol="0" anchor="ctr"/>
+          <a:lstStyle/>
+          <a:p>
+            <a:pPr algn="ctr"/>
+            <a:endParaRPr lang="en-US"/>
+          </a:p>
+        </p:txBody>
+      </p:sp>
+      <p:sp>
+        <p:nvSpPr>
+          <p:cNvPr id="8" name="Rectangle 7">
+            <a:extLst>
+              <a:ext uri="{FF2B5EF4-FFF2-40B4-BE49-F238E27FC236}">
+                <a16:creationId xmlns:a16="http://schemas.microsoft.com/office/drawing/2014/main" id="{16B3B4FA-6A85-C27B-04BB-ACC038AF627C}"/>
+              </a:ext>
+            </a:extLst>
+          </p:cNvPr>
+          <p:cNvSpPr/>
+          <p:nvPr/>
+        </p:nvSpPr>
+        <p:spPr>
+          <a:xfrm>
+            <a:off x="754569" y="3970774"/>
+            <a:ext cx="1365634" cy="341644"/>
+          </a:xfrm>
+          <a:prstGeom prst="rect">
+            <a:avLst/>
+          </a:prstGeom>
+          <a:noFill/>
+          <a:ln w="28575">
+            <a:solidFill>
+              <a:schemeClr val="accent1"/>
+            </a:solidFill>
+          </a:ln>
+        </p:spPr>
+        <p:style>
+          <a:lnRef idx="2">
+            <a:schemeClr val="accent1">
+              <a:shade val="15000"/>
+            </a:schemeClr>
+          </a:lnRef>
+          <a:fillRef idx="1">
+            <a:schemeClr val="accent1"/>
+          </a:fillRef>
+          <a:effectRef idx="0">
+            <a:schemeClr val="accent1"/>
+          </a:effectRef>
+          <a:fontRef idx="minor">
+            <a:schemeClr val="lt1"/>
+          </a:fontRef>
+        </p:style>
+        <p:txBody>
+          <a:bodyPr rtlCol="0" anchor="ctr"/>
+          <a:lstStyle/>
+          <a:p>
+            <a:pPr algn="ctr"/>
+            <a:endParaRPr lang="en-US"/>
+          </a:p>
+        </p:txBody>
+      </p:sp>
     </p:spTree>
     <p:extLst>
       <p:ext uri="{BB962C8B-B14F-4D97-AF65-F5344CB8AC3E}">
-        <p14:creationId xmlns:p14="http://schemas.microsoft.com/office/powerpoint/2010/main" val="1228226668"/>
+        <p14:creationId xmlns:p14="http://schemas.microsoft.com/office/powerpoint/2010/main" val="2500593444"/>
+      </p:ext>
+    </p:extLst>
+  </p:cSld>
+  <p:clrMapOvr>
+    <a:masterClrMapping/>
+  </p:clrMapOvr>
+</p:sld>
+</file>
+
+<file path=ppt/slides/slide33.xml><?xml version="1.0" encoding="utf-8"?>
+<p:sld xmlns:a="http://schemas.openxmlformats.org/drawingml/2006/main" xmlns:r="http://schemas.openxmlformats.org/officeDocument/2006/relationships" xmlns:p="http://schemas.openxmlformats.org/presentationml/2006/main" show="0">
+  <p:cSld>
+    <p:spTree>
+      <p:nvGrpSpPr>
+        <p:cNvPr id="1" name=""/>
+        <p:cNvGrpSpPr/>
+        <p:nvPr/>
+      </p:nvGrpSpPr>
+      <p:grpSpPr>
+        <a:xfrm>
+          <a:off x="0" y="0"/>
+          <a:ext cx="0" cy="0"/>
+          <a:chOff x="0" y="0"/>
+          <a:chExt cx="0" cy="0"/>
+        </a:xfrm>
+      </p:grpSpPr>
+      <p:sp>
+        <p:nvSpPr>
+          <p:cNvPr id="2" name="Date Placeholder 1">
+            <a:extLst>
+              <a:ext uri="{FF2B5EF4-FFF2-40B4-BE49-F238E27FC236}">
+                <a16:creationId xmlns:a16="http://schemas.microsoft.com/office/drawing/2014/main" id="{6633163F-EC0B-A4AD-D4DD-AB8D3391BB2E}"/>
+              </a:ext>
+            </a:extLst>
+          </p:cNvPr>
+          <p:cNvSpPr>
+            <a:spLocks noGrp="1"/>
+          </p:cNvSpPr>
+          <p:nvPr>
+            <p:ph type="dt" sz="half" idx="10"/>
+          </p:nvPr>
+        </p:nvSpPr>
+        <p:spPr/>
+        <p:txBody>
+          <a:bodyPr/>
+          <a:lstStyle/>
+          <a:p>
+            <a:fld id="{6700A58B-DD98-43D0-B791-721480A02982}" type="datetime1">
+              <a:rPr lang="en-US" smtClean="0"/>
+              <a:t>6/11/26</a:t>
+            </a:fld>
+            <a:endParaRPr lang="en-US"/>
+          </a:p>
+        </p:txBody>
+      </p:sp>
+      <p:sp>
+        <p:nvSpPr>
+          <p:cNvPr id="3" name="Title 2">
+            <a:extLst>
+              <a:ext uri="{FF2B5EF4-FFF2-40B4-BE49-F238E27FC236}">
+                <a16:creationId xmlns:a16="http://schemas.microsoft.com/office/drawing/2014/main" id="{67A1F570-97BF-FEC1-BAAF-0FFAB037E655}"/>
+              </a:ext>
+            </a:extLst>
+          </p:cNvPr>
+          <p:cNvSpPr>
+            <a:spLocks noGrp="1"/>
+          </p:cNvSpPr>
+          <p:nvPr>
+            <p:ph type="title"/>
+          </p:nvPr>
+        </p:nvSpPr>
+        <p:spPr/>
+        <p:txBody>
+          <a:bodyPr/>
+          <a:lstStyle/>
+          <a:p>
+            <a:endParaRPr lang="en-US"/>
+          </a:p>
+        </p:txBody>
+      </p:sp>
+      <p:sp>
+        <p:nvSpPr>
+          <p:cNvPr id="4" name="Footer Placeholder 3">
+            <a:extLst>
+              <a:ext uri="{FF2B5EF4-FFF2-40B4-BE49-F238E27FC236}">
+                <a16:creationId xmlns:a16="http://schemas.microsoft.com/office/drawing/2014/main" id="{A59F3914-EC9B-189D-C851-58D56760C081}"/>
+              </a:ext>
+            </a:extLst>
+          </p:cNvPr>
+          <p:cNvSpPr>
+            <a:spLocks noGrp="1"/>
+          </p:cNvSpPr>
+          <p:nvPr>
+            <p:ph type="ftr" sz="quarter" idx="3"/>
+          </p:nvPr>
+        </p:nvSpPr>
+        <p:spPr/>
+        <p:txBody>
+          <a:bodyPr/>
+          <a:lstStyle/>
+          <a:p>
+            <a:r>
+              <a:rPr lang="en-US"/>
+              <a:t>Kwartler</a:t>
+            </a:r>
+            <a:endParaRPr lang="en-US" dirty="0"/>
+          </a:p>
+        </p:txBody>
+      </p:sp>
+      <p:sp>
+        <p:nvSpPr>
+          <p:cNvPr id="5" name="Slide Number Placeholder 4">
+            <a:extLst>
+              <a:ext uri="{FF2B5EF4-FFF2-40B4-BE49-F238E27FC236}">
+                <a16:creationId xmlns:a16="http://schemas.microsoft.com/office/drawing/2014/main" id="{4BE7B36A-38E0-E5C0-D25B-E49FABAD1188}"/>
+              </a:ext>
+            </a:extLst>
+          </p:cNvPr>
+          <p:cNvSpPr>
+            <a:spLocks noGrp="1"/>
+          </p:cNvSpPr>
+          <p:nvPr>
+            <p:ph type="sldNum" sz="quarter" idx="4"/>
+          </p:nvPr>
+        </p:nvSpPr>
+        <p:spPr/>
+        <p:txBody>
+          <a:bodyPr/>
+          <a:lstStyle/>
+          <a:p>
+            <a:fld id="{37290FF7-652B-4475-AEAB-8B1A5D23AE09}" type="slidenum">
+              <a:rPr lang="en-US" smtClean="0"/>
+              <a:pPr/>
+              <a:t>33</a:t>
+            </a:fld>
+            <a:endParaRPr lang="en-US" dirty="0"/>
+          </a:p>
+        </p:txBody>
+      </p:sp>
+      <p:pic>
+        <p:nvPicPr>
+          <p:cNvPr id="6" name="Picture 5">
+            <a:extLst>
+              <a:ext uri="{FF2B5EF4-FFF2-40B4-BE49-F238E27FC236}">
+                <a16:creationId xmlns:a16="http://schemas.microsoft.com/office/drawing/2014/main" id="{8FB5AE6F-C663-05F9-E558-D28FAC5CE5DC}"/>
+              </a:ext>
+            </a:extLst>
+          </p:cNvPr>
+          <p:cNvPicPr>
+            <a:picLocks noChangeAspect="1"/>
+          </p:cNvPicPr>
+          <p:nvPr/>
+        </p:nvPicPr>
+        <p:blipFill>
+          <a:blip r:embed="rId2"/>
+          <a:stretch>
+            <a:fillRect/>
+          </a:stretch>
+        </p:blipFill>
+        <p:spPr>
+          <a:xfrm>
+            <a:off x="549817" y="1386549"/>
+            <a:ext cx="7965533" cy="4391254"/>
+          </a:xfrm>
+          <a:prstGeom prst="rect">
+            <a:avLst/>
+          </a:prstGeom>
+        </p:spPr>
+      </p:pic>
+      <p:sp>
+        <p:nvSpPr>
+          <p:cNvPr id="7" name="Rectangle 6">
+            <a:extLst>
+              <a:ext uri="{FF2B5EF4-FFF2-40B4-BE49-F238E27FC236}">
+                <a16:creationId xmlns:a16="http://schemas.microsoft.com/office/drawing/2014/main" id="{118AC4B8-A497-67EB-C6BA-40345FBA9686}"/>
+              </a:ext>
+            </a:extLst>
+          </p:cNvPr>
+          <p:cNvSpPr/>
+          <p:nvPr/>
+        </p:nvSpPr>
+        <p:spPr>
+          <a:xfrm>
+            <a:off x="2773345" y="4260501"/>
+            <a:ext cx="1798655" cy="492369"/>
+          </a:xfrm>
+          <a:prstGeom prst="rect">
+            <a:avLst/>
+          </a:prstGeom>
+          <a:noFill/>
+          <a:ln w="28575">
+            <a:solidFill>
+              <a:schemeClr val="accent1"/>
+            </a:solidFill>
+          </a:ln>
+        </p:spPr>
+        <p:style>
+          <a:lnRef idx="2">
+            <a:schemeClr val="accent1">
+              <a:shade val="15000"/>
+            </a:schemeClr>
+          </a:lnRef>
+          <a:fillRef idx="1">
+            <a:schemeClr val="accent1"/>
+          </a:fillRef>
+          <a:effectRef idx="0">
+            <a:schemeClr val="accent1"/>
+          </a:effectRef>
+          <a:fontRef idx="minor">
+            <a:schemeClr val="lt1"/>
+          </a:fontRef>
+        </p:style>
+        <p:txBody>
+          <a:bodyPr rtlCol="0" anchor="ctr"/>
+          <a:lstStyle/>
+          <a:p>
+            <a:pPr algn="ctr"/>
+            <a:endParaRPr lang="en-US"/>
+          </a:p>
+        </p:txBody>
+      </p:sp>
+    </p:spTree>
+    <p:extLst>
+      <p:ext uri="{BB962C8B-B14F-4D97-AF65-F5344CB8AC3E}">
+        <p14:creationId xmlns:p14="http://schemas.microsoft.com/office/powerpoint/2010/main" val="2414960521"/>
+      </p:ext>
+    </p:extLst>
+  </p:cSld>
+  <p:clrMapOvr>
+    <a:masterClrMapping/>
+  </p:clrMapOvr>
+</p:sld>
+</file>
+
+<file path=ppt/slides/slide34.xml><?xml version="1.0" encoding="utf-8"?>
+<p:sld xmlns:a="http://schemas.openxmlformats.org/drawingml/2006/main" xmlns:r="http://schemas.openxmlformats.org/officeDocument/2006/relationships" xmlns:p="http://schemas.openxmlformats.org/presentationml/2006/main" show="0">
+  <p:cSld>
+    <p:spTree>
+      <p:nvGrpSpPr>
+        <p:cNvPr id="1" name=""/>
+        <p:cNvGrpSpPr/>
+        <p:nvPr/>
+      </p:nvGrpSpPr>
+      <p:grpSpPr>
+        <a:xfrm>
+          <a:off x="0" y="0"/>
+          <a:ext cx="0" cy="0"/>
+          <a:chOff x="0" y="0"/>
+          <a:chExt cx="0" cy="0"/>
+        </a:xfrm>
+      </p:grpSpPr>
+      <p:sp>
+        <p:nvSpPr>
+          <p:cNvPr id="2" name="Date Placeholder 1">
+            <a:extLst>
+              <a:ext uri="{FF2B5EF4-FFF2-40B4-BE49-F238E27FC236}">
+                <a16:creationId xmlns:a16="http://schemas.microsoft.com/office/drawing/2014/main" id="{1EC0C8D9-ACEA-CF93-5002-7BCE351071BC}"/>
+              </a:ext>
+            </a:extLst>
+          </p:cNvPr>
+          <p:cNvSpPr>
+            <a:spLocks noGrp="1"/>
+          </p:cNvSpPr>
+          <p:nvPr>
+            <p:ph type="dt" sz="half" idx="10"/>
+          </p:nvPr>
+        </p:nvSpPr>
+        <p:spPr/>
+        <p:txBody>
+          <a:bodyPr/>
+          <a:lstStyle/>
+          <a:p>
+            <a:fld id="{6700A58B-DD98-43D0-B791-721480A02982}" type="datetime1">
+              <a:rPr lang="en-US" smtClean="0"/>
+              <a:t>6/11/26</a:t>
+            </a:fld>
+            <a:endParaRPr lang="en-US"/>
+          </a:p>
+        </p:txBody>
+      </p:sp>
+      <p:sp>
+        <p:nvSpPr>
+          <p:cNvPr id="3" name="Title 2">
+            <a:extLst>
+              <a:ext uri="{FF2B5EF4-FFF2-40B4-BE49-F238E27FC236}">
+                <a16:creationId xmlns:a16="http://schemas.microsoft.com/office/drawing/2014/main" id="{62016E52-85FA-8FA7-3764-5B83A12DABD3}"/>
+              </a:ext>
+            </a:extLst>
+          </p:cNvPr>
+          <p:cNvSpPr>
+            <a:spLocks noGrp="1"/>
+          </p:cNvSpPr>
+          <p:nvPr>
+            <p:ph type="title"/>
+          </p:nvPr>
+        </p:nvSpPr>
+        <p:spPr/>
+        <p:txBody>
+          <a:bodyPr/>
+          <a:lstStyle/>
+          <a:p>
+            <a:endParaRPr lang="en-US"/>
+          </a:p>
+        </p:txBody>
+      </p:sp>
+      <p:sp>
+        <p:nvSpPr>
+          <p:cNvPr id="4" name="Footer Placeholder 3">
+            <a:extLst>
+              <a:ext uri="{FF2B5EF4-FFF2-40B4-BE49-F238E27FC236}">
+                <a16:creationId xmlns:a16="http://schemas.microsoft.com/office/drawing/2014/main" id="{181DD7F8-AF00-FA84-6444-F9D4366B3CCF}"/>
+              </a:ext>
+            </a:extLst>
+          </p:cNvPr>
+          <p:cNvSpPr>
+            <a:spLocks noGrp="1"/>
+          </p:cNvSpPr>
+          <p:nvPr>
+            <p:ph type="ftr" sz="quarter" idx="3"/>
+          </p:nvPr>
+        </p:nvSpPr>
+        <p:spPr/>
+        <p:txBody>
+          <a:bodyPr/>
+          <a:lstStyle/>
+          <a:p>
+            <a:r>
+              <a:rPr lang="en-US"/>
+              <a:t>Kwartler</a:t>
+            </a:r>
+            <a:endParaRPr lang="en-US" dirty="0"/>
+          </a:p>
+        </p:txBody>
+      </p:sp>
+      <p:sp>
+        <p:nvSpPr>
+          <p:cNvPr id="5" name="Slide Number Placeholder 4">
+            <a:extLst>
+              <a:ext uri="{FF2B5EF4-FFF2-40B4-BE49-F238E27FC236}">
+                <a16:creationId xmlns:a16="http://schemas.microsoft.com/office/drawing/2014/main" id="{292C3BE8-3187-462E-F22C-473826523B2B}"/>
+              </a:ext>
+            </a:extLst>
+          </p:cNvPr>
+          <p:cNvSpPr>
+            <a:spLocks noGrp="1"/>
+          </p:cNvSpPr>
+          <p:nvPr>
+            <p:ph type="sldNum" sz="quarter" idx="4"/>
+          </p:nvPr>
+        </p:nvSpPr>
+        <p:spPr/>
+        <p:txBody>
+          <a:bodyPr/>
+          <a:lstStyle/>
+          <a:p>
+            <a:fld id="{37290FF7-652B-4475-AEAB-8B1A5D23AE09}" type="slidenum">
+              <a:rPr lang="en-US" smtClean="0"/>
+              <a:pPr/>
+              <a:t>34</a:t>
+            </a:fld>
+            <a:endParaRPr lang="en-US" dirty="0"/>
+          </a:p>
+        </p:txBody>
+      </p:sp>
+      <p:pic>
+        <p:nvPicPr>
+          <p:cNvPr id="7" name="Picture 6">
+            <a:extLst>
+              <a:ext uri="{FF2B5EF4-FFF2-40B4-BE49-F238E27FC236}">
+                <a16:creationId xmlns:a16="http://schemas.microsoft.com/office/drawing/2014/main" id="{444E34DA-A855-376C-5BC0-F6A216E777AB}"/>
+              </a:ext>
+            </a:extLst>
+          </p:cNvPr>
+          <p:cNvPicPr>
+            <a:picLocks noChangeAspect="1"/>
+          </p:cNvPicPr>
+          <p:nvPr/>
+        </p:nvPicPr>
+        <p:blipFill>
+          <a:blip r:embed="rId2"/>
+          <a:stretch>
+            <a:fillRect/>
+          </a:stretch>
+        </p:blipFill>
+        <p:spPr>
+          <a:xfrm>
+            <a:off x="947187" y="0"/>
+            <a:ext cx="7249625" cy="6858000"/>
+          </a:xfrm>
+          <a:prstGeom prst="rect">
+            <a:avLst/>
+          </a:prstGeom>
+        </p:spPr>
+      </p:pic>
+      <p:sp>
+        <p:nvSpPr>
+          <p:cNvPr id="8" name="Rectangle 7">
+            <a:extLst>
+              <a:ext uri="{FF2B5EF4-FFF2-40B4-BE49-F238E27FC236}">
+                <a16:creationId xmlns:a16="http://schemas.microsoft.com/office/drawing/2014/main" id="{461B964B-2AA8-D812-A594-233291C751D0}"/>
+              </a:ext>
+            </a:extLst>
+          </p:cNvPr>
+          <p:cNvSpPr/>
+          <p:nvPr/>
+        </p:nvSpPr>
+        <p:spPr>
+          <a:xfrm>
+            <a:off x="3938954" y="2411604"/>
+            <a:ext cx="1798655" cy="492369"/>
+          </a:xfrm>
+          <a:prstGeom prst="rect">
+            <a:avLst/>
+          </a:prstGeom>
+          <a:noFill/>
+          <a:ln w="28575">
+            <a:solidFill>
+              <a:schemeClr val="accent1"/>
+            </a:solidFill>
+          </a:ln>
+        </p:spPr>
+        <p:style>
+          <a:lnRef idx="2">
+            <a:schemeClr val="accent1">
+              <a:shade val="15000"/>
+            </a:schemeClr>
+          </a:lnRef>
+          <a:fillRef idx="1">
+            <a:schemeClr val="accent1"/>
+          </a:fillRef>
+          <a:effectRef idx="0">
+            <a:schemeClr val="accent1"/>
+          </a:effectRef>
+          <a:fontRef idx="minor">
+            <a:schemeClr val="lt1"/>
+          </a:fontRef>
+        </p:style>
+        <p:txBody>
+          <a:bodyPr rtlCol="0" anchor="ctr"/>
+          <a:lstStyle/>
+          <a:p>
+            <a:pPr algn="ctr"/>
+            <a:endParaRPr lang="en-US"/>
+          </a:p>
+        </p:txBody>
+      </p:sp>
+      <p:sp>
+        <p:nvSpPr>
+          <p:cNvPr id="9" name="Rectangle 8">
+            <a:extLst>
+              <a:ext uri="{FF2B5EF4-FFF2-40B4-BE49-F238E27FC236}">
+                <a16:creationId xmlns:a16="http://schemas.microsoft.com/office/drawing/2014/main" id="{C36A0B9C-37D2-EAD7-A6AC-5A7DEC6B9E4A}"/>
+              </a:ext>
+            </a:extLst>
+          </p:cNvPr>
+          <p:cNvSpPr/>
+          <p:nvPr/>
+        </p:nvSpPr>
+        <p:spPr>
+          <a:xfrm>
+            <a:off x="1230295" y="5174902"/>
+            <a:ext cx="2176096" cy="211016"/>
+          </a:xfrm>
+          <a:prstGeom prst="rect">
+            <a:avLst/>
+          </a:prstGeom>
+          <a:noFill/>
+          <a:ln w="28575">
+            <a:solidFill>
+              <a:schemeClr val="accent1"/>
+            </a:solidFill>
+          </a:ln>
+        </p:spPr>
+        <p:style>
+          <a:lnRef idx="2">
+            <a:schemeClr val="accent1">
+              <a:shade val="15000"/>
+            </a:schemeClr>
+          </a:lnRef>
+          <a:fillRef idx="1">
+            <a:schemeClr val="accent1"/>
+          </a:fillRef>
+          <a:effectRef idx="0">
+            <a:schemeClr val="accent1"/>
+          </a:effectRef>
+          <a:fontRef idx="minor">
+            <a:schemeClr val="lt1"/>
+          </a:fontRef>
+        </p:style>
+        <p:txBody>
+          <a:bodyPr rtlCol="0" anchor="ctr"/>
+          <a:lstStyle/>
+          <a:p>
+            <a:pPr algn="ctr"/>
+            <a:endParaRPr lang="en-US"/>
+          </a:p>
+        </p:txBody>
+      </p:sp>
+    </p:spTree>
+    <p:extLst>
+      <p:ext uri="{BB962C8B-B14F-4D97-AF65-F5344CB8AC3E}">
+        <p14:creationId xmlns:p14="http://schemas.microsoft.com/office/powerpoint/2010/main" val="180302517"/>
       </p:ext>
     </p:extLst>
   </p:cSld>
@@ -13585,7 +14521,7 @@
           <a:p>
             <a:fld id="{6700A58B-DD98-43D0-B791-721480A02982}" type="datetime1">
               <a:rPr lang="en-US" smtClean="0"/>
-              <a:t>6/26/25</a:t>
+              <a:t>6/11/26</a:t>
             </a:fld>
             <a:endParaRPr lang="en-US"/>
           </a:p>
@@ -13750,55 +14686,6 @@
             <a:r>
               <a:rPr lang="en-US" dirty="0"/>
               <a:t>Document: c(1,1,1,0,0)</a:t>
-            </a:r>
-          </a:p>
-        </p:txBody>
-      </p:sp>
-      <p:sp>
-        <p:nvSpPr>
-          <p:cNvPr id="8" name="Rectangle 7">
-            <a:extLst>
-              <a:ext uri="{FF2B5EF4-FFF2-40B4-BE49-F238E27FC236}">
-                <a16:creationId xmlns:a16="http://schemas.microsoft.com/office/drawing/2014/main" id="{A11F745B-7D14-2706-0893-E7DC49C7EB28}"/>
-              </a:ext>
-            </a:extLst>
-          </p:cNvPr>
-          <p:cNvSpPr/>
-          <p:nvPr/>
-        </p:nvSpPr>
-        <p:spPr>
-          <a:xfrm>
-            <a:off x="193964" y="4571999"/>
-            <a:ext cx="8756072" cy="979055"/>
-          </a:xfrm>
-          <a:prstGeom prst="rect">
-            <a:avLst/>
-          </a:prstGeom>
-        </p:spPr>
-        <p:style>
-          <a:lnRef idx="2">
-            <a:schemeClr val="accent1">
-              <a:shade val="15000"/>
-            </a:schemeClr>
-          </a:lnRef>
-          <a:fillRef idx="1">
-            <a:schemeClr val="accent1"/>
-          </a:fillRef>
-          <a:effectRef idx="0">
-            <a:schemeClr val="accent1"/>
-          </a:effectRef>
-          <a:fontRef idx="minor">
-            <a:schemeClr val="lt1"/>
-          </a:fontRef>
-        </p:style>
-        <p:txBody>
-          <a:bodyPr rtlCol="0" anchor="ctr"/>
-          <a:lstStyle/>
-          <a:p>
-            <a:pPr algn="ctr"/>
-            <a:r>
-              <a:rPr lang="en-US" dirty="0"/>
-              <a:t>In unsupervised learning you’re examining clusters of documents, so its examining the context of documents in a vector space to identify similarity &amp; distances depending on the method.</a:t>
             </a:r>
           </a:p>
         </p:txBody>
@@ -13856,7 +14743,7 @@
           <a:p>
             <a:fld id="{6700A58B-DD98-43D0-B791-721480A02982}" type="datetime1">
               <a:rPr lang="en-US" smtClean="0"/>
-              <a:t>6/26/25</a:t>
+              <a:t>6/11/26</a:t>
             </a:fld>
             <a:endParaRPr lang="en-US"/>
           </a:p>
@@ -14607,7 +15494,7 @@
           <a:p>
             <a:fld id="{6700A58B-DD98-43D0-B791-721480A02982}" type="datetime1">
               <a:rPr lang="en-US" smtClean="0"/>
-              <a:t>6/26/25</a:t>
+              <a:t>6/11/26</a:t>
             </a:fld>
             <a:endParaRPr lang="en-US"/>
           </a:p>
@@ -14881,7 +15768,7 @@
           <a:p>
             <a:fld id="{6700A58B-DD98-43D0-B791-721480A02982}" type="datetime1">
               <a:rPr lang="en-US" smtClean="0"/>
-              <a:t>6/26/25</a:t>
+              <a:t>6/11/26</a:t>
             </a:fld>
             <a:endParaRPr lang="en-US"/>
           </a:p>
@@ -15518,7 +16405,7 @@
           <a:p>
             <a:fld id="{6700A58B-DD98-43D0-B791-721480A02982}" type="datetime1">
               <a:rPr lang="en-US" smtClean="0"/>
-              <a:t>6/26/25</a:t>
+              <a:t>6/11/26</a:t>
             </a:fld>
             <a:endParaRPr lang="en-US"/>
           </a:p>
@@ -15735,6 +16622,209 @@
       </p:grpSpPr>
       <p:sp>
         <p:nvSpPr>
+          <p:cNvPr id="13" name="TextBox 12">
+            <a:extLst>
+              <a:ext uri="{FF2B5EF4-FFF2-40B4-BE49-F238E27FC236}">
+                <a16:creationId xmlns:a16="http://schemas.microsoft.com/office/drawing/2014/main" id="{5B43FDD6-9672-0D3E-9B33-2C1F8A709180}"/>
+              </a:ext>
+            </a:extLst>
+          </p:cNvPr>
+          <p:cNvSpPr txBox="1"/>
+          <p:nvPr/>
+        </p:nvSpPr>
+        <p:spPr>
+          <a:xfrm>
+            <a:off x="400050" y="4502719"/>
+            <a:ext cx="4572000" cy="369332"/>
+          </a:xfrm>
+          <a:prstGeom prst="rect">
+            <a:avLst/>
+          </a:prstGeom>
+          <a:noFill/>
+        </p:spPr>
+        <p:txBody>
+          <a:bodyPr wrap="square">
+            <a:spAutoFit/>
+          </a:bodyPr>
+          <a:lstStyle/>
+          <a:p>
+            <a:r>
+              <a:rPr lang="en-US" sz="1800" dirty="0">
+                <a:highlight>
+                  <a:srgbClr val="FFFF00"/>
+                </a:highlight>
+              </a:rPr>
+              <a:t>1/1</a:t>
+            </a:r>
+          </a:p>
+        </p:txBody>
+      </p:sp>
+      <p:sp>
+        <p:nvSpPr>
+          <p:cNvPr id="14" name="TextBox 13">
+            <a:extLst>
+              <a:ext uri="{FF2B5EF4-FFF2-40B4-BE49-F238E27FC236}">
+                <a16:creationId xmlns:a16="http://schemas.microsoft.com/office/drawing/2014/main" id="{7FA8B592-ABDE-83BA-D62D-A0B90D038873}"/>
+              </a:ext>
+            </a:extLst>
+          </p:cNvPr>
+          <p:cNvSpPr txBox="1"/>
+          <p:nvPr/>
+        </p:nvSpPr>
+        <p:spPr>
+          <a:xfrm>
+            <a:off x="400050" y="4872051"/>
+            <a:ext cx="4572000" cy="369332"/>
+          </a:xfrm>
+          <a:prstGeom prst="rect">
+            <a:avLst/>
+          </a:prstGeom>
+          <a:noFill/>
+        </p:spPr>
+        <p:txBody>
+          <a:bodyPr wrap="square">
+            <a:spAutoFit/>
+          </a:bodyPr>
+          <a:lstStyle/>
+          <a:p>
+            <a:r>
+              <a:rPr lang="en-US" sz="1800" dirty="0">
+                <a:highlight>
+                  <a:srgbClr val="FFFF00"/>
+                </a:highlight>
+              </a:rPr>
+              <a:t>1/2</a:t>
+            </a:r>
+            <a:endParaRPr lang="en-US" dirty="0"/>
+          </a:p>
+        </p:txBody>
+      </p:sp>
+      <p:sp>
+        <p:nvSpPr>
+          <p:cNvPr id="15" name="TextBox 14">
+            <a:extLst>
+              <a:ext uri="{FF2B5EF4-FFF2-40B4-BE49-F238E27FC236}">
+                <a16:creationId xmlns:a16="http://schemas.microsoft.com/office/drawing/2014/main" id="{3CA3B366-3CC7-693F-FB20-6129A0E293F2}"/>
+              </a:ext>
+            </a:extLst>
+          </p:cNvPr>
+          <p:cNvSpPr txBox="1"/>
+          <p:nvPr/>
+        </p:nvSpPr>
+        <p:spPr>
+          <a:xfrm>
+            <a:off x="400050" y="5241383"/>
+            <a:ext cx="1890974" cy="369332"/>
+          </a:xfrm>
+          <a:prstGeom prst="rect">
+            <a:avLst/>
+          </a:prstGeom>
+          <a:noFill/>
+        </p:spPr>
+        <p:txBody>
+          <a:bodyPr wrap="square">
+            <a:spAutoFit/>
+          </a:bodyPr>
+          <a:lstStyle/>
+          <a:p>
+            <a:r>
+              <a:rPr lang="en-US" sz="1800" dirty="0">
+                <a:highlight>
+                  <a:srgbClr val="FFFF00"/>
+                </a:highlight>
+              </a:rPr>
+              <a:t>1/3</a:t>
+            </a:r>
+            <a:endParaRPr lang="en-US" sz="1800" dirty="0"/>
+          </a:p>
+        </p:txBody>
+      </p:sp>
+      <p:sp>
+        <p:nvSpPr>
+          <p:cNvPr id="16" name="TextBox 15">
+            <a:extLst>
+              <a:ext uri="{FF2B5EF4-FFF2-40B4-BE49-F238E27FC236}">
+                <a16:creationId xmlns:a16="http://schemas.microsoft.com/office/drawing/2014/main" id="{C733EC8D-8398-6AA4-FB0F-67D6565A5EC5}"/>
+              </a:ext>
+            </a:extLst>
+          </p:cNvPr>
+          <p:cNvSpPr txBox="1"/>
+          <p:nvPr/>
+        </p:nvSpPr>
+        <p:spPr>
+          <a:xfrm>
+            <a:off x="400050" y="5610715"/>
+            <a:ext cx="4572000" cy="369332"/>
+          </a:xfrm>
+          <a:prstGeom prst="rect">
+            <a:avLst/>
+          </a:prstGeom>
+          <a:noFill/>
+        </p:spPr>
+        <p:txBody>
+          <a:bodyPr wrap="square">
+            <a:spAutoFit/>
+          </a:bodyPr>
+          <a:lstStyle/>
+          <a:p>
+            <a:r>
+              <a:rPr lang="en-US" sz="1800" dirty="0">
+                <a:highlight>
+                  <a:srgbClr val="FFFF00"/>
+                </a:highlight>
+              </a:rPr>
+              <a:t>1/4</a:t>
+            </a:r>
+            <a:r>
+              <a:rPr lang="en-US" sz="1800" dirty="0"/>
+              <a:t> </a:t>
+            </a:r>
+            <a:endParaRPr lang="en-US" dirty="0"/>
+          </a:p>
+        </p:txBody>
+      </p:sp>
+      <p:sp>
+        <p:nvSpPr>
+          <p:cNvPr id="17" name="TextBox 16">
+            <a:extLst>
+              <a:ext uri="{FF2B5EF4-FFF2-40B4-BE49-F238E27FC236}">
+                <a16:creationId xmlns:a16="http://schemas.microsoft.com/office/drawing/2014/main" id="{F104BF69-7B58-92AD-E817-96756D67E077}"/>
+              </a:ext>
+            </a:extLst>
+          </p:cNvPr>
+          <p:cNvSpPr txBox="1"/>
+          <p:nvPr/>
+        </p:nvSpPr>
+        <p:spPr>
+          <a:xfrm>
+            <a:off x="400050" y="5987019"/>
+            <a:ext cx="4572000" cy="369332"/>
+          </a:xfrm>
+          <a:prstGeom prst="rect">
+            <a:avLst/>
+          </a:prstGeom>
+          <a:noFill/>
+        </p:spPr>
+        <p:txBody>
+          <a:bodyPr wrap="square">
+            <a:spAutoFit/>
+          </a:bodyPr>
+          <a:lstStyle/>
+          <a:p>
+            <a:r>
+              <a:rPr lang="en-US" sz="1800" dirty="0">
+                <a:highlight>
+                  <a:srgbClr val="FFFF00"/>
+                </a:highlight>
+              </a:rPr>
+              <a:t>1/5</a:t>
+            </a:r>
+            <a:endParaRPr lang="en-US" dirty="0"/>
+          </a:p>
+        </p:txBody>
+      </p:sp>
+      <p:sp>
+        <p:nvSpPr>
           <p:cNvPr id="2" name="Date Placeholder 1">
             <a:extLst>
               <a:ext uri="{FF2B5EF4-FFF2-40B4-BE49-F238E27FC236}">
@@ -15756,7 +16846,7 @@
           <a:p>
             <a:fld id="{6700A58B-DD98-43D0-B791-721480A02982}" type="datetime1">
               <a:rPr lang="en-US" smtClean="0"/>
-              <a:t>6/26/25</a:t>
+              <a:t>6/11/26</a:t>
             </a:fld>
             <a:endParaRPr lang="en-US"/>
           </a:p>
@@ -16296,7 +17386,7 @@
           <a:lstStyle/>
           <a:p>
             <a:pPr algn="ctr"/>
-            <a:endParaRPr lang="en-US"/>
+            <a:endParaRPr lang="en-US" dirty="0"/>
           </a:p>
         </p:txBody>
       </p:sp>
@@ -16342,10 +17432,10 @@
       </p:sp>
       <p:sp>
         <p:nvSpPr>
-          <p:cNvPr id="13" name="TextBox 12">
-            <a:extLst>
-              <a:ext uri="{FF2B5EF4-FFF2-40B4-BE49-F238E27FC236}">
-                <a16:creationId xmlns:a16="http://schemas.microsoft.com/office/drawing/2014/main" id="{5B43FDD6-9672-0D3E-9B33-2C1F8A709180}"/>
+          <p:cNvPr id="9" name="TextBox 8">
+            <a:extLst>
+              <a:ext uri="{FF2B5EF4-FFF2-40B4-BE49-F238E27FC236}">
+                <a16:creationId xmlns:a16="http://schemas.microsoft.com/office/drawing/2014/main" id="{C9963624-CBBB-8C9D-78C9-ED382C4DF69B}"/>
               </a:ext>
             </a:extLst>
           </p:cNvPr>
@@ -16354,8 +17444,8 @@
         </p:nvSpPr>
         <p:spPr>
           <a:xfrm>
-            <a:off x="400050" y="4502719"/>
-            <a:ext cx="4572000" cy="369332"/>
+            <a:off x="1042642" y="4905197"/>
+            <a:ext cx="605790" cy="830997"/>
           </a:xfrm>
           <a:prstGeom prst="rect">
             <a:avLst/>
@@ -16363,183 +17453,20 @@
           <a:noFill/>
         </p:spPr>
         <p:txBody>
-          <a:bodyPr wrap="square">
+          <a:bodyPr wrap="square" rtlCol="0">
             <a:spAutoFit/>
           </a:bodyPr>
           <a:lstStyle/>
           <a:p>
-            <a:r>
-              <a:rPr lang="en-US" sz="1800" dirty="0">
-                <a:highlight>
-                  <a:srgbClr val="FFFF00"/>
-                </a:highlight>
-              </a:rPr>
-              <a:t>1/1</a:t>
-            </a:r>
-          </a:p>
-        </p:txBody>
-      </p:sp>
-      <p:sp>
-        <p:nvSpPr>
-          <p:cNvPr id="14" name="TextBox 13">
-            <a:extLst>
-              <a:ext uri="{FF2B5EF4-FFF2-40B4-BE49-F238E27FC236}">
-                <a16:creationId xmlns:a16="http://schemas.microsoft.com/office/drawing/2014/main" id="{7FA8B592-ABDE-83BA-D62D-A0B90D038873}"/>
-              </a:ext>
-            </a:extLst>
-          </p:cNvPr>
-          <p:cNvSpPr txBox="1"/>
-          <p:nvPr/>
-        </p:nvSpPr>
-        <p:spPr>
-          <a:xfrm>
-            <a:off x="400050" y="4872051"/>
-            <a:ext cx="4572000" cy="369332"/>
-          </a:xfrm>
-          <a:prstGeom prst="rect">
-            <a:avLst/>
-          </a:prstGeom>
-          <a:noFill/>
-        </p:spPr>
-        <p:txBody>
-          <a:bodyPr wrap="square">
-            <a:spAutoFit/>
-          </a:bodyPr>
-          <a:lstStyle/>
-          <a:p>
-            <a:r>
-              <a:rPr lang="en-US" sz="1800" dirty="0">
-                <a:highlight>
-                  <a:srgbClr val="FFFF00"/>
-                </a:highlight>
-              </a:rPr>
-              <a:t>1/2</a:t>
-            </a:r>
-            <a:endParaRPr lang="en-US" dirty="0"/>
-          </a:p>
-        </p:txBody>
-      </p:sp>
-      <p:sp>
-        <p:nvSpPr>
-          <p:cNvPr id="15" name="TextBox 14">
-            <a:extLst>
-              <a:ext uri="{FF2B5EF4-FFF2-40B4-BE49-F238E27FC236}">
-                <a16:creationId xmlns:a16="http://schemas.microsoft.com/office/drawing/2014/main" id="{3CA3B366-3CC7-693F-FB20-6129A0E293F2}"/>
-              </a:ext>
-            </a:extLst>
-          </p:cNvPr>
-          <p:cNvSpPr txBox="1"/>
-          <p:nvPr/>
-        </p:nvSpPr>
-        <p:spPr>
-          <a:xfrm>
-            <a:off x="400050" y="5241383"/>
-            <a:ext cx="1890974" cy="369332"/>
-          </a:xfrm>
-          <a:prstGeom prst="rect">
-            <a:avLst/>
-          </a:prstGeom>
-          <a:noFill/>
-        </p:spPr>
-        <p:txBody>
-          <a:bodyPr wrap="square">
-            <a:spAutoFit/>
-          </a:bodyPr>
-          <a:lstStyle/>
-          <a:p>
-            <a:r>
-              <a:rPr lang="en-US" sz="1800" dirty="0">
-                <a:highlight>
-                  <a:srgbClr val="FFFF00"/>
-                </a:highlight>
-              </a:rPr>
-              <a:t>1/3</a:t>
-            </a:r>
-            <a:endParaRPr lang="en-US" sz="1800" dirty="0"/>
-          </a:p>
-        </p:txBody>
-      </p:sp>
-      <p:sp>
-        <p:nvSpPr>
-          <p:cNvPr id="16" name="TextBox 15">
-            <a:extLst>
-              <a:ext uri="{FF2B5EF4-FFF2-40B4-BE49-F238E27FC236}">
-                <a16:creationId xmlns:a16="http://schemas.microsoft.com/office/drawing/2014/main" id="{C733EC8D-8398-6AA4-FB0F-67D6565A5EC5}"/>
-              </a:ext>
-            </a:extLst>
-          </p:cNvPr>
-          <p:cNvSpPr txBox="1"/>
-          <p:nvPr/>
-        </p:nvSpPr>
-        <p:spPr>
-          <a:xfrm>
-            <a:off x="400050" y="5610715"/>
-            <a:ext cx="4572000" cy="369332"/>
-          </a:xfrm>
-          <a:prstGeom prst="rect">
-            <a:avLst/>
-          </a:prstGeom>
-          <a:noFill/>
-        </p:spPr>
-        <p:txBody>
-          <a:bodyPr wrap="square">
-            <a:spAutoFit/>
-          </a:bodyPr>
-          <a:lstStyle/>
-          <a:p>
-            <a:r>
-              <a:rPr lang="en-US" sz="1800" dirty="0">
-                <a:highlight>
-                  <a:srgbClr val="FFFF00"/>
-                </a:highlight>
-              </a:rPr>
-              <a:t>1/4</a:t>
-            </a:r>
-            <a:r>
-              <a:rPr lang="en-US" sz="1800" dirty="0"/>
-              <a:t> </a:t>
-            </a:r>
-            <a:endParaRPr lang="en-US" dirty="0"/>
-          </a:p>
-        </p:txBody>
-      </p:sp>
-      <p:sp>
-        <p:nvSpPr>
-          <p:cNvPr id="17" name="TextBox 16">
-            <a:extLst>
-              <a:ext uri="{FF2B5EF4-FFF2-40B4-BE49-F238E27FC236}">
-                <a16:creationId xmlns:a16="http://schemas.microsoft.com/office/drawing/2014/main" id="{F104BF69-7B58-92AD-E817-96756D67E077}"/>
-              </a:ext>
-            </a:extLst>
-          </p:cNvPr>
-          <p:cNvSpPr txBox="1"/>
-          <p:nvPr/>
-        </p:nvSpPr>
-        <p:spPr>
-          <a:xfrm>
-            <a:off x="400050" y="5987019"/>
-            <a:ext cx="4572000" cy="369332"/>
-          </a:xfrm>
-          <a:prstGeom prst="rect">
-            <a:avLst/>
-          </a:prstGeom>
-          <a:noFill/>
-        </p:spPr>
-        <p:txBody>
-          <a:bodyPr wrap="square">
-            <a:spAutoFit/>
-          </a:bodyPr>
-          <a:lstStyle/>
-          <a:p>
-            <a:r>
-              <a:rPr lang="en-US" sz="1800" dirty="0">
-                <a:highlight>
-                  <a:srgbClr val="FFFF00"/>
-                </a:highlight>
-              </a:rPr>
-              <a:t>1/5</a:t>
-            </a:r>
-            <a:endParaRPr lang="en-US" dirty="0"/>
+            <a:pPr algn="ctr"/>
+            <a:r>
+              <a:rPr lang="en-US" sz="4800" dirty="0">
+                <a:solidFill>
+                  <a:srgbClr val="FAFAFF"/>
+                </a:solidFill>
+              </a:rPr>
+              <a:t>+</a:t>
+            </a:r>
           </a:p>
         </p:txBody>
       </p:sp>
